--- a/tool/smstokintone/docs/プレゼンテーション1.pptx
+++ b/tool/smstokintone/docs/プレゼンテーション1.pptx
@@ -47,15 +47,29 @@
     <p:sldId id="292" r:id="rId41"/>
     <p:sldId id="310" r:id="rId42"/>
     <p:sldId id="305" r:id="rId43"/>
-    <p:sldId id="306" r:id="rId44"/>
-    <p:sldId id="307" r:id="rId45"/>
-    <p:sldId id="308" r:id="rId46"/>
-    <p:sldId id="293" r:id="rId47"/>
-    <p:sldId id="294" r:id="rId48"/>
-    <p:sldId id="295" r:id="rId49"/>
-    <p:sldId id="296" r:id="rId50"/>
-    <p:sldId id="297" r:id="rId51"/>
-    <p:sldId id="298" r:id="rId52"/>
+    <p:sldId id="311" r:id="rId44"/>
+    <p:sldId id="312" r:id="rId45"/>
+    <p:sldId id="306" r:id="rId46"/>
+    <p:sldId id="313" r:id="rId47"/>
+    <p:sldId id="314" r:id="rId48"/>
+    <p:sldId id="315" r:id="rId49"/>
+    <p:sldId id="307" r:id="rId50"/>
+    <p:sldId id="316" r:id="rId51"/>
+    <p:sldId id="320" r:id="rId52"/>
+    <p:sldId id="321" r:id="rId53"/>
+    <p:sldId id="317" r:id="rId54"/>
+    <p:sldId id="322" r:id="rId55"/>
+    <p:sldId id="324" r:id="rId56"/>
+    <p:sldId id="323" r:id="rId57"/>
+    <p:sldId id="325" r:id="rId58"/>
+    <p:sldId id="319" r:id="rId59"/>
+    <p:sldId id="308" r:id="rId60"/>
+    <p:sldId id="293" r:id="rId61"/>
+    <p:sldId id="294" r:id="rId62"/>
+    <p:sldId id="295" r:id="rId63"/>
+    <p:sldId id="296" r:id="rId64"/>
+    <p:sldId id="297" r:id="rId65"/>
+    <p:sldId id="298" r:id="rId66"/>
   </p:sldIdLst>
   <p:sldSz cx="12192000" cy="6858000"/>
   <p:notesSz cx="6858000" cy="9144000"/>
@@ -154,6 +168,11 @@
       </a:defRPr>
     </a:lvl9pPr>
   </p:defaultTextStyle>
+  <p:extLst>
+    <p:ext uri="{EFAFB233-063F-42B5-8137-9DF3F51BA10A}">
+      <p15:sldGuideLst xmlns:p15="http://schemas.microsoft.com/office/powerpoint/2012/main"/>
+    </p:ext>
+  </p:extLst>
 </p:presentation>
 </file>
 
@@ -304,7 +323,7 @@
           <a:p>
             <a:fld id="{E488909A-5A47-44E5-8560-CBEAA1DE666A}" type="datetimeFigureOut">
               <a:rPr kumimoji="1" lang="ja-JP" altLang="en-US" smtClean="0"/>
-              <a:t>2026/9/4</a:t>
+              <a:t>2026/9/5</a:t>
             </a:fld>
             <a:endParaRPr kumimoji="1" lang="ja-JP" altLang="en-US"/>
           </a:p>
@@ -534,7 +553,7 @@
           <a:p>
             <a:fld id="{E488909A-5A47-44E5-8560-CBEAA1DE666A}" type="datetimeFigureOut">
               <a:rPr kumimoji="1" lang="ja-JP" altLang="en-US" smtClean="0"/>
-              <a:t>2026/9/4</a:t>
+              <a:t>2026/9/5</a:t>
             </a:fld>
             <a:endParaRPr kumimoji="1" lang="ja-JP" altLang="en-US"/>
           </a:p>
@@ -774,7 +793,7 @@
           <a:p>
             <a:fld id="{E488909A-5A47-44E5-8560-CBEAA1DE666A}" type="datetimeFigureOut">
               <a:rPr kumimoji="1" lang="ja-JP" altLang="en-US" smtClean="0"/>
-              <a:t>2026/9/4</a:t>
+              <a:t>2026/9/5</a:t>
             </a:fld>
             <a:endParaRPr kumimoji="1" lang="ja-JP" altLang="en-US"/>
           </a:p>
@@ -1004,7 +1023,7 @@
           <a:p>
             <a:fld id="{E488909A-5A47-44E5-8560-CBEAA1DE666A}" type="datetimeFigureOut">
               <a:rPr kumimoji="1" lang="ja-JP" altLang="en-US" smtClean="0"/>
-              <a:t>2026/9/4</a:t>
+              <a:t>2026/9/5</a:t>
             </a:fld>
             <a:endParaRPr kumimoji="1" lang="ja-JP" altLang="en-US"/>
           </a:p>
@@ -1279,7 +1298,7 @@
           <a:p>
             <a:fld id="{E488909A-5A47-44E5-8560-CBEAA1DE666A}" type="datetimeFigureOut">
               <a:rPr kumimoji="1" lang="ja-JP" altLang="en-US" smtClean="0"/>
-              <a:t>2026/9/4</a:t>
+              <a:t>2026/9/5</a:t>
             </a:fld>
             <a:endParaRPr kumimoji="1" lang="ja-JP" altLang="en-US"/>
           </a:p>
@@ -1608,7 +1627,7 @@
           <a:p>
             <a:fld id="{E488909A-5A47-44E5-8560-CBEAA1DE666A}" type="datetimeFigureOut">
               <a:rPr kumimoji="1" lang="ja-JP" altLang="en-US" smtClean="0"/>
-              <a:t>2026/9/4</a:t>
+              <a:t>2026/9/5</a:t>
             </a:fld>
             <a:endParaRPr kumimoji="1" lang="ja-JP" altLang="en-US"/>
           </a:p>
@@ -2084,7 +2103,7 @@
           <a:p>
             <a:fld id="{E488909A-5A47-44E5-8560-CBEAA1DE666A}" type="datetimeFigureOut">
               <a:rPr kumimoji="1" lang="ja-JP" altLang="en-US" smtClean="0"/>
-              <a:t>2026/9/4</a:t>
+              <a:t>2026/9/5</a:t>
             </a:fld>
             <a:endParaRPr kumimoji="1" lang="ja-JP" altLang="en-US"/>
           </a:p>
@@ -2225,7 +2244,7 @@
           <a:p>
             <a:fld id="{E488909A-5A47-44E5-8560-CBEAA1DE666A}" type="datetimeFigureOut">
               <a:rPr kumimoji="1" lang="ja-JP" altLang="en-US" smtClean="0"/>
-              <a:t>2026/9/4</a:t>
+              <a:t>2026/9/5</a:t>
             </a:fld>
             <a:endParaRPr kumimoji="1" lang="ja-JP" altLang="en-US"/>
           </a:p>
@@ -2338,7 +2357,7 @@
           <a:p>
             <a:fld id="{E488909A-5A47-44E5-8560-CBEAA1DE666A}" type="datetimeFigureOut">
               <a:rPr kumimoji="1" lang="ja-JP" altLang="en-US" smtClean="0"/>
-              <a:t>2026/9/4</a:t>
+              <a:t>2026/9/5</a:t>
             </a:fld>
             <a:endParaRPr kumimoji="1" lang="ja-JP" altLang="en-US"/>
           </a:p>
@@ -2681,7 +2700,7 @@
           <a:p>
             <a:fld id="{E488909A-5A47-44E5-8560-CBEAA1DE666A}" type="datetimeFigureOut">
               <a:rPr kumimoji="1" lang="ja-JP" altLang="en-US" smtClean="0"/>
-              <a:t>2026/9/4</a:t>
+              <a:t>2026/9/5</a:t>
             </a:fld>
             <a:endParaRPr kumimoji="1" lang="ja-JP" altLang="en-US"/>
           </a:p>
@@ -2969,7 +2988,7 @@
           <a:p>
             <a:fld id="{E488909A-5A47-44E5-8560-CBEAA1DE666A}" type="datetimeFigureOut">
               <a:rPr kumimoji="1" lang="ja-JP" altLang="en-US" smtClean="0"/>
-              <a:t>2026/9/4</a:t>
+              <a:t>2026/9/5</a:t>
             </a:fld>
             <a:endParaRPr kumimoji="1" lang="ja-JP" altLang="en-US"/>
           </a:p>
@@ -3242,7 +3261,7 @@
           <a:p>
             <a:fld id="{E488909A-5A47-44E5-8560-CBEAA1DE666A}" type="datetimeFigureOut">
               <a:rPr kumimoji="1" lang="ja-JP" altLang="en-US" smtClean="0"/>
-              <a:t>2026/9/4</a:t>
+              <a:t>2026/9/5</a:t>
             </a:fld>
             <a:endParaRPr kumimoji="1" lang="ja-JP" altLang="en-US"/>
           </a:p>
@@ -5960,7 +5979,7 @@
         </p:blipFill>
         <p:spPr>
           <a:xfrm>
-            <a:off x="136525" y="1198562"/>
+            <a:off x="4927185" y="1378592"/>
             <a:ext cx="3486150" cy="1819275"/>
           </a:xfrm>
           <a:prstGeom prst="rect">
@@ -5968,146 +5987,6 @@
           </a:prstGeom>
         </p:spPr>
       </p:pic>
-      <p:sp>
-        <p:nvSpPr>
-          <p:cNvPr id="70" name="正方形/長方形 69">
-            <a:extLst>
-              <a:ext uri="{FF2B5EF4-FFF2-40B4-BE49-F238E27FC236}">
-                <a16:creationId xmlns:a16="http://schemas.microsoft.com/office/drawing/2014/main" id="{CDA754EF-F028-5103-7E73-18C45CE2E429}"/>
-              </a:ext>
-            </a:extLst>
-          </p:cNvPr>
-          <p:cNvSpPr/>
-          <p:nvPr/>
-        </p:nvSpPr>
-        <p:spPr>
-          <a:xfrm>
-            <a:off x="939797" y="1388531"/>
-            <a:ext cx="1800000" cy="720000"/>
-          </a:xfrm>
-          <a:prstGeom prst="rect">
-            <a:avLst/>
-          </a:prstGeom>
-          <a:noFill/>
-          <a:ln w="28575">
-            <a:solidFill>
-              <a:srgbClr val="FF0000"/>
-            </a:solidFill>
-          </a:ln>
-        </p:spPr>
-        <p:style>
-          <a:lnRef idx="2">
-            <a:schemeClr val="accent1">
-              <a:shade val="15000"/>
-            </a:schemeClr>
-          </a:lnRef>
-          <a:fillRef idx="1">
-            <a:schemeClr val="accent1"/>
-          </a:fillRef>
-          <a:effectRef idx="0">
-            <a:schemeClr val="accent1"/>
-          </a:effectRef>
-          <a:fontRef idx="minor">
-            <a:schemeClr val="lt1"/>
-          </a:fontRef>
-        </p:style>
-        <p:txBody>
-          <a:bodyPr rtlCol="0" anchor="ctr"/>
-          <a:lstStyle/>
-          <a:p>
-            <a:pPr algn="ctr"/>
-            <a:endParaRPr kumimoji="1" lang="ja-JP" altLang="en-US"/>
-          </a:p>
-        </p:txBody>
-      </p:sp>
-      <p:pic>
-        <p:nvPicPr>
-          <p:cNvPr id="72" name="図 71">
-            <a:extLst>
-              <a:ext uri="{FF2B5EF4-FFF2-40B4-BE49-F238E27FC236}">
-                <a16:creationId xmlns:a16="http://schemas.microsoft.com/office/drawing/2014/main" id="{81C1A46F-ABD4-5BF1-142E-55DE79AF83E0}"/>
-              </a:ext>
-            </a:extLst>
-          </p:cNvPr>
-          <p:cNvPicPr>
-            <a:picLocks noChangeAspect="1"/>
-          </p:cNvPicPr>
-          <p:nvPr/>
-        </p:nvPicPr>
-        <p:blipFill>
-          <a:blip r:embed="rId2">
-            <a:extLst>
-              <a:ext uri="{28A0092B-C50C-407E-A947-70E740481C1C}">
-                <a14:useLocalDpi xmlns:a14="http://schemas.microsoft.com/office/drawing/2010/main" val="0"/>
-              </a:ext>
-            </a:extLst>
-          </a:blip>
-          <a:stretch>
-            <a:fillRect/>
-          </a:stretch>
-        </p:blipFill>
-        <p:spPr>
-          <a:xfrm>
-            <a:off x="136525" y="3207806"/>
-            <a:ext cx="3486150" cy="1819275"/>
-          </a:xfrm>
-          <a:prstGeom prst="rect">
-            <a:avLst/>
-          </a:prstGeom>
-        </p:spPr>
-      </p:pic>
-      <p:sp>
-        <p:nvSpPr>
-          <p:cNvPr id="73" name="正方形/長方形 72">
-            <a:extLst>
-              <a:ext uri="{FF2B5EF4-FFF2-40B4-BE49-F238E27FC236}">
-                <a16:creationId xmlns:a16="http://schemas.microsoft.com/office/drawing/2014/main" id="{B82D7ECA-4C3E-66C1-1F63-26E177BA7BA3}"/>
-              </a:ext>
-            </a:extLst>
-          </p:cNvPr>
-          <p:cNvSpPr/>
-          <p:nvPr/>
-        </p:nvSpPr>
-        <p:spPr>
-          <a:xfrm>
-            <a:off x="939797" y="4142844"/>
-            <a:ext cx="1800000" cy="720000"/>
-          </a:xfrm>
-          <a:prstGeom prst="rect">
-            <a:avLst/>
-          </a:prstGeom>
-          <a:noFill/>
-          <a:ln w="28575">
-            <a:solidFill>
-              <a:srgbClr val="FF0000"/>
-            </a:solidFill>
-          </a:ln>
-        </p:spPr>
-        <p:style>
-          <a:lnRef idx="2">
-            <a:schemeClr val="accent1">
-              <a:shade val="15000"/>
-            </a:schemeClr>
-          </a:lnRef>
-          <a:fillRef idx="1">
-            <a:schemeClr val="accent1"/>
-          </a:fillRef>
-          <a:effectRef idx="0">
-            <a:schemeClr val="accent1"/>
-          </a:effectRef>
-          <a:fontRef idx="minor">
-            <a:schemeClr val="lt1"/>
-          </a:fontRef>
-        </p:style>
-        <p:txBody>
-          <a:bodyPr rtlCol="0" anchor="ctr"/>
-          <a:lstStyle/>
-          <a:p>
-            <a:pPr algn="ctr"/>
-            <a:endParaRPr kumimoji="1" lang="ja-JP" altLang="en-US"/>
-          </a:p>
-        </p:txBody>
-      </p:sp>
     </p:spTree>
     <p:extLst>
       <p:ext uri="{BB962C8B-B14F-4D97-AF65-F5344CB8AC3E}">
@@ -7456,10 +7335,10 @@
       </p:grpSpPr>
       <p:pic>
         <p:nvPicPr>
-          <p:cNvPr id="2" name="図 1">
-            <a:extLst>
-              <a:ext uri="{FF2B5EF4-FFF2-40B4-BE49-F238E27FC236}">
-                <a16:creationId xmlns:a16="http://schemas.microsoft.com/office/drawing/2014/main" id="{A36EBA46-EEDA-D0CB-7D75-569EDC41C11A}"/>
+          <p:cNvPr id="4" name="図 3">
+            <a:extLst>
+              <a:ext uri="{FF2B5EF4-FFF2-40B4-BE49-F238E27FC236}">
+                <a16:creationId xmlns:a16="http://schemas.microsoft.com/office/drawing/2014/main" id="{21B7BBC0-1B0F-724D-FCD6-D48003A3C2EB}"/>
               </a:ext>
             </a:extLst>
           </p:cNvPr>
@@ -7482,66 +7361,14 @@
         </p:blipFill>
         <p:spPr>
           <a:xfrm>
-            <a:off x="4433827" y="0"/>
-            <a:ext cx="3324345" cy="6858000"/>
+            <a:off x="3279498" y="1895061"/>
+            <a:ext cx="3028950" cy="2590800"/>
           </a:xfrm>
           <a:prstGeom prst="rect">
             <a:avLst/>
           </a:prstGeom>
         </p:spPr>
       </p:pic>
-      <p:sp>
-        <p:nvSpPr>
-          <p:cNvPr id="70" name="正方形/長方形 69">
-            <a:extLst>
-              <a:ext uri="{FF2B5EF4-FFF2-40B4-BE49-F238E27FC236}">
-                <a16:creationId xmlns:a16="http://schemas.microsoft.com/office/drawing/2014/main" id="{6A7922AC-AF57-4E2F-B4DB-563E2FB7CB17}"/>
-              </a:ext>
-            </a:extLst>
-          </p:cNvPr>
-          <p:cNvSpPr/>
-          <p:nvPr/>
-        </p:nvSpPr>
-        <p:spPr>
-          <a:xfrm>
-            <a:off x="4566063" y="2192864"/>
-            <a:ext cx="3087803" cy="2658535"/>
-          </a:xfrm>
-          <a:prstGeom prst="rect">
-            <a:avLst/>
-          </a:prstGeom>
-          <a:noFill/>
-          <a:ln w="28575">
-            <a:solidFill>
-              <a:srgbClr val="FF0000"/>
-            </a:solidFill>
-          </a:ln>
-        </p:spPr>
-        <p:style>
-          <a:lnRef idx="2">
-            <a:schemeClr val="accent1">
-              <a:shade val="15000"/>
-            </a:schemeClr>
-          </a:lnRef>
-          <a:fillRef idx="1">
-            <a:schemeClr val="accent1"/>
-          </a:fillRef>
-          <a:effectRef idx="0">
-            <a:schemeClr val="accent1"/>
-          </a:effectRef>
-          <a:fontRef idx="minor">
-            <a:schemeClr val="lt1"/>
-          </a:fontRef>
-        </p:style>
-        <p:txBody>
-          <a:bodyPr rtlCol="0" anchor="ctr"/>
-          <a:lstStyle/>
-          <a:p>
-            <a:pPr algn="ctr"/>
-            <a:endParaRPr kumimoji="1" lang="ja-JP" altLang="en-US"/>
-          </a:p>
-        </p:txBody>
-      </p:sp>
     </p:spTree>
     <p:extLst>
       <p:ext uri="{BB962C8B-B14F-4D97-AF65-F5344CB8AC3E}">
@@ -7888,10 +7715,10 @@
       </p:grpSpPr>
       <p:pic>
         <p:nvPicPr>
-          <p:cNvPr id="3" name="図 2">
-            <a:extLst>
-              <a:ext uri="{FF2B5EF4-FFF2-40B4-BE49-F238E27FC236}">
-                <a16:creationId xmlns:a16="http://schemas.microsoft.com/office/drawing/2014/main" id="{A248DABA-F060-682F-D46B-5EA93A883DE8}"/>
+          <p:cNvPr id="11" name="図 10">
+            <a:extLst>
+              <a:ext uri="{FF2B5EF4-FFF2-40B4-BE49-F238E27FC236}">
+                <a16:creationId xmlns:a16="http://schemas.microsoft.com/office/drawing/2014/main" id="{D3526D83-1AB8-4F82-EF18-D1EF678391A9}"/>
               </a:ext>
             </a:extLst>
           </p:cNvPr>
@@ -7914,8 +7741,44 @@
         </p:blipFill>
         <p:spPr>
           <a:xfrm>
-            <a:off x="4819650" y="1240291"/>
-            <a:ext cx="2552700" cy="6124575"/>
+            <a:off x="2392519" y="1514684"/>
+            <a:ext cx="2371725" cy="2695575"/>
+          </a:xfrm>
+          <a:prstGeom prst="rect">
+            <a:avLst/>
+          </a:prstGeom>
+        </p:spPr>
+      </p:pic>
+      <p:pic>
+        <p:nvPicPr>
+          <p:cNvPr id="13" name="図 12">
+            <a:extLst>
+              <a:ext uri="{FF2B5EF4-FFF2-40B4-BE49-F238E27FC236}">
+                <a16:creationId xmlns:a16="http://schemas.microsoft.com/office/drawing/2014/main" id="{BABDD248-C57C-2741-429B-5D6B820AA6B1}"/>
+              </a:ext>
+            </a:extLst>
+          </p:cNvPr>
+          <p:cNvPicPr>
+            <a:picLocks noChangeAspect="1"/>
+          </p:cNvPicPr>
+          <p:nvPr/>
+        </p:nvPicPr>
+        <p:blipFill>
+          <a:blip r:embed="rId3">
+            <a:extLst>
+              <a:ext uri="{28A0092B-C50C-407E-A947-70E740481C1C}">
+                <a14:useLocalDpi xmlns:a14="http://schemas.microsoft.com/office/drawing/2010/main" val="0"/>
+              </a:ext>
+            </a:extLst>
+          </a:blip>
+          <a:stretch>
+            <a:fillRect/>
+          </a:stretch>
+        </p:blipFill>
+        <p:spPr>
+          <a:xfrm>
+            <a:off x="4764244" y="1514684"/>
+            <a:ext cx="2324100" cy="4495800"/>
           </a:xfrm>
           <a:prstGeom prst="rect">
             <a:avLst/>
@@ -7936,8 +7799,8 @@
         </p:nvSpPr>
         <p:spPr>
           <a:xfrm flipV="1">
-            <a:off x="5007963" y="1665514"/>
-            <a:ext cx="2250088" cy="2498272"/>
+            <a:off x="2545999" y="1864296"/>
+            <a:ext cx="2064766" cy="1137321"/>
           </a:xfrm>
           <a:prstGeom prst="rect">
             <a:avLst/>
@@ -7976,10 +7839,10 @@
       </p:sp>
       <p:pic>
         <p:nvPicPr>
-          <p:cNvPr id="8" name="図 7">
-            <a:extLst>
-              <a:ext uri="{FF2B5EF4-FFF2-40B4-BE49-F238E27FC236}">
-                <a16:creationId xmlns:a16="http://schemas.microsoft.com/office/drawing/2014/main" id="{6BBF033D-CC0D-5DFA-78D7-8305D4E6AF10}"/>
+          <p:cNvPr id="15" name="図 14">
+            <a:extLst>
+              <a:ext uri="{FF2B5EF4-FFF2-40B4-BE49-F238E27FC236}">
+                <a16:creationId xmlns:a16="http://schemas.microsoft.com/office/drawing/2014/main" id="{56AE47C3-BB1C-07A9-26A0-D79A8A79A444}"/>
               </a:ext>
             </a:extLst>
           </p:cNvPr>
@@ -7989,57 +7852,15 @@
           <p:nvPr/>
         </p:nvPicPr>
         <p:blipFill>
-          <a:blip r:embed="rId3">
-            <a:extLst>
-              <a:ext uri="{28A0092B-C50C-407E-A947-70E740481C1C}">
-                <a14:useLocalDpi xmlns:a14="http://schemas.microsoft.com/office/drawing/2010/main" val="0"/>
-              </a:ext>
-            </a:extLst>
-          </a:blip>
+          <a:blip r:embed="rId4"/>
           <a:stretch>
             <a:fillRect/>
           </a:stretch>
         </p:blipFill>
         <p:spPr>
           <a:xfrm>
-            <a:off x="5406010" y="661307"/>
-            <a:ext cx="3045493" cy="6858000"/>
-          </a:xfrm>
-          <a:prstGeom prst="rect">
-            <a:avLst/>
-          </a:prstGeom>
-        </p:spPr>
-      </p:pic>
-      <p:pic>
-        <p:nvPicPr>
-          <p:cNvPr id="10" name="図 9">
-            <a:extLst>
-              <a:ext uri="{FF2B5EF4-FFF2-40B4-BE49-F238E27FC236}">
-                <a16:creationId xmlns:a16="http://schemas.microsoft.com/office/drawing/2014/main" id="{707EE898-5C64-C0F9-D72E-8E0A83068947}"/>
-              </a:ext>
-            </a:extLst>
-          </p:cNvPr>
-          <p:cNvPicPr>
-            <a:picLocks noChangeAspect="1"/>
-          </p:cNvPicPr>
-          <p:nvPr/>
-        </p:nvPicPr>
-        <p:blipFill>
-          <a:blip r:embed="rId4">
-            <a:extLst>
-              <a:ext uri="{28A0092B-C50C-407E-A947-70E740481C1C}">
-                <a14:useLocalDpi xmlns:a14="http://schemas.microsoft.com/office/drawing/2010/main" val="0"/>
-              </a:ext>
-            </a:extLst>
-          </a:blip>
-          <a:stretch>
-            <a:fillRect/>
-          </a:stretch>
-        </p:blipFill>
-        <p:spPr>
-          <a:xfrm>
-            <a:off x="1774157" y="-293915"/>
-            <a:ext cx="3045493" cy="6858000"/>
+            <a:off x="3745788" y="1179381"/>
+            <a:ext cx="4700423" cy="4499238"/>
           </a:xfrm>
           <a:prstGeom prst="rect">
             <a:avLst/>
@@ -8067,6 +7888,356 @@
         <p:cNvPr id="1" name="">
           <a:extLst>
             <a:ext uri="{FF2B5EF4-FFF2-40B4-BE49-F238E27FC236}">
+              <a16:creationId xmlns:a16="http://schemas.microsoft.com/office/drawing/2014/main" id="{32106E17-50B7-BBBD-3970-8205EE6A7B50}"/>
+            </a:ext>
+          </a:extLst>
+        </p:cNvPr>
+        <p:cNvGrpSpPr/>
+        <p:nvPr/>
+      </p:nvGrpSpPr>
+      <p:grpSpPr>
+        <a:xfrm>
+          <a:off x="0" y="0"/>
+          <a:ext cx="0" cy="0"/>
+          <a:chOff x="0" y="0"/>
+          <a:chExt cx="0" cy="0"/>
+        </a:xfrm>
+      </p:grpSpPr>
+      <p:pic>
+        <p:nvPicPr>
+          <p:cNvPr id="11" name="図 10">
+            <a:extLst>
+              <a:ext uri="{FF2B5EF4-FFF2-40B4-BE49-F238E27FC236}">
+                <a16:creationId xmlns:a16="http://schemas.microsoft.com/office/drawing/2014/main" id="{561EA138-D025-67D3-3031-2C3B1455D37B}"/>
+              </a:ext>
+            </a:extLst>
+          </p:cNvPr>
+          <p:cNvPicPr>
+            <a:picLocks noChangeAspect="1"/>
+          </p:cNvPicPr>
+          <p:nvPr/>
+        </p:nvPicPr>
+        <p:blipFill>
+          <a:blip r:embed="rId2">
+            <a:extLst>
+              <a:ext uri="{28A0092B-C50C-407E-A947-70E740481C1C}">
+                <a14:useLocalDpi xmlns:a14="http://schemas.microsoft.com/office/drawing/2010/main" val="0"/>
+              </a:ext>
+            </a:extLst>
+          </a:blip>
+          <a:stretch>
+            <a:fillRect/>
+          </a:stretch>
+        </p:blipFill>
+        <p:spPr>
+          <a:xfrm>
+            <a:off x="2392519" y="1514684"/>
+            <a:ext cx="2371725" cy="2695575"/>
+          </a:xfrm>
+          <a:prstGeom prst="rect">
+            <a:avLst/>
+          </a:prstGeom>
+        </p:spPr>
+      </p:pic>
+      <p:pic>
+        <p:nvPicPr>
+          <p:cNvPr id="13" name="図 12">
+            <a:extLst>
+              <a:ext uri="{FF2B5EF4-FFF2-40B4-BE49-F238E27FC236}">
+                <a16:creationId xmlns:a16="http://schemas.microsoft.com/office/drawing/2014/main" id="{0D4C0D31-B4EA-0E1C-18E2-2811FE2B6C50}"/>
+              </a:ext>
+            </a:extLst>
+          </p:cNvPr>
+          <p:cNvPicPr>
+            <a:picLocks noChangeAspect="1"/>
+          </p:cNvPicPr>
+          <p:nvPr/>
+        </p:nvPicPr>
+        <p:blipFill>
+          <a:blip r:embed="rId3">
+            <a:extLst>
+              <a:ext uri="{28A0092B-C50C-407E-A947-70E740481C1C}">
+                <a14:useLocalDpi xmlns:a14="http://schemas.microsoft.com/office/drawing/2010/main" val="0"/>
+              </a:ext>
+            </a:extLst>
+          </a:blip>
+          <a:stretch>
+            <a:fillRect/>
+          </a:stretch>
+        </p:blipFill>
+        <p:spPr>
+          <a:xfrm>
+            <a:off x="4764244" y="1514684"/>
+            <a:ext cx="2324100" cy="4495800"/>
+          </a:xfrm>
+          <a:prstGeom prst="rect">
+            <a:avLst/>
+          </a:prstGeom>
+        </p:spPr>
+      </p:pic>
+      <p:sp>
+        <p:nvSpPr>
+          <p:cNvPr id="4" name="正方形/長方形 3">
+            <a:extLst>
+              <a:ext uri="{FF2B5EF4-FFF2-40B4-BE49-F238E27FC236}">
+                <a16:creationId xmlns:a16="http://schemas.microsoft.com/office/drawing/2014/main" id="{D4F71A8F-67DA-ECBA-6646-3E1A4BDBBB76}"/>
+              </a:ext>
+            </a:extLst>
+          </p:cNvPr>
+          <p:cNvSpPr/>
+          <p:nvPr/>
+        </p:nvSpPr>
+        <p:spPr>
+          <a:xfrm flipV="1">
+            <a:off x="2545999" y="2987418"/>
+            <a:ext cx="2064766" cy="1137321"/>
+          </a:xfrm>
+          <a:prstGeom prst="rect">
+            <a:avLst/>
+          </a:prstGeom>
+          <a:noFill/>
+          <a:ln w="28575">
+            <a:solidFill>
+              <a:srgbClr val="FF0000"/>
+            </a:solidFill>
+          </a:ln>
+        </p:spPr>
+        <p:style>
+          <a:lnRef idx="2">
+            <a:schemeClr val="accent1">
+              <a:shade val="15000"/>
+            </a:schemeClr>
+          </a:lnRef>
+          <a:fillRef idx="1">
+            <a:schemeClr val="accent1"/>
+          </a:fillRef>
+          <a:effectRef idx="0">
+            <a:schemeClr val="accent1"/>
+          </a:effectRef>
+          <a:fontRef idx="minor">
+            <a:schemeClr val="lt1"/>
+          </a:fontRef>
+        </p:style>
+        <p:txBody>
+          <a:bodyPr rtlCol="0" anchor="ctr"/>
+          <a:lstStyle/>
+          <a:p>
+            <a:pPr algn="ctr"/>
+            <a:endParaRPr kumimoji="1" lang="ja-JP" altLang="en-US"/>
+          </a:p>
+        </p:txBody>
+      </p:sp>
+      <p:pic>
+        <p:nvPicPr>
+          <p:cNvPr id="2" name="図 1">
+            <a:extLst>
+              <a:ext uri="{FF2B5EF4-FFF2-40B4-BE49-F238E27FC236}">
+                <a16:creationId xmlns:a16="http://schemas.microsoft.com/office/drawing/2014/main" id="{19150882-7D0A-BC00-7214-FE8715052713}"/>
+              </a:ext>
+            </a:extLst>
+          </p:cNvPr>
+          <p:cNvPicPr>
+            <a:picLocks noChangeAspect="1"/>
+          </p:cNvPicPr>
+          <p:nvPr/>
+        </p:nvPicPr>
+        <p:blipFill>
+          <a:blip r:embed="rId4"/>
+          <a:stretch>
+            <a:fillRect/>
+          </a:stretch>
+        </p:blipFill>
+        <p:spPr>
+          <a:xfrm>
+            <a:off x="3745788" y="1179381"/>
+            <a:ext cx="4700423" cy="4499238"/>
+          </a:xfrm>
+          <a:prstGeom prst="rect">
+            <a:avLst/>
+          </a:prstGeom>
+        </p:spPr>
+      </p:pic>
+    </p:spTree>
+    <p:extLst>
+      <p:ext uri="{BB962C8B-B14F-4D97-AF65-F5344CB8AC3E}">
+        <p14:creationId xmlns:p14="http://schemas.microsoft.com/office/powerpoint/2010/main" val="356646274"/>
+      </p:ext>
+    </p:extLst>
+  </p:cSld>
+  <p:clrMapOvr>
+    <a:masterClrMapping/>
+  </p:clrMapOvr>
+</p:sld>
+</file>
+
+<file path=ppt/slides/slide44.xml><?xml version="1.0" encoding="utf-8"?>
+<p:sld xmlns:a="http://schemas.openxmlformats.org/drawingml/2006/main" xmlns:r="http://schemas.openxmlformats.org/officeDocument/2006/relationships" xmlns:p="http://schemas.openxmlformats.org/presentationml/2006/main">
+  <p:cSld>
+    <p:spTree>
+      <p:nvGrpSpPr>
+        <p:cNvPr id="1" name="">
+          <a:extLst>
+            <a:ext uri="{FF2B5EF4-FFF2-40B4-BE49-F238E27FC236}">
+              <a16:creationId xmlns:a16="http://schemas.microsoft.com/office/drawing/2014/main" id="{87E3514F-4ABB-2B34-7A7B-44733981B419}"/>
+            </a:ext>
+          </a:extLst>
+        </p:cNvPr>
+        <p:cNvGrpSpPr/>
+        <p:nvPr/>
+      </p:nvGrpSpPr>
+      <p:grpSpPr>
+        <a:xfrm>
+          <a:off x="0" y="0"/>
+          <a:ext cx="0" cy="0"/>
+          <a:chOff x="0" y="0"/>
+          <a:chExt cx="0" cy="0"/>
+        </a:xfrm>
+      </p:grpSpPr>
+      <p:pic>
+        <p:nvPicPr>
+          <p:cNvPr id="11" name="図 10">
+            <a:extLst>
+              <a:ext uri="{FF2B5EF4-FFF2-40B4-BE49-F238E27FC236}">
+                <a16:creationId xmlns:a16="http://schemas.microsoft.com/office/drawing/2014/main" id="{5BAA0F64-C621-5093-DDC2-41906EC9C69C}"/>
+              </a:ext>
+            </a:extLst>
+          </p:cNvPr>
+          <p:cNvPicPr>
+            <a:picLocks noChangeAspect="1"/>
+          </p:cNvPicPr>
+          <p:nvPr/>
+        </p:nvPicPr>
+        <p:blipFill>
+          <a:blip r:embed="rId2">
+            <a:extLst>
+              <a:ext uri="{28A0092B-C50C-407E-A947-70E740481C1C}">
+                <a14:useLocalDpi xmlns:a14="http://schemas.microsoft.com/office/drawing/2010/main" val="0"/>
+              </a:ext>
+            </a:extLst>
+          </a:blip>
+          <a:stretch>
+            <a:fillRect/>
+          </a:stretch>
+        </p:blipFill>
+        <p:spPr>
+          <a:xfrm>
+            <a:off x="2392519" y="1514684"/>
+            <a:ext cx="2371725" cy="2695575"/>
+          </a:xfrm>
+          <a:prstGeom prst="rect">
+            <a:avLst/>
+          </a:prstGeom>
+        </p:spPr>
+      </p:pic>
+      <p:pic>
+        <p:nvPicPr>
+          <p:cNvPr id="13" name="図 12">
+            <a:extLst>
+              <a:ext uri="{FF2B5EF4-FFF2-40B4-BE49-F238E27FC236}">
+                <a16:creationId xmlns:a16="http://schemas.microsoft.com/office/drawing/2014/main" id="{DAB87FA6-BB56-94B8-533A-64ECDF07EC7B}"/>
+              </a:ext>
+            </a:extLst>
+          </p:cNvPr>
+          <p:cNvPicPr>
+            <a:picLocks noChangeAspect="1"/>
+          </p:cNvPicPr>
+          <p:nvPr/>
+        </p:nvPicPr>
+        <p:blipFill>
+          <a:blip r:embed="rId3">
+            <a:extLst>
+              <a:ext uri="{28A0092B-C50C-407E-A947-70E740481C1C}">
+                <a14:useLocalDpi xmlns:a14="http://schemas.microsoft.com/office/drawing/2010/main" val="0"/>
+              </a:ext>
+            </a:extLst>
+          </a:blip>
+          <a:stretch>
+            <a:fillRect/>
+          </a:stretch>
+        </p:blipFill>
+        <p:spPr>
+          <a:xfrm>
+            <a:off x="4764244" y="1514684"/>
+            <a:ext cx="2324100" cy="4495800"/>
+          </a:xfrm>
+          <a:prstGeom prst="rect">
+            <a:avLst/>
+          </a:prstGeom>
+        </p:spPr>
+      </p:pic>
+      <p:sp>
+        <p:nvSpPr>
+          <p:cNvPr id="4" name="正方形/長方形 3">
+            <a:extLst>
+              <a:ext uri="{FF2B5EF4-FFF2-40B4-BE49-F238E27FC236}">
+                <a16:creationId xmlns:a16="http://schemas.microsoft.com/office/drawing/2014/main" id="{24916213-0B71-C464-4368-125A0D55F154}"/>
+              </a:ext>
+            </a:extLst>
+          </p:cNvPr>
+          <p:cNvSpPr/>
+          <p:nvPr/>
+        </p:nvSpPr>
+        <p:spPr>
+          <a:xfrm flipV="1">
+            <a:off x="4893911" y="1514683"/>
+            <a:ext cx="2064766" cy="4369281"/>
+          </a:xfrm>
+          <a:prstGeom prst="rect">
+            <a:avLst/>
+          </a:prstGeom>
+          <a:noFill/>
+          <a:ln w="28575">
+            <a:solidFill>
+              <a:srgbClr val="FF0000"/>
+            </a:solidFill>
+          </a:ln>
+        </p:spPr>
+        <p:style>
+          <a:lnRef idx="2">
+            <a:schemeClr val="accent1">
+              <a:shade val="15000"/>
+            </a:schemeClr>
+          </a:lnRef>
+          <a:fillRef idx="1">
+            <a:schemeClr val="accent1"/>
+          </a:fillRef>
+          <a:effectRef idx="0">
+            <a:schemeClr val="accent1"/>
+          </a:effectRef>
+          <a:fontRef idx="minor">
+            <a:schemeClr val="lt1"/>
+          </a:fontRef>
+        </p:style>
+        <p:txBody>
+          <a:bodyPr rtlCol="0" anchor="ctr"/>
+          <a:lstStyle/>
+          <a:p>
+            <a:pPr algn="ctr"/>
+            <a:endParaRPr kumimoji="1" lang="ja-JP" altLang="en-US"/>
+          </a:p>
+        </p:txBody>
+      </p:sp>
+    </p:spTree>
+    <p:extLst>
+      <p:ext uri="{BB962C8B-B14F-4D97-AF65-F5344CB8AC3E}">
+        <p14:creationId xmlns:p14="http://schemas.microsoft.com/office/powerpoint/2010/main" val="1923588157"/>
+      </p:ext>
+    </p:extLst>
+  </p:cSld>
+  <p:clrMapOvr>
+    <a:masterClrMapping/>
+  </p:clrMapOvr>
+</p:sld>
+</file>
+
+<file path=ppt/slides/slide45.xml><?xml version="1.0" encoding="utf-8"?>
+<p:sld xmlns:a="http://schemas.openxmlformats.org/drawingml/2006/main" xmlns:r="http://schemas.openxmlformats.org/officeDocument/2006/relationships" xmlns:p="http://schemas.openxmlformats.org/presentationml/2006/main">
+  <p:cSld>
+    <p:spTree>
+      <p:nvGrpSpPr>
+        <p:cNvPr id="1" name="">
+          <a:extLst>
+            <a:ext uri="{FF2B5EF4-FFF2-40B4-BE49-F238E27FC236}">
               <a16:creationId xmlns:a16="http://schemas.microsoft.com/office/drawing/2014/main" id="{74F8339E-D0C9-16BC-4916-9E8032F4E24A}"/>
             </a:ext>
           </a:extLst>
@@ -8082,6 +8253,124 @@
           <a:chExt cx="0" cy="0"/>
         </a:xfrm>
       </p:grpSpPr>
+      <p:pic>
+        <p:nvPicPr>
+          <p:cNvPr id="5" name="図 4">
+            <a:extLst>
+              <a:ext uri="{FF2B5EF4-FFF2-40B4-BE49-F238E27FC236}">
+                <a16:creationId xmlns:a16="http://schemas.microsoft.com/office/drawing/2014/main" id="{4A0D055B-11A0-377F-3017-951754335A71}"/>
+              </a:ext>
+            </a:extLst>
+          </p:cNvPr>
+          <p:cNvPicPr>
+            <a:picLocks noChangeAspect="1"/>
+          </p:cNvPicPr>
+          <p:nvPr/>
+        </p:nvPicPr>
+        <p:blipFill>
+          <a:blip r:embed="rId2">
+            <a:extLst>
+              <a:ext uri="{28A0092B-C50C-407E-A947-70E740481C1C}">
+                <a14:useLocalDpi xmlns:a14="http://schemas.microsoft.com/office/drawing/2010/main" val="0"/>
+              </a:ext>
+            </a:extLst>
+          </a:blip>
+          <a:stretch>
+            <a:fillRect/>
+          </a:stretch>
+        </p:blipFill>
+        <p:spPr>
+          <a:xfrm>
+            <a:off x="4572000" y="600456"/>
+            <a:ext cx="2714625" cy="5038344"/>
+          </a:xfrm>
+          <a:prstGeom prst="rect">
+            <a:avLst/>
+          </a:prstGeom>
+        </p:spPr>
+      </p:pic>
+      <p:sp>
+        <p:nvSpPr>
+          <p:cNvPr id="6" name="正方形/長方形 5">
+            <a:extLst>
+              <a:ext uri="{FF2B5EF4-FFF2-40B4-BE49-F238E27FC236}">
+                <a16:creationId xmlns:a16="http://schemas.microsoft.com/office/drawing/2014/main" id="{3FE8B0A3-BB58-866A-42BB-8770FBA77F66}"/>
+              </a:ext>
+            </a:extLst>
+          </p:cNvPr>
+          <p:cNvSpPr/>
+          <p:nvPr/>
+        </p:nvSpPr>
+        <p:spPr>
+          <a:xfrm flipV="1">
+            <a:off x="4896928" y="1057482"/>
+            <a:ext cx="2239367" cy="1317970"/>
+          </a:xfrm>
+          <a:prstGeom prst="rect">
+            <a:avLst/>
+          </a:prstGeom>
+          <a:noFill/>
+          <a:ln w="28575">
+            <a:solidFill>
+              <a:srgbClr val="FF0000"/>
+            </a:solidFill>
+          </a:ln>
+        </p:spPr>
+        <p:style>
+          <a:lnRef idx="2">
+            <a:schemeClr val="accent1">
+              <a:shade val="15000"/>
+            </a:schemeClr>
+          </a:lnRef>
+          <a:fillRef idx="1">
+            <a:schemeClr val="accent1"/>
+          </a:fillRef>
+          <a:effectRef idx="0">
+            <a:schemeClr val="accent1"/>
+          </a:effectRef>
+          <a:fontRef idx="minor">
+            <a:schemeClr val="lt1"/>
+          </a:fontRef>
+        </p:style>
+        <p:txBody>
+          <a:bodyPr rtlCol="0" anchor="ctr"/>
+          <a:lstStyle/>
+          <a:p>
+            <a:pPr algn="ctr"/>
+            <a:endParaRPr kumimoji="1" lang="ja-JP" altLang="en-US"/>
+          </a:p>
+        </p:txBody>
+      </p:sp>
+      <p:pic>
+        <p:nvPicPr>
+          <p:cNvPr id="7" name="図 6">
+            <a:extLst>
+              <a:ext uri="{FF2B5EF4-FFF2-40B4-BE49-F238E27FC236}">
+                <a16:creationId xmlns:a16="http://schemas.microsoft.com/office/drawing/2014/main" id="{17AF4AFA-BE42-280F-AB03-E339DBA7E140}"/>
+              </a:ext>
+            </a:extLst>
+          </p:cNvPr>
+          <p:cNvPicPr>
+            <a:picLocks noChangeAspect="1"/>
+          </p:cNvPicPr>
+          <p:nvPr/>
+        </p:nvPicPr>
+        <p:blipFill>
+          <a:blip r:embed="rId3"/>
+          <a:stretch>
+            <a:fillRect/>
+          </a:stretch>
+        </p:blipFill>
+        <p:spPr>
+          <a:xfrm>
+            <a:off x="2183973" y="493691"/>
+            <a:ext cx="2712955" cy="5035732"/>
+          </a:xfrm>
+          <a:prstGeom prst="rect">
+            <a:avLst/>
+          </a:prstGeom>
+        </p:spPr>
+      </p:pic>
     </p:spTree>
     <p:extLst>
       <p:ext uri="{BB962C8B-B14F-4D97-AF65-F5344CB8AC3E}">
@@ -8095,7 +8384,469 @@
 </p:sld>
 </file>
 
-<file path=ppt/slides/slide44.xml><?xml version="1.0" encoding="utf-8"?>
+<file path=ppt/slides/slide46.xml><?xml version="1.0" encoding="utf-8"?>
+<p:sld xmlns:a="http://schemas.openxmlformats.org/drawingml/2006/main" xmlns:r="http://schemas.openxmlformats.org/officeDocument/2006/relationships" xmlns:p="http://schemas.openxmlformats.org/presentationml/2006/main">
+  <p:cSld>
+    <p:spTree>
+      <p:nvGrpSpPr>
+        <p:cNvPr id="1" name="">
+          <a:extLst>
+            <a:ext uri="{FF2B5EF4-FFF2-40B4-BE49-F238E27FC236}">
+              <a16:creationId xmlns:a16="http://schemas.microsoft.com/office/drawing/2014/main" id="{99B8A31D-13EE-CADB-5226-65D201508B8F}"/>
+            </a:ext>
+          </a:extLst>
+        </p:cNvPr>
+        <p:cNvGrpSpPr/>
+        <p:nvPr/>
+      </p:nvGrpSpPr>
+      <p:grpSpPr>
+        <a:xfrm>
+          <a:off x="0" y="0"/>
+          <a:ext cx="0" cy="0"/>
+          <a:chOff x="0" y="0"/>
+          <a:chExt cx="0" cy="0"/>
+        </a:xfrm>
+      </p:grpSpPr>
+      <p:pic>
+        <p:nvPicPr>
+          <p:cNvPr id="5" name="図 4">
+            <a:extLst>
+              <a:ext uri="{FF2B5EF4-FFF2-40B4-BE49-F238E27FC236}">
+                <a16:creationId xmlns:a16="http://schemas.microsoft.com/office/drawing/2014/main" id="{3EFAEBCE-C8DD-DD16-45B5-038A2DE1BB89}"/>
+              </a:ext>
+            </a:extLst>
+          </p:cNvPr>
+          <p:cNvPicPr>
+            <a:picLocks noChangeAspect="1"/>
+          </p:cNvPicPr>
+          <p:nvPr/>
+        </p:nvPicPr>
+        <p:blipFill>
+          <a:blip r:embed="rId2">
+            <a:extLst>
+              <a:ext uri="{28A0092B-C50C-407E-A947-70E740481C1C}">
+                <a14:useLocalDpi xmlns:a14="http://schemas.microsoft.com/office/drawing/2010/main" val="0"/>
+              </a:ext>
+            </a:extLst>
+          </a:blip>
+          <a:stretch>
+            <a:fillRect/>
+          </a:stretch>
+        </p:blipFill>
+        <p:spPr>
+          <a:xfrm>
+            <a:off x="4572000" y="600456"/>
+            <a:ext cx="2714625" cy="5038344"/>
+          </a:xfrm>
+          <a:prstGeom prst="rect">
+            <a:avLst/>
+          </a:prstGeom>
+        </p:spPr>
+      </p:pic>
+      <p:sp>
+        <p:nvSpPr>
+          <p:cNvPr id="6" name="正方形/長方形 5">
+            <a:extLst>
+              <a:ext uri="{FF2B5EF4-FFF2-40B4-BE49-F238E27FC236}">
+                <a16:creationId xmlns:a16="http://schemas.microsoft.com/office/drawing/2014/main" id="{F106A793-07AF-7E1F-AC83-3C8402BA86CB}"/>
+              </a:ext>
+            </a:extLst>
+          </p:cNvPr>
+          <p:cNvSpPr/>
+          <p:nvPr/>
+        </p:nvSpPr>
+        <p:spPr>
+          <a:xfrm flipV="1">
+            <a:off x="4896928" y="2458900"/>
+            <a:ext cx="2239367" cy="1317970"/>
+          </a:xfrm>
+          <a:prstGeom prst="rect">
+            <a:avLst/>
+          </a:prstGeom>
+          <a:noFill/>
+          <a:ln w="28575">
+            <a:solidFill>
+              <a:srgbClr val="FF0000"/>
+            </a:solidFill>
+          </a:ln>
+        </p:spPr>
+        <p:style>
+          <a:lnRef idx="2">
+            <a:schemeClr val="accent1">
+              <a:shade val="15000"/>
+            </a:schemeClr>
+          </a:lnRef>
+          <a:fillRef idx="1">
+            <a:schemeClr val="accent1"/>
+          </a:fillRef>
+          <a:effectRef idx="0">
+            <a:schemeClr val="accent1"/>
+          </a:effectRef>
+          <a:fontRef idx="minor">
+            <a:schemeClr val="lt1"/>
+          </a:fontRef>
+        </p:style>
+        <p:txBody>
+          <a:bodyPr rtlCol="0" anchor="ctr"/>
+          <a:lstStyle/>
+          <a:p>
+            <a:pPr algn="ctr"/>
+            <a:endParaRPr kumimoji="1" lang="ja-JP" altLang="en-US"/>
+          </a:p>
+        </p:txBody>
+      </p:sp>
+      <p:pic>
+        <p:nvPicPr>
+          <p:cNvPr id="2" name="図 1">
+            <a:extLst>
+              <a:ext uri="{FF2B5EF4-FFF2-40B4-BE49-F238E27FC236}">
+                <a16:creationId xmlns:a16="http://schemas.microsoft.com/office/drawing/2014/main" id="{ED3D9143-D717-108C-3F44-B9293C554FBC}"/>
+              </a:ext>
+            </a:extLst>
+          </p:cNvPr>
+          <p:cNvPicPr>
+            <a:picLocks noChangeAspect="1"/>
+          </p:cNvPicPr>
+          <p:nvPr/>
+        </p:nvPicPr>
+        <p:blipFill>
+          <a:blip r:embed="rId3"/>
+          <a:stretch>
+            <a:fillRect/>
+          </a:stretch>
+        </p:blipFill>
+        <p:spPr>
+          <a:xfrm>
+            <a:off x="1568939" y="39757"/>
+            <a:ext cx="2712955" cy="5035732"/>
+          </a:xfrm>
+          <a:prstGeom prst="rect">
+            <a:avLst/>
+          </a:prstGeom>
+        </p:spPr>
+      </p:pic>
+    </p:spTree>
+    <p:extLst>
+      <p:ext uri="{BB962C8B-B14F-4D97-AF65-F5344CB8AC3E}">
+        <p14:creationId xmlns:p14="http://schemas.microsoft.com/office/powerpoint/2010/main" val="1500990614"/>
+      </p:ext>
+    </p:extLst>
+  </p:cSld>
+  <p:clrMapOvr>
+    <a:masterClrMapping/>
+  </p:clrMapOvr>
+</p:sld>
+</file>
+
+<file path=ppt/slides/slide47.xml><?xml version="1.0" encoding="utf-8"?>
+<p:sld xmlns:a="http://schemas.openxmlformats.org/drawingml/2006/main" xmlns:r="http://schemas.openxmlformats.org/officeDocument/2006/relationships" xmlns:p="http://schemas.openxmlformats.org/presentationml/2006/main">
+  <p:cSld>
+    <p:spTree>
+      <p:nvGrpSpPr>
+        <p:cNvPr id="1" name="">
+          <a:extLst>
+            <a:ext uri="{FF2B5EF4-FFF2-40B4-BE49-F238E27FC236}">
+              <a16:creationId xmlns:a16="http://schemas.microsoft.com/office/drawing/2014/main" id="{D16888CB-FD28-9584-AD4F-101C3C9BFE68}"/>
+            </a:ext>
+          </a:extLst>
+        </p:cNvPr>
+        <p:cNvGrpSpPr/>
+        <p:nvPr/>
+      </p:nvGrpSpPr>
+      <p:grpSpPr>
+        <a:xfrm>
+          <a:off x="0" y="0"/>
+          <a:ext cx="0" cy="0"/>
+          <a:chOff x="0" y="0"/>
+          <a:chExt cx="0" cy="0"/>
+        </a:xfrm>
+      </p:grpSpPr>
+      <p:pic>
+        <p:nvPicPr>
+          <p:cNvPr id="5" name="図 4">
+            <a:extLst>
+              <a:ext uri="{FF2B5EF4-FFF2-40B4-BE49-F238E27FC236}">
+                <a16:creationId xmlns:a16="http://schemas.microsoft.com/office/drawing/2014/main" id="{3AE8E93A-5AA3-C176-C6F0-20A6B094E88D}"/>
+              </a:ext>
+            </a:extLst>
+          </p:cNvPr>
+          <p:cNvPicPr>
+            <a:picLocks noChangeAspect="1"/>
+          </p:cNvPicPr>
+          <p:nvPr/>
+        </p:nvPicPr>
+        <p:blipFill>
+          <a:blip r:embed="rId2">
+            <a:extLst>
+              <a:ext uri="{28A0092B-C50C-407E-A947-70E740481C1C}">
+                <a14:useLocalDpi xmlns:a14="http://schemas.microsoft.com/office/drawing/2010/main" val="0"/>
+              </a:ext>
+            </a:extLst>
+          </a:blip>
+          <a:stretch>
+            <a:fillRect/>
+          </a:stretch>
+        </p:blipFill>
+        <p:spPr>
+          <a:xfrm>
+            <a:off x="4572000" y="600456"/>
+            <a:ext cx="2714625" cy="5038344"/>
+          </a:xfrm>
+          <a:prstGeom prst="rect">
+            <a:avLst/>
+          </a:prstGeom>
+        </p:spPr>
+      </p:pic>
+      <p:sp>
+        <p:nvSpPr>
+          <p:cNvPr id="6" name="正方形/長方形 5">
+            <a:extLst>
+              <a:ext uri="{FF2B5EF4-FFF2-40B4-BE49-F238E27FC236}">
+                <a16:creationId xmlns:a16="http://schemas.microsoft.com/office/drawing/2014/main" id="{E3A6EE87-D4A8-A501-72B6-295A23C9D18C}"/>
+              </a:ext>
+            </a:extLst>
+          </p:cNvPr>
+          <p:cNvSpPr/>
+          <p:nvPr/>
+        </p:nvSpPr>
+        <p:spPr>
+          <a:xfrm flipV="1">
+            <a:off x="4896928" y="3830500"/>
+            <a:ext cx="2239367" cy="1119187"/>
+          </a:xfrm>
+          <a:prstGeom prst="rect">
+            <a:avLst/>
+          </a:prstGeom>
+          <a:noFill/>
+          <a:ln w="28575">
+            <a:solidFill>
+              <a:srgbClr val="FF0000"/>
+            </a:solidFill>
+          </a:ln>
+        </p:spPr>
+        <p:style>
+          <a:lnRef idx="2">
+            <a:schemeClr val="accent1">
+              <a:shade val="15000"/>
+            </a:schemeClr>
+          </a:lnRef>
+          <a:fillRef idx="1">
+            <a:schemeClr val="accent1"/>
+          </a:fillRef>
+          <a:effectRef idx="0">
+            <a:schemeClr val="accent1"/>
+          </a:effectRef>
+          <a:fontRef idx="minor">
+            <a:schemeClr val="lt1"/>
+          </a:fontRef>
+        </p:style>
+        <p:txBody>
+          <a:bodyPr rtlCol="0" anchor="ctr"/>
+          <a:lstStyle/>
+          <a:p>
+            <a:pPr algn="ctr"/>
+            <a:endParaRPr kumimoji="1" lang="ja-JP" altLang="en-US"/>
+          </a:p>
+        </p:txBody>
+      </p:sp>
+      <p:pic>
+        <p:nvPicPr>
+          <p:cNvPr id="2" name="図 1">
+            <a:extLst>
+              <a:ext uri="{FF2B5EF4-FFF2-40B4-BE49-F238E27FC236}">
+                <a16:creationId xmlns:a16="http://schemas.microsoft.com/office/drawing/2014/main" id="{49D35A3C-50AF-010A-805A-870A2EE9D8E4}"/>
+              </a:ext>
+            </a:extLst>
+          </p:cNvPr>
+          <p:cNvPicPr>
+            <a:picLocks noChangeAspect="1"/>
+          </p:cNvPicPr>
+          <p:nvPr/>
+        </p:nvPicPr>
+        <p:blipFill>
+          <a:blip r:embed="rId3"/>
+          <a:stretch>
+            <a:fillRect/>
+          </a:stretch>
+        </p:blipFill>
+        <p:spPr>
+          <a:xfrm>
+            <a:off x="2105652" y="509634"/>
+            <a:ext cx="2712955" cy="5035732"/>
+          </a:xfrm>
+          <a:prstGeom prst="rect">
+            <a:avLst/>
+          </a:prstGeom>
+        </p:spPr>
+      </p:pic>
+    </p:spTree>
+    <p:extLst>
+      <p:ext uri="{BB962C8B-B14F-4D97-AF65-F5344CB8AC3E}">
+        <p14:creationId xmlns:p14="http://schemas.microsoft.com/office/powerpoint/2010/main" val="30368637"/>
+      </p:ext>
+    </p:extLst>
+  </p:cSld>
+  <p:clrMapOvr>
+    <a:masterClrMapping/>
+  </p:clrMapOvr>
+</p:sld>
+</file>
+
+<file path=ppt/slides/slide48.xml><?xml version="1.0" encoding="utf-8"?>
+<p:sld xmlns:a="http://schemas.openxmlformats.org/drawingml/2006/main" xmlns:r="http://schemas.openxmlformats.org/officeDocument/2006/relationships" xmlns:p="http://schemas.openxmlformats.org/presentationml/2006/main">
+  <p:cSld>
+    <p:spTree>
+      <p:nvGrpSpPr>
+        <p:cNvPr id="1" name="">
+          <a:extLst>
+            <a:ext uri="{FF2B5EF4-FFF2-40B4-BE49-F238E27FC236}">
+              <a16:creationId xmlns:a16="http://schemas.microsoft.com/office/drawing/2014/main" id="{356F2F7C-3ED2-E695-BEEA-645CCD68A812}"/>
+            </a:ext>
+          </a:extLst>
+        </p:cNvPr>
+        <p:cNvGrpSpPr/>
+        <p:nvPr/>
+      </p:nvGrpSpPr>
+      <p:grpSpPr>
+        <a:xfrm>
+          <a:off x="0" y="0"/>
+          <a:ext cx="0" cy="0"/>
+          <a:chOff x="0" y="0"/>
+          <a:chExt cx="0" cy="0"/>
+        </a:xfrm>
+      </p:grpSpPr>
+      <p:pic>
+        <p:nvPicPr>
+          <p:cNvPr id="5" name="図 4">
+            <a:extLst>
+              <a:ext uri="{FF2B5EF4-FFF2-40B4-BE49-F238E27FC236}">
+                <a16:creationId xmlns:a16="http://schemas.microsoft.com/office/drawing/2014/main" id="{C0C5BBDC-D242-4402-370E-F42BE6DF1178}"/>
+              </a:ext>
+            </a:extLst>
+          </p:cNvPr>
+          <p:cNvPicPr>
+            <a:picLocks noChangeAspect="1"/>
+          </p:cNvPicPr>
+          <p:nvPr/>
+        </p:nvPicPr>
+        <p:blipFill>
+          <a:blip r:embed="rId2">
+            <a:extLst>
+              <a:ext uri="{28A0092B-C50C-407E-A947-70E740481C1C}">
+                <a14:useLocalDpi xmlns:a14="http://schemas.microsoft.com/office/drawing/2010/main" val="0"/>
+              </a:ext>
+            </a:extLst>
+          </a:blip>
+          <a:stretch>
+            <a:fillRect/>
+          </a:stretch>
+        </p:blipFill>
+        <p:spPr>
+          <a:xfrm>
+            <a:off x="4572000" y="600456"/>
+            <a:ext cx="2714625" cy="5038344"/>
+          </a:xfrm>
+          <a:prstGeom prst="rect">
+            <a:avLst/>
+          </a:prstGeom>
+        </p:spPr>
+      </p:pic>
+      <p:sp>
+        <p:nvSpPr>
+          <p:cNvPr id="6" name="正方形/長方形 5">
+            <a:extLst>
+              <a:ext uri="{FF2B5EF4-FFF2-40B4-BE49-F238E27FC236}">
+                <a16:creationId xmlns:a16="http://schemas.microsoft.com/office/drawing/2014/main" id="{5318069C-F94F-C44E-C313-76BF4774DA5B}"/>
+              </a:ext>
+            </a:extLst>
+          </p:cNvPr>
+          <p:cNvSpPr/>
+          <p:nvPr/>
+        </p:nvSpPr>
+        <p:spPr>
+          <a:xfrm>
+            <a:off x="4896928" y="4999381"/>
+            <a:ext cx="2239367" cy="437322"/>
+          </a:xfrm>
+          <a:prstGeom prst="rect">
+            <a:avLst/>
+          </a:prstGeom>
+          <a:noFill/>
+          <a:ln w="28575">
+            <a:solidFill>
+              <a:srgbClr val="FF0000"/>
+            </a:solidFill>
+          </a:ln>
+        </p:spPr>
+        <p:style>
+          <a:lnRef idx="2">
+            <a:schemeClr val="accent1">
+              <a:shade val="15000"/>
+            </a:schemeClr>
+          </a:lnRef>
+          <a:fillRef idx="1">
+            <a:schemeClr val="accent1"/>
+          </a:fillRef>
+          <a:effectRef idx="0">
+            <a:schemeClr val="accent1"/>
+          </a:effectRef>
+          <a:fontRef idx="minor">
+            <a:schemeClr val="lt1"/>
+          </a:fontRef>
+        </p:style>
+        <p:txBody>
+          <a:bodyPr rtlCol="0" anchor="ctr"/>
+          <a:lstStyle/>
+          <a:p>
+            <a:pPr algn="ctr"/>
+            <a:endParaRPr kumimoji="1" lang="ja-JP" altLang="en-US"/>
+          </a:p>
+        </p:txBody>
+      </p:sp>
+      <p:pic>
+        <p:nvPicPr>
+          <p:cNvPr id="2" name="図 1">
+            <a:extLst>
+              <a:ext uri="{FF2B5EF4-FFF2-40B4-BE49-F238E27FC236}">
+                <a16:creationId xmlns:a16="http://schemas.microsoft.com/office/drawing/2014/main" id="{361F1B90-9D70-B2FB-2B1F-019FB95835ED}"/>
+              </a:ext>
+            </a:extLst>
+          </p:cNvPr>
+          <p:cNvPicPr>
+            <a:picLocks noChangeAspect="1"/>
+          </p:cNvPicPr>
+          <p:nvPr/>
+        </p:nvPicPr>
+        <p:blipFill>
+          <a:blip r:embed="rId3"/>
+          <a:stretch>
+            <a:fillRect/>
+          </a:stretch>
+        </p:blipFill>
+        <p:spPr>
+          <a:xfrm>
+            <a:off x="1696581" y="610395"/>
+            <a:ext cx="2712955" cy="5035732"/>
+          </a:xfrm>
+          <a:prstGeom prst="rect">
+            <a:avLst/>
+          </a:prstGeom>
+        </p:spPr>
+      </p:pic>
+    </p:spTree>
+    <p:extLst>
+      <p:ext uri="{BB962C8B-B14F-4D97-AF65-F5344CB8AC3E}">
+        <p14:creationId xmlns:p14="http://schemas.microsoft.com/office/powerpoint/2010/main" val="4219019646"/>
+      </p:ext>
+    </p:extLst>
+  </p:cSld>
+  <p:clrMapOvr>
+    <a:masterClrMapping/>
+  </p:clrMapOvr>
+</p:sld>
+</file>
+
+<file path=ppt/slides/slide49.xml><?xml version="1.0" encoding="utf-8"?>
 <p:sld xmlns:a="http://schemas.openxmlformats.org/drawingml/2006/main" xmlns:r="http://schemas.openxmlformats.org/officeDocument/2006/relationships" xmlns:p="http://schemas.openxmlformats.org/presentationml/2006/main">
   <p:cSld>
     <p:spTree>
@@ -8118,6 +8869,124 @@
           <a:chExt cx="0" cy="0"/>
         </a:xfrm>
       </p:grpSpPr>
+      <p:pic>
+        <p:nvPicPr>
+          <p:cNvPr id="11" name="図 10">
+            <a:extLst>
+              <a:ext uri="{FF2B5EF4-FFF2-40B4-BE49-F238E27FC236}">
+                <a16:creationId xmlns:a16="http://schemas.microsoft.com/office/drawing/2014/main" id="{8CD32BEA-F260-8D21-A1D1-B0679D20C39B}"/>
+              </a:ext>
+            </a:extLst>
+          </p:cNvPr>
+          <p:cNvPicPr>
+            <a:picLocks noChangeAspect="1"/>
+          </p:cNvPicPr>
+          <p:nvPr/>
+        </p:nvPicPr>
+        <p:blipFill>
+          <a:blip r:embed="rId2">
+            <a:extLst>
+              <a:ext uri="{28A0092B-C50C-407E-A947-70E740481C1C}">
+                <a14:useLocalDpi xmlns:a14="http://schemas.microsoft.com/office/drawing/2010/main" val="0"/>
+              </a:ext>
+            </a:extLst>
+          </a:blip>
+          <a:stretch>
+            <a:fillRect/>
+          </a:stretch>
+        </p:blipFill>
+        <p:spPr>
+          <a:xfrm>
+            <a:off x="4986337" y="1900031"/>
+            <a:ext cx="3133725" cy="2362200"/>
+          </a:xfrm>
+          <a:prstGeom prst="rect">
+            <a:avLst/>
+          </a:prstGeom>
+        </p:spPr>
+      </p:pic>
+      <p:sp>
+        <p:nvSpPr>
+          <p:cNvPr id="12" name="正方形/長方形 11">
+            <a:extLst>
+              <a:ext uri="{FF2B5EF4-FFF2-40B4-BE49-F238E27FC236}">
+                <a16:creationId xmlns:a16="http://schemas.microsoft.com/office/drawing/2014/main" id="{2179BB3F-8914-703E-D3BC-8D3B311C4D0B}"/>
+              </a:ext>
+            </a:extLst>
+          </p:cNvPr>
+          <p:cNvSpPr/>
+          <p:nvPr/>
+        </p:nvSpPr>
+        <p:spPr>
+          <a:xfrm>
+            <a:off x="5354128" y="2425146"/>
+            <a:ext cx="2507724" cy="1669776"/>
+          </a:xfrm>
+          <a:prstGeom prst="rect">
+            <a:avLst/>
+          </a:prstGeom>
+          <a:noFill/>
+          <a:ln w="28575">
+            <a:solidFill>
+              <a:srgbClr val="FF0000"/>
+            </a:solidFill>
+          </a:ln>
+        </p:spPr>
+        <p:style>
+          <a:lnRef idx="2">
+            <a:schemeClr val="accent1">
+              <a:shade val="15000"/>
+            </a:schemeClr>
+          </a:lnRef>
+          <a:fillRef idx="1">
+            <a:schemeClr val="accent1"/>
+          </a:fillRef>
+          <a:effectRef idx="0">
+            <a:schemeClr val="accent1"/>
+          </a:effectRef>
+          <a:fontRef idx="minor">
+            <a:schemeClr val="lt1"/>
+          </a:fontRef>
+        </p:style>
+        <p:txBody>
+          <a:bodyPr rtlCol="0" anchor="ctr"/>
+          <a:lstStyle/>
+          <a:p>
+            <a:pPr algn="ctr"/>
+            <a:endParaRPr kumimoji="1" lang="ja-JP" altLang="en-US"/>
+          </a:p>
+        </p:txBody>
+      </p:sp>
+      <p:pic>
+        <p:nvPicPr>
+          <p:cNvPr id="13" name="図 12">
+            <a:extLst>
+              <a:ext uri="{FF2B5EF4-FFF2-40B4-BE49-F238E27FC236}">
+                <a16:creationId xmlns:a16="http://schemas.microsoft.com/office/drawing/2014/main" id="{35E82C53-88BC-E03E-A857-A0063E3C31DD}"/>
+              </a:ext>
+            </a:extLst>
+          </p:cNvPr>
+          <p:cNvPicPr>
+            <a:picLocks noChangeAspect="1"/>
+          </p:cNvPicPr>
+          <p:nvPr/>
+        </p:nvPicPr>
+        <p:blipFill>
+          <a:blip r:embed="rId3"/>
+          <a:stretch>
+            <a:fillRect/>
+          </a:stretch>
+        </p:blipFill>
+        <p:spPr>
+          <a:xfrm>
+            <a:off x="563479" y="1812001"/>
+            <a:ext cx="3133616" cy="2359356"/>
+          </a:xfrm>
+          <a:prstGeom prst="rect">
+            <a:avLst/>
+          </a:prstGeom>
+        </p:spPr>
+      </p:pic>
     </p:spTree>
     <p:extLst>
       <p:ext uri="{BB962C8B-B14F-4D97-AF65-F5344CB8AC3E}">
@@ -8131,7 +9000,1347 @@
 </p:sld>
 </file>
 
-<file path=ppt/slides/slide45.xml><?xml version="1.0" encoding="utf-8"?>
+<file path=ppt/slides/slide5.xml><?xml version="1.0" encoding="utf-8"?>
+<p:sld xmlns:a="http://schemas.openxmlformats.org/drawingml/2006/main" xmlns:r="http://schemas.openxmlformats.org/officeDocument/2006/relationships" xmlns:p="http://schemas.openxmlformats.org/presentationml/2006/main">
+  <p:cSld>
+    <p:spTree>
+      <p:nvGrpSpPr>
+        <p:cNvPr id="1" name=""/>
+        <p:cNvGrpSpPr/>
+        <p:nvPr/>
+      </p:nvGrpSpPr>
+      <p:grpSpPr>
+        <a:xfrm>
+          <a:off x="0" y="0"/>
+          <a:ext cx="0" cy="0"/>
+          <a:chOff x="0" y="0"/>
+          <a:chExt cx="0" cy="0"/>
+        </a:xfrm>
+      </p:grpSpPr>
+      <p:pic>
+        <p:nvPicPr>
+          <p:cNvPr id="7" name="図 6">
+            <a:extLst>
+              <a:ext uri="{FF2B5EF4-FFF2-40B4-BE49-F238E27FC236}">
+                <a16:creationId xmlns:a16="http://schemas.microsoft.com/office/drawing/2014/main" id="{2D93D535-CACA-8380-34C2-D0C0861ACDC1}"/>
+              </a:ext>
+            </a:extLst>
+          </p:cNvPr>
+          <p:cNvPicPr>
+            <a:picLocks noChangeAspect="1"/>
+          </p:cNvPicPr>
+          <p:nvPr/>
+        </p:nvPicPr>
+        <p:blipFill>
+          <a:blip r:embed="rId2">
+            <a:extLst>
+              <a:ext uri="{28A0092B-C50C-407E-A947-70E740481C1C}">
+                <a14:useLocalDpi xmlns:a14="http://schemas.microsoft.com/office/drawing/2010/main" val="0"/>
+              </a:ext>
+            </a:extLst>
+          </a:blip>
+          <a:stretch>
+            <a:fillRect/>
+          </a:stretch>
+        </p:blipFill>
+        <p:spPr>
+          <a:xfrm>
+            <a:off x="4300537" y="1490662"/>
+            <a:ext cx="3590925" cy="3876675"/>
+          </a:xfrm>
+          <a:prstGeom prst="rect">
+            <a:avLst/>
+          </a:prstGeom>
+        </p:spPr>
+      </p:pic>
+      <p:sp>
+        <p:nvSpPr>
+          <p:cNvPr id="8" name="正方形/長方形 7">
+            <a:extLst>
+              <a:ext uri="{FF2B5EF4-FFF2-40B4-BE49-F238E27FC236}">
+                <a16:creationId xmlns:a16="http://schemas.microsoft.com/office/drawing/2014/main" id="{27A5B397-DA30-10A9-3372-621A2BDC21DE}"/>
+              </a:ext>
+            </a:extLst>
+          </p:cNvPr>
+          <p:cNvSpPr/>
+          <p:nvPr/>
+        </p:nvSpPr>
+        <p:spPr>
+          <a:xfrm>
+            <a:off x="6832600" y="1490662"/>
+            <a:ext cx="855133" cy="482603"/>
+          </a:xfrm>
+          <a:prstGeom prst="rect">
+            <a:avLst/>
+          </a:prstGeom>
+          <a:noFill/>
+          <a:ln w="28575">
+            <a:solidFill>
+              <a:srgbClr val="FF0000"/>
+            </a:solidFill>
+          </a:ln>
+        </p:spPr>
+        <p:style>
+          <a:lnRef idx="2">
+            <a:schemeClr val="accent1">
+              <a:shade val="15000"/>
+            </a:schemeClr>
+          </a:lnRef>
+          <a:fillRef idx="1">
+            <a:schemeClr val="accent1"/>
+          </a:fillRef>
+          <a:effectRef idx="0">
+            <a:schemeClr val="accent1"/>
+          </a:effectRef>
+          <a:fontRef idx="minor">
+            <a:schemeClr val="lt1"/>
+          </a:fontRef>
+        </p:style>
+        <p:txBody>
+          <a:bodyPr rtlCol="0" anchor="ctr"/>
+          <a:lstStyle/>
+          <a:p>
+            <a:pPr algn="ctr"/>
+            <a:endParaRPr kumimoji="1" lang="ja-JP" altLang="en-US"/>
+          </a:p>
+        </p:txBody>
+      </p:sp>
+    </p:spTree>
+    <p:extLst>
+      <p:ext uri="{BB962C8B-B14F-4D97-AF65-F5344CB8AC3E}">
+        <p14:creationId xmlns:p14="http://schemas.microsoft.com/office/powerpoint/2010/main" val="3076449738"/>
+      </p:ext>
+    </p:extLst>
+  </p:cSld>
+  <p:clrMapOvr>
+    <a:masterClrMapping/>
+  </p:clrMapOvr>
+</p:sld>
+</file>
+
+<file path=ppt/slides/slide50.xml><?xml version="1.0" encoding="utf-8"?>
+<p:sld xmlns:a="http://schemas.openxmlformats.org/drawingml/2006/main" xmlns:r="http://schemas.openxmlformats.org/officeDocument/2006/relationships" xmlns:p="http://schemas.openxmlformats.org/presentationml/2006/main">
+  <p:cSld>
+    <p:spTree>
+      <p:nvGrpSpPr>
+        <p:cNvPr id="1" name="">
+          <a:extLst>
+            <a:ext uri="{FF2B5EF4-FFF2-40B4-BE49-F238E27FC236}">
+              <a16:creationId xmlns:a16="http://schemas.microsoft.com/office/drawing/2014/main" id="{3FBFFC4B-D084-C9B9-3AB8-9679A22FA9E7}"/>
+            </a:ext>
+          </a:extLst>
+        </p:cNvPr>
+        <p:cNvGrpSpPr/>
+        <p:nvPr/>
+      </p:nvGrpSpPr>
+      <p:grpSpPr>
+        <a:xfrm>
+          <a:off x="0" y="0"/>
+          <a:ext cx="0" cy="0"/>
+          <a:chOff x="0" y="0"/>
+          <a:chExt cx="0" cy="0"/>
+        </a:xfrm>
+      </p:grpSpPr>
+      <p:pic>
+        <p:nvPicPr>
+          <p:cNvPr id="3" name="図 2">
+            <a:extLst>
+              <a:ext uri="{FF2B5EF4-FFF2-40B4-BE49-F238E27FC236}">
+                <a16:creationId xmlns:a16="http://schemas.microsoft.com/office/drawing/2014/main" id="{9B508C4B-5B9F-EEF7-2B71-F3826D036E57}"/>
+              </a:ext>
+            </a:extLst>
+          </p:cNvPr>
+          <p:cNvPicPr>
+            <a:picLocks noChangeAspect="1"/>
+          </p:cNvPicPr>
+          <p:nvPr/>
+        </p:nvPicPr>
+        <p:blipFill>
+          <a:blip r:embed="rId2">
+            <a:extLst>
+              <a:ext uri="{28A0092B-C50C-407E-A947-70E740481C1C}">
+                <a14:useLocalDpi xmlns:a14="http://schemas.microsoft.com/office/drawing/2010/main" val="0"/>
+              </a:ext>
+            </a:extLst>
+          </a:blip>
+          <a:stretch>
+            <a:fillRect/>
+          </a:stretch>
+        </p:blipFill>
+        <p:spPr>
+          <a:xfrm>
+            <a:off x="4595812" y="452437"/>
+            <a:ext cx="3000375" cy="5953125"/>
+          </a:xfrm>
+          <a:prstGeom prst="rect">
+            <a:avLst/>
+          </a:prstGeom>
+        </p:spPr>
+      </p:pic>
+      <p:sp>
+        <p:nvSpPr>
+          <p:cNvPr id="4" name="正方形/長方形 3">
+            <a:extLst>
+              <a:ext uri="{FF2B5EF4-FFF2-40B4-BE49-F238E27FC236}">
+                <a16:creationId xmlns:a16="http://schemas.microsoft.com/office/drawing/2014/main" id="{1E5D8787-D90E-77A2-A00E-DA33BE4234E1}"/>
+              </a:ext>
+            </a:extLst>
+          </p:cNvPr>
+          <p:cNvSpPr/>
+          <p:nvPr/>
+        </p:nvSpPr>
+        <p:spPr>
+          <a:xfrm>
+            <a:off x="4926746" y="934275"/>
+            <a:ext cx="2507724" cy="2276063"/>
+          </a:xfrm>
+          <a:prstGeom prst="rect">
+            <a:avLst/>
+          </a:prstGeom>
+          <a:noFill/>
+          <a:ln w="28575">
+            <a:solidFill>
+              <a:srgbClr val="FF0000"/>
+            </a:solidFill>
+          </a:ln>
+        </p:spPr>
+        <p:style>
+          <a:lnRef idx="2">
+            <a:schemeClr val="accent1">
+              <a:shade val="15000"/>
+            </a:schemeClr>
+          </a:lnRef>
+          <a:fillRef idx="1">
+            <a:schemeClr val="accent1"/>
+          </a:fillRef>
+          <a:effectRef idx="0">
+            <a:schemeClr val="accent1"/>
+          </a:effectRef>
+          <a:fontRef idx="minor">
+            <a:schemeClr val="lt1"/>
+          </a:fontRef>
+        </p:style>
+        <p:txBody>
+          <a:bodyPr rtlCol="0" anchor="ctr"/>
+          <a:lstStyle/>
+          <a:p>
+            <a:pPr algn="ctr"/>
+            <a:endParaRPr kumimoji="1" lang="ja-JP" altLang="en-US"/>
+          </a:p>
+        </p:txBody>
+      </p:sp>
+      <p:pic>
+        <p:nvPicPr>
+          <p:cNvPr id="5" name="図 4">
+            <a:extLst>
+              <a:ext uri="{FF2B5EF4-FFF2-40B4-BE49-F238E27FC236}">
+                <a16:creationId xmlns:a16="http://schemas.microsoft.com/office/drawing/2014/main" id="{3A3C5FAA-B35F-B074-9410-C3A9EF3EA1F3}"/>
+              </a:ext>
+            </a:extLst>
+          </p:cNvPr>
+          <p:cNvPicPr>
+            <a:picLocks noChangeAspect="1"/>
+          </p:cNvPicPr>
+          <p:nvPr/>
+        </p:nvPicPr>
+        <p:blipFill>
+          <a:blip r:embed="rId3"/>
+          <a:stretch>
+            <a:fillRect/>
+          </a:stretch>
+        </p:blipFill>
+        <p:spPr>
+          <a:xfrm>
+            <a:off x="2194297" y="344828"/>
+            <a:ext cx="2999492" cy="5956308"/>
+          </a:xfrm>
+          <a:prstGeom prst="rect">
+            <a:avLst/>
+          </a:prstGeom>
+        </p:spPr>
+      </p:pic>
+    </p:spTree>
+    <p:extLst>
+      <p:ext uri="{BB962C8B-B14F-4D97-AF65-F5344CB8AC3E}">
+        <p14:creationId xmlns:p14="http://schemas.microsoft.com/office/powerpoint/2010/main" val="2212733482"/>
+      </p:ext>
+    </p:extLst>
+  </p:cSld>
+  <p:clrMapOvr>
+    <a:masterClrMapping/>
+  </p:clrMapOvr>
+</p:sld>
+</file>
+
+<file path=ppt/slides/slide51.xml><?xml version="1.0" encoding="utf-8"?>
+<p:sld xmlns:a="http://schemas.openxmlformats.org/drawingml/2006/main" xmlns:r="http://schemas.openxmlformats.org/officeDocument/2006/relationships" xmlns:p="http://schemas.openxmlformats.org/presentationml/2006/main">
+  <p:cSld>
+    <p:spTree>
+      <p:nvGrpSpPr>
+        <p:cNvPr id="1" name="">
+          <a:extLst>
+            <a:ext uri="{FF2B5EF4-FFF2-40B4-BE49-F238E27FC236}">
+              <a16:creationId xmlns:a16="http://schemas.microsoft.com/office/drawing/2014/main" id="{D3BDAEEA-5AE3-DBF3-135C-60B6D94FD0BA}"/>
+            </a:ext>
+          </a:extLst>
+        </p:cNvPr>
+        <p:cNvGrpSpPr/>
+        <p:nvPr/>
+      </p:nvGrpSpPr>
+      <p:grpSpPr>
+        <a:xfrm>
+          <a:off x="0" y="0"/>
+          <a:ext cx="0" cy="0"/>
+          <a:chOff x="0" y="0"/>
+          <a:chExt cx="0" cy="0"/>
+        </a:xfrm>
+      </p:grpSpPr>
+      <p:pic>
+        <p:nvPicPr>
+          <p:cNvPr id="3" name="図 2">
+            <a:extLst>
+              <a:ext uri="{FF2B5EF4-FFF2-40B4-BE49-F238E27FC236}">
+                <a16:creationId xmlns:a16="http://schemas.microsoft.com/office/drawing/2014/main" id="{3A7DF0AA-BE7F-C4D1-9050-722A5A1F8443}"/>
+              </a:ext>
+            </a:extLst>
+          </p:cNvPr>
+          <p:cNvPicPr>
+            <a:picLocks noChangeAspect="1"/>
+          </p:cNvPicPr>
+          <p:nvPr/>
+        </p:nvPicPr>
+        <p:blipFill>
+          <a:blip r:embed="rId2">
+            <a:extLst>
+              <a:ext uri="{28A0092B-C50C-407E-A947-70E740481C1C}">
+                <a14:useLocalDpi xmlns:a14="http://schemas.microsoft.com/office/drawing/2010/main" val="0"/>
+              </a:ext>
+            </a:extLst>
+          </a:blip>
+          <a:stretch>
+            <a:fillRect/>
+          </a:stretch>
+        </p:blipFill>
+        <p:spPr>
+          <a:xfrm>
+            <a:off x="4595812" y="452437"/>
+            <a:ext cx="3000375" cy="5953125"/>
+          </a:xfrm>
+          <a:prstGeom prst="rect">
+            <a:avLst/>
+          </a:prstGeom>
+        </p:spPr>
+      </p:pic>
+      <p:sp>
+        <p:nvSpPr>
+          <p:cNvPr id="4" name="正方形/長方形 3">
+            <a:extLst>
+              <a:ext uri="{FF2B5EF4-FFF2-40B4-BE49-F238E27FC236}">
+                <a16:creationId xmlns:a16="http://schemas.microsoft.com/office/drawing/2014/main" id="{F999FEC9-0243-EFA9-B288-D2FFA20B7B7F}"/>
+              </a:ext>
+            </a:extLst>
+          </p:cNvPr>
+          <p:cNvSpPr/>
+          <p:nvPr/>
+        </p:nvSpPr>
+        <p:spPr>
+          <a:xfrm flipV="1">
+            <a:off x="4926746" y="3210338"/>
+            <a:ext cx="2507724" cy="1560445"/>
+          </a:xfrm>
+          <a:prstGeom prst="rect">
+            <a:avLst/>
+          </a:prstGeom>
+          <a:noFill/>
+          <a:ln w="28575">
+            <a:solidFill>
+              <a:srgbClr val="FF0000"/>
+            </a:solidFill>
+          </a:ln>
+        </p:spPr>
+        <p:style>
+          <a:lnRef idx="2">
+            <a:schemeClr val="accent1">
+              <a:shade val="15000"/>
+            </a:schemeClr>
+          </a:lnRef>
+          <a:fillRef idx="1">
+            <a:schemeClr val="accent1"/>
+          </a:fillRef>
+          <a:effectRef idx="0">
+            <a:schemeClr val="accent1"/>
+          </a:effectRef>
+          <a:fontRef idx="minor">
+            <a:schemeClr val="lt1"/>
+          </a:fontRef>
+        </p:style>
+        <p:txBody>
+          <a:bodyPr rtlCol="0" anchor="ctr"/>
+          <a:lstStyle/>
+          <a:p>
+            <a:pPr algn="ctr"/>
+            <a:endParaRPr kumimoji="1" lang="ja-JP" altLang="en-US"/>
+          </a:p>
+        </p:txBody>
+      </p:sp>
+      <p:pic>
+        <p:nvPicPr>
+          <p:cNvPr id="2" name="図 1">
+            <a:extLst>
+              <a:ext uri="{FF2B5EF4-FFF2-40B4-BE49-F238E27FC236}">
+                <a16:creationId xmlns:a16="http://schemas.microsoft.com/office/drawing/2014/main" id="{8CB69C53-2149-77D8-7DD4-ED57B71B93B9}"/>
+              </a:ext>
+            </a:extLst>
+          </p:cNvPr>
+          <p:cNvPicPr>
+            <a:picLocks noChangeAspect="1"/>
+          </p:cNvPicPr>
+          <p:nvPr/>
+        </p:nvPicPr>
+        <p:blipFill>
+          <a:blip r:embed="rId3"/>
+          <a:stretch>
+            <a:fillRect/>
+          </a:stretch>
+        </p:blipFill>
+        <p:spPr>
+          <a:xfrm>
+            <a:off x="753124" y="449254"/>
+            <a:ext cx="2999492" cy="5956308"/>
+          </a:xfrm>
+          <a:prstGeom prst="rect">
+            <a:avLst/>
+          </a:prstGeom>
+        </p:spPr>
+      </p:pic>
+    </p:spTree>
+    <p:extLst>
+      <p:ext uri="{BB962C8B-B14F-4D97-AF65-F5344CB8AC3E}">
+        <p14:creationId xmlns:p14="http://schemas.microsoft.com/office/powerpoint/2010/main" val="2338285295"/>
+      </p:ext>
+    </p:extLst>
+  </p:cSld>
+  <p:clrMapOvr>
+    <a:masterClrMapping/>
+  </p:clrMapOvr>
+</p:sld>
+</file>
+
+<file path=ppt/slides/slide52.xml><?xml version="1.0" encoding="utf-8"?>
+<p:sld xmlns:a="http://schemas.openxmlformats.org/drawingml/2006/main" xmlns:r="http://schemas.openxmlformats.org/officeDocument/2006/relationships" xmlns:p="http://schemas.openxmlformats.org/presentationml/2006/main">
+  <p:cSld>
+    <p:spTree>
+      <p:nvGrpSpPr>
+        <p:cNvPr id="1" name="">
+          <a:extLst>
+            <a:ext uri="{FF2B5EF4-FFF2-40B4-BE49-F238E27FC236}">
+              <a16:creationId xmlns:a16="http://schemas.microsoft.com/office/drawing/2014/main" id="{99B1D960-DDAD-6373-4B72-4FA8D0D3D246}"/>
+            </a:ext>
+          </a:extLst>
+        </p:cNvPr>
+        <p:cNvGrpSpPr/>
+        <p:nvPr/>
+      </p:nvGrpSpPr>
+      <p:grpSpPr>
+        <a:xfrm>
+          <a:off x="0" y="0"/>
+          <a:ext cx="0" cy="0"/>
+          <a:chOff x="0" y="0"/>
+          <a:chExt cx="0" cy="0"/>
+        </a:xfrm>
+      </p:grpSpPr>
+      <p:pic>
+        <p:nvPicPr>
+          <p:cNvPr id="3" name="図 2">
+            <a:extLst>
+              <a:ext uri="{FF2B5EF4-FFF2-40B4-BE49-F238E27FC236}">
+                <a16:creationId xmlns:a16="http://schemas.microsoft.com/office/drawing/2014/main" id="{A25D9650-A1A2-F73A-135E-FED5F118B1A2}"/>
+              </a:ext>
+            </a:extLst>
+          </p:cNvPr>
+          <p:cNvPicPr>
+            <a:picLocks noChangeAspect="1"/>
+          </p:cNvPicPr>
+          <p:nvPr/>
+        </p:nvPicPr>
+        <p:blipFill>
+          <a:blip r:embed="rId2">
+            <a:extLst>
+              <a:ext uri="{28A0092B-C50C-407E-A947-70E740481C1C}">
+                <a14:useLocalDpi xmlns:a14="http://schemas.microsoft.com/office/drawing/2010/main" val="0"/>
+              </a:ext>
+            </a:extLst>
+          </a:blip>
+          <a:stretch>
+            <a:fillRect/>
+          </a:stretch>
+        </p:blipFill>
+        <p:spPr>
+          <a:xfrm>
+            <a:off x="4595812" y="452437"/>
+            <a:ext cx="3000375" cy="5953125"/>
+          </a:xfrm>
+          <a:prstGeom prst="rect">
+            <a:avLst/>
+          </a:prstGeom>
+        </p:spPr>
+      </p:pic>
+      <p:sp>
+        <p:nvSpPr>
+          <p:cNvPr id="4" name="正方形/長方形 3">
+            <a:extLst>
+              <a:ext uri="{FF2B5EF4-FFF2-40B4-BE49-F238E27FC236}">
+                <a16:creationId xmlns:a16="http://schemas.microsoft.com/office/drawing/2014/main" id="{83414AF8-31A5-2984-2DEA-1664F94B54DF}"/>
+              </a:ext>
+            </a:extLst>
+          </p:cNvPr>
+          <p:cNvSpPr/>
+          <p:nvPr/>
+        </p:nvSpPr>
+        <p:spPr>
+          <a:xfrm>
+            <a:off x="4926746" y="4800600"/>
+            <a:ext cx="2507724" cy="1381531"/>
+          </a:xfrm>
+          <a:prstGeom prst="rect">
+            <a:avLst/>
+          </a:prstGeom>
+          <a:noFill/>
+          <a:ln w="28575">
+            <a:solidFill>
+              <a:srgbClr val="FF0000"/>
+            </a:solidFill>
+          </a:ln>
+        </p:spPr>
+        <p:style>
+          <a:lnRef idx="2">
+            <a:schemeClr val="accent1">
+              <a:shade val="15000"/>
+            </a:schemeClr>
+          </a:lnRef>
+          <a:fillRef idx="1">
+            <a:schemeClr val="accent1"/>
+          </a:fillRef>
+          <a:effectRef idx="0">
+            <a:schemeClr val="accent1"/>
+          </a:effectRef>
+          <a:fontRef idx="minor">
+            <a:schemeClr val="lt1"/>
+          </a:fontRef>
+        </p:style>
+        <p:txBody>
+          <a:bodyPr rtlCol="0" anchor="ctr"/>
+          <a:lstStyle/>
+          <a:p>
+            <a:pPr algn="ctr"/>
+            <a:endParaRPr kumimoji="1" lang="ja-JP" altLang="en-US"/>
+          </a:p>
+        </p:txBody>
+      </p:sp>
+      <p:pic>
+        <p:nvPicPr>
+          <p:cNvPr id="2" name="図 1">
+            <a:extLst>
+              <a:ext uri="{FF2B5EF4-FFF2-40B4-BE49-F238E27FC236}">
+                <a16:creationId xmlns:a16="http://schemas.microsoft.com/office/drawing/2014/main" id="{2782A42A-9CC7-DF7A-FE9F-22BB04CDBA91}"/>
+              </a:ext>
+            </a:extLst>
+          </p:cNvPr>
+          <p:cNvPicPr>
+            <a:picLocks noChangeAspect="1"/>
+          </p:cNvPicPr>
+          <p:nvPr/>
+        </p:nvPicPr>
+        <p:blipFill>
+          <a:blip r:embed="rId3"/>
+          <a:stretch>
+            <a:fillRect/>
+          </a:stretch>
+        </p:blipFill>
+        <p:spPr>
+          <a:xfrm>
+            <a:off x="723306" y="225823"/>
+            <a:ext cx="2999492" cy="5956308"/>
+          </a:xfrm>
+          <a:prstGeom prst="rect">
+            <a:avLst/>
+          </a:prstGeom>
+        </p:spPr>
+      </p:pic>
+    </p:spTree>
+    <p:extLst>
+      <p:ext uri="{BB962C8B-B14F-4D97-AF65-F5344CB8AC3E}">
+        <p14:creationId xmlns:p14="http://schemas.microsoft.com/office/powerpoint/2010/main" val="220766549"/>
+      </p:ext>
+    </p:extLst>
+  </p:cSld>
+  <p:clrMapOvr>
+    <a:masterClrMapping/>
+  </p:clrMapOvr>
+</p:sld>
+</file>
+
+<file path=ppt/slides/slide53.xml><?xml version="1.0" encoding="utf-8"?>
+<p:sld xmlns:a="http://schemas.openxmlformats.org/drawingml/2006/main" xmlns:r="http://schemas.openxmlformats.org/officeDocument/2006/relationships" xmlns:p="http://schemas.openxmlformats.org/presentationml/2006/main">
+  <p:cSld>
+    <p:spTree>
+      <p:nvGrpSpPr>
+        <p:cNvPr id="1" name="">
+          <a:extLst>
+            <a:ext uri="{FF2B5EF4-FFF2-40B4-BE49-F238E27FC236}">
+              <a16:creationId xmlns:a16="http://schemas.microsoft.com/office/drawing/2014/main" id="{F021C284-C2A0-3E10-72E3-53AACA51C1F4}"/>
+            </a:ext>
+          </a:extLst>
+        </p:cNvPr>
+        <p:cNvGrpSpPr/>
+        <p:nvPr/>
+      </p:nvGrpSpPr>
+      <p:grpSpPr>
+        <a:xfrm>
+          <a:off x="0" y="0"/>
+          <a:ext cx="0" cy="0"/>
+          <a:chOff x="0" y="0"/>
+          <a:chExt cx="0" cy="0"/>
+        </a:xfrm>
+      </p:grpSpPr>
+      <p:pic>
+        <p:nvPicPr>
+          <p:cNvPr id="9" name="図 8">
+            <a:extLst>
+              <a:ext uri="{FF2B5EF4-FFF2-40B4-BE49-F238E27FC236}">
+                <a16:creationId xmlns:a16="http://schemas.microsoft.com/office/drawing/2014/main" id="{E1EC8218-8151-5AD3-F2A7-F6C24CAE56B3}"/>
+              </a:ext>
+            </a:extLst>
+          </p:cNvPr>
+          <p:cNvPicPr>
+            <a:picLocks noChangeAspect="1"/>
+          </p:cNvPicPr>
+          <p:nvPr/>
+        </p:nvPicPr>
+        <p:blipFill>
+          <a:blip r:embed="rId2">
+            <a:extLst>
+              <a:ext uri="{28A0092B-C50C-407E-A947-70E740481C1C}">
+                <a14:useLocalDpi xmlns:a14="http://schemas.microsoft.com/office/drawing/2010/main" val="0"/>
+              </a:ext>
+            </a:extLst>
+          </a:blip>
+          <a:stretch>
+            <a:fillRect/>
+          </a:stretch>
+        </p:blipFill>
+        <p:spPr>
+          <a:xfrm>
+            <a:off x="4686300" y="461962"/>
+            <a:ext cx="2819400" cy="5934075"/>
+          </a:xfrm>
+          <a:prstGeom prst="rect">
+            <a:avLst/>
+          </a:prstGeom>
+        </p:spPr>
+      </p:pic>
+    </p:spTree>
+    <p:extLst>
+      <p:ext uri="{BB962C8B-B14F-4D97-AF65-F5344CB8AC3E}">
+        <p14:creationId xmlns:p14="http://schemas.microsoft.com/office/powerpoint/2010/main" val="4168896209"/>
+      </p:ext>
+    </p:extLst>
+  </p:cSld>
+  <p:clrMapOvr>
+    <a:masterClrMapping/>
+  </p:clrMapOvr>
+</p:sld>
+</file>
+
+<file path=ppt/slides/slide54.xml><?xml version="1.0" encoding="utf-8"?>
+<p:sld xmlns:a="http://schemas.openxmlformats.org/drawingml/2006/main" xmlns:r="http://schemas.openxmlformats.org/officeDocument/2006/relationships" xmlns:p="http://schemas.openxmlformats.org/presentationml/2006/main">
+  <p:cSld>
+    <p:spTree>
+      <p:nvGrpSpPr>
+        <p:cNvPr id="1" name="">
+          <a:extLst>
+            <a:ext uri="{FF2B5EF4-FFF2-40B4-BE49-F238E27FC236}">
+              <a16:creationId xmlns:a16="http://schemas.microsoft.com/office/drawing/2014/main" id="{7DC8285A-4D39-EBD6-F4C8-BA432FE56690}"/>
+            </a:ext>
+          </a:extLst>
+        </p:cNvPr>
+        <p:cNvGrpSpPr/>
+        <p:nvPr/>
+      </p:nvGrpSpPr>
+      <p:grpSpPr>
+        <a:xfrm>
+          <a:off x="0" y="0"/>
+          <a:ext cx="0" cy="0"/>
+          <a:chOff x="0" y="0"/>
+          <a:chExt cx="0" cy="0"/>
+        </a:xfrm>
+      </p:grpSpPr>
+      <p:pic>
+        <p:nvPicPr>
+          <p:cNvPr id="4" name="図 3">
+            <a:extLst>
+              <a:ext uri="{FF2B5EF4-FFF2-40B4-BE49-F238E27FC236}">
+                <a16:creationId xmlns:a16="http://schemas.microsoft.com/office/drawing/2014/main" id="{F0122182-AACF-4E20-530C-5AC0D86506CE}"/>
+              </a:ext>
+            </a:extLst>
+          </p:cNvPr>
+          <p:cNvPicPr>
+            <a:picLocks noChangeAspect="1"/>
+          </p:cNvPicPr>
+          <p:nvPr/>
+        </p:nvPicPr>
+        <p:blipFill>
+          <a:blip r:embed="rId2">
+            <a:extLst>
+              <a:ext uri="{28A0092B-C50C-407E-A947-70E740481C1C}">
+                <a14:useLocalDpi xmlns:a14="http://schemas.microsoft.com/office/drawing/2010/main" val="0"/>
+              </a:ext>
+            </a:extLst>
+          </a:blip>
+          <a:stretch>
+            <a:fillRect/>
+          </a:stretch>
+        </p:blipFill>
+        <p:spPr>
+          <a:xfrm>
+            <a:off x="4572000" y="1857375"/>
+            <a:ext cx="3048000" cy="3143250"/>
+          </a:xfrm>
+          <a:prstGeom prst="rect">
+            <a:avLst/>
+          </a:prstGeom>
+        </p:spPr>
+      </p:pic>
+    </p:spTree>
+    <p:extLst>
+      <p:ext uri="{BB962C8B-B14F-4D97-AF65-F5344CB8AC3E}">
+        <p14:creationId xmlns:p14="http://schemas.microsoft.com/office/powerpoint/2010/main" val="472675934"/>
+      </p:ext>
+    </p:extLst>
+  </p:cSld>
+  <p:clrMapOvr>
+    <a:masterClrMapping/>
+  </p:clrMapOvr>
+</p:sld>
+</file>
+
+<file path=ppt/slides/slide55.xml><?xml version="1.0" encoding="utf-8"?>
+<p:sld xmlns:a="http://schemas.openxmlformats.org/drawingml/2006/main" xmlns:r="http://schemas.openxmlformats.org/officeDocument/2006/relationships" xmlns:p="http://schemas.openxmlformats.org/presentationml/2006/main">
+  <p:cSld>
+    <p:spTree>
+      <p:nvGrpSpPr>
+        <p:cNvPr id="1" name="">
+          <a:extLst>
+            <a:ext uri="{FF2B5EF4-FFF2-40B4-BE49-F238E27FC236}">
+              <a16:creationId xmlns:a16="http://schemas.microsoft.com/office/drawing/2014/main" id="{CE82546D-C15A-93F5-5C05-CDB698A42140}"/>
+            </a:ext>
+          </a:extLst>
+        </p:cNvPr>
+        <p:cNvGrpSpPr/>
+        <p:nvPr/>
+      </p:nvGrpSpPr>
+      <p:grpSpPr>
+        <a:xfrm>
+          <a:off x="0" y="0"/>
+          <a:ext cx="0" cy="0"/>
+          <a:chOff x="0" y="0"/>
+          <a:chExt cx="0" cy="0"/>
+        </a:xfrm>
+      </p:grpSpPr>
+      <p:pic>
+        <p:nvPicPr>
+          <p:cNvPr id="7" name="図 6">
+            <a:extLst>
+              <a:ext uri="{FF2B5EF4-FFF2-40B4-BE49-F238E27FC236}">
+                <a16:creationId xmlns:a16="http://schemas.microsoft.com/office/drawing/2014/main" id="{C1C587A2-523A-41C6-4F2E-F1983416C922}"/>
+              </a:ext>
+            </a:extLst>
+          </p:cNvPr>
+          <p:cNvPicPr>
+            <a:picLocks noChangeAspect="1"/>
+          </p:cNvPicPr>
+          <p:nvPr/>
+        </p:nvPicPr>
+        <p:blipFill>
+          <a:blip r:embed="rId2">
+            <a:extLst>
+              <a:ext uri="{28A0092B-C50C-407E-A947-70E740481C1C}">
+                <a14:useLocalDpi xmlns:a14="http://schemas.microsoft.com/office/drawing/2010/main" val="0"/>
+              </a:ext>
+            </a:extLst>
+          </a:blip>
+          <a:stretch>
+            <a:fillRect/>
+          </a:stretch>
+        </p:blipFill>
+        <p:spPr>
+          <a:xfrm>
+            <a:off x="6967331" y="1857375"/>
+            <a:ext cx="3048000" cy="3143250"/>
+          </a:xfrm>
+          <a:prstGeom prst="rect">
+            <a:avLst/>
+          </a:prstGeom>
+        </p:spPr>
+      </p:pic>
+      <p:sp>
+        <p:nvSpPr>
+          <p:cNvPr id="2" name="正方形/長方形 1">
+            <a:extLst>
+              <a:ext uri="{FF2B5EF4-FFF2-40B4-BE49-F238E27FC236}">
+                <a16:creationId xmlns:a16="http://schemas.microsoft.com/office/drawing/2014/main" id="{BAB0FF27-A6CE-F7A8-76C7-E613A8ECCFD5}"/>
+              </a:ext>
+            </a:extLst>
+          </p:cNvPr>
+          <p:cNvSpPr/>
+          <p:nvPr/>
+        </p:nvSpPr>
+        <p:spPr>
+          <a:xfrm>
+            <a:off x="7106479" y="2673626"/>
+            <a:ext cx="2763078" cy="1500810"/>
+          </a:xfrm>
+          <a:prstGeom prst="rect">
+            <a:avLst/>
+          </a:prstGeom>
+          <a:noFill/>
+          <a:ln w="28575">
+            <a:solidFill>
+              <a:srgbClr val="FF0000"/>
+            </a:solidFill>
+          </a:ln>
+        </p:spPr>
+        <p:style>
+          <a:lnRef idx="2">
+            <a:schemeClr val="accent1">
+              <a:shade val="15000"/>
+            </a:schemeClr>
+          </a:lnRef>
+          <a:fillRef idx="1">
+            <a:schemeClr val="accent1"/>
+          </a:fillRef>
+          <a:effectRef idx="0">
+            <a:schemeClr val="accent1"/>
+          </a:effectRef>
+          <a:fontRef idx="minor">
+            <a:schemeClr val="lt1"/>
+          </a:fontRef>
+        </p:style>
+        <p:txBody>
+          <a:bodyPr rtlCol="0" anchor="ctr"/>
+          <a:lstStyle/>
+          <a:p>
+            <a:pPr algn="ctr"/>
+            <a:endParaRPr kumimoji="1" lang="ja-JP" altLang="en-US"/>
+          </a:p>
+        </p:txBody>
+      </p:sp>
+      <p:pic>
+        <p:nvPicPr>
+          <p:cNvPr id="8" name="図 7">
+            <a:extLst>
+              <a:ext uri="{FF2B5EF4-FFF2-40B4-BE49-F238E27FC236}">
+                <a16:creationId xmlns:a16="http://schemas.microsoft.com/office/drawing/2014/main" id="{BCE7D84F-51CA-9991-9ED0-5BB3E6C2BCB5}"/>
+              </a:ext>
+            </a:extLst>
+          </p:cNvPr>
+          <p:cNvPicPr>
+            <a:picLocks noChangeAspect="1"/>
+          </p:cNvPicPr>
+          <p:nvPr/>
+        </p:nvPicPr>
+        <p:blipFill>
+          <a:blip r:embed="rId3"/>
+          <a:stretch>
+            <a:fillRect/>
+          </a:stretch>
+        </p:blipFill>
+        <p:spPr>
+          <a:xfrm>
+            <a:off x="2322443" y="2018170"/>
+            <a:ext cx="3048264" cy="3139712"/>
+          </a:xfrm>
+          <a:prstGeom prst="rect">
+            <a:avLst/>
+          </a:prstGeom>
+        </p:spPr>
+      </p:pic>
+    </p:spTree>
+    <p:extLst>
+      <p:ext uri="{BB962C8B-B14F-4D97-AF65-F5344CB8AC3E}">
+        <p14:creationId xmlns:p14="http://schemas.microsoft.com/office/powerpoint/2010/main" val="924799808"/>
+      </p:ext>
+    </p:extLst>
+  </p:cSld>
+  <p:clrMapOvr>
+    <a:masterClrMapping/>
+  </p:clrMapOvr>
+</p:sld>
+</file>
+
+<file path=ppt/slides/slide56.xml><?xml version="1.0" encoding="utf-8"?>
+<p:sld xmlns:a="http://schemas.openxmlformats.org/drawingml/2006/main" xmlns:r="http://schemas.openxmlformats.org/officeDocument/2006/relationships" xmlns:p="http://schemas.openxmlformats.org/presentationml/2006/main">
+  <p:cSld>
+    <p:spTree>
+      <p:nvGrpSpPr>
+        <p:cNvPr id="1" name="">
+          <a:extLst>
+            <a:ext uri="{FF2B5EF4-FFF2-40B4-BE49-F238E27FC236}">
+              <a16:creationId xmlns:a16="http://schemas.microsoft.com/office/drawing/2014/main" id="{706BF3AD-96E8-4A2E-8EE7-F6AD0A337D7F}"/>
+            </a:ext>
+          </a:extLst>
+        </p:cNvPr>
+        <p:cNvGrpSpPr/>
+        <p:nvPr/>
+      </p:nvGrpSpPr>
+      <p:grpSpPr>
+        <a:xfrm>
+          <a:off x="0" y="0"/>
+          <a:ext cx="0" cy="0"/>
+          <a:chOff x="0" y="0"/>
+          <a:chExt cx="0" cy="0"/>
+        </a:xfrm>
+      </p:grpSpPr>
+      <p:pic>
+        <p:nvPicPr>
+          <p:cNvPr id="6" name="図 5">
+            <a:extLst>
+              <a:ext uri="{FF2B5EF4-FFF2-40B4-BE49-F238E27FC236}">
+                <a16:creationId xmlns:a16="http://schemas.microsoft.com/office/drawing/2014/main" id="{01599F1C-C05B-20F5-758B-8161206E81C6}"/>
+              </a:ext>
+            </a:extLst>
+          </p:cNvPr>
+          <p:cNvPicPr>
+            <a:picLocks noChangeAspect="1"/>
+          </p:cNvPicPr>
+          <p:nvPr/>
+        </p:nvPicPr>
+        <p:blipFill>
+          <a:blip r:embed="rId2">
+            <a:extLst>
+              <a:ext uri="{28A0092B-C50C-407E-A947-70E740481C1C}">
+                <a14:useLocalDpi xmlns:a14="http://schemas.microsoft.com/office/drawing/2010/main" val="0"/>
+              </a:ext>
+            </a:extLst>
+          </a:blip>
+          <a:stretch>
+            <a:fillRect/>
+          </a:stretch>
+        </p:blipFill>
+        <p:spPr>
+          <a:xfrm>
+            <a:off x="6967331" y="1857375"/>
+            <a:ext cx="3048000" cy="3143250"/>
+          </a:xfrm>
+          <a:prstGeom prst="rect">
+            <a:avLst/>
+          </a:prstGeom>
+        </p:spPr>
+      </p:pic>
+      <p:sp>
+        <p:nvSpPr>
+          <p:cNvPr id="7" name="正方形/長方形 6">
+            <a:extLst>
+              <a:ext uri="{FF2B5EF4-FFF2-40B4-BE49-F238E27FC236}">
+                <a16:creationId xmlns:a16="http://schemas.microsoft.com/office/drawing/2014/main" id="{F35770A0-F7A1-9AE7-9D0A-246DC1910557}"/>
+              </a:ext>
+            </a:extLst>
+          </p:cNvPr>
+          <p:cNvSpPr/>
+          <p:nvPr/>
+        </p:nvSpPr>
+        <p:spPr>
+          <a:xfrm>
+            <a:off x="8816010" y="2087218"/>
+            <a:ext cx="1043607" cy="506895"/>
+          </a:xfrm>
+          <a:prstGeom prst="rect">
+            <a:avLst/>
+          </a:prstGeom>
+          <a:noFill/>
+          <a:ln w="28575">
+            <a:solidFill>
+              <a:srgbClr val="FF0000"/>
+            </a:solidFill>
+          </a:ln>
+        </p:spPr>
+        <p:style>
+          <a:lnRef idx="2">
+            <a:schemeClr val="accent1">
+              <a:shade val="15000"/>
+            </a:schemeClr>
+          </a:lnRef>
+          <a:fillRef idx="1">
+            <a:schemeClr val="accent1"/>
+          </a:fillRef>
+          <a:effectRef idx="0">
+            <a:schemeClr val="accent1"/>
+          </a:effectRef>
+          <a:fontRef idx="minor">
+            <a:schemeClr val="lt1"/>
+          </a:fontRef>
+        </p:style>
+        <p:txBody>
+          <a:bodyPr rtlCol="0" anchor="ctr"/>
+          <a:lstStyle/>
+          <a:p>
+            <a:pPr algn="ctr"/>
+            <a:endParaRPr kumimoji="1" lang="ja-JP" altLang="en-US"/>
+          </a:p>
+        </p:txBody>
+      </p:sp>
+      <p:pic>
+        <p:nvPicPr>
+          <p:cNvPr id="8" name="図 7">
+            <a:extLst>
+              <a:ext uri="{FF2B5EF4-FFF2-40B4-BE49-F238E27FC236}">
+                <a16:creationId xmlns:a16="http://schemas.microsoft.com/office/drawing/2014/main" id="{638BCB97-CBD8-3A09-AB17-E4C970D00477}"/>
+              </a:ext>
+            </a:extLst>
+          </p:cNvPr>
+          <p:cNvPicPr>
+            <a:picLocks noChangeAspect="1"/>
+          </p:cNvPicPr>
+          <p:nvPr/>
+        </p:nvPicPr>
+        <p:blipFill>
+          <a:blip r:embed="rId3"/>
+          <a:stretch>
+            <a:fillRect/>
+          </a:stretch>
+        </p:blipFill>
+        <p:spPr>
+          <a:xfrm>
+            <a:off x="1699459" y="1860913"/>
+            <a:ext cx="3048264" cy="3139712"/>
+          </a:xfrm>
+          <a:prstGeom prst="rect">
+            <a:avLst/>
+          </a:prstGeom>
+        </p:spPr>
+      </p:pic>
+    </p:spTree>
+    <p:extLst>
+      <p:ext uri="{BB962C8B-B14F-4D97-AF65-F5344CB8AC3E}">
+        <p14:creationId xmlns:p14="http://schemas.microsoft.com/office/powerpoint/2010/main" val="3944593142"/>
+      </p:ext>
+    </p:extLst>
+  </p:cSld>
+  <p:clrMapOvr>
+    <a:masterClrMapping/>
+  </p:clrMapOvr>
+</p:sld>
+</file>
+
+<file path=ppt/slides/slide57.xml><?xml version="1.0" encoding="utf-8"?>
+<p:sld xmlns:a="http://schemas.openxmlformats.org/drawingml/2006/main" xmlns:r="http://schemas.openxmlformats.org/officeDocument/2006/relationships" xmlns:p="http://schemas.openxmlformats.org/presentationml/2006/main">
+  <p:cSld>
+    <p:spTree>
+      <p:nvGrpSpPr>
+        <p:cNvPr id="1" name="">
+          <a:extLst>
+            <a:ext uri="{FF2B5EF4-FFF2-40B4-BE49-F238E27FC236}">
+              <a16:creationId xmlns:a16="http://schemas.microsoft.com/office/drawing/2014/main" id="{1426CCE2-0EB0-D554-E15B-1B604363A793}"/>
+            </a:ext>
+          </a:extLst>
+        </p:cNvPr>
+        <p:cNvGrpSpPr/>
+        <p:nvPr/>
+      </p:nvGrpSpPr>
+      <p:grpSpPr>
+        <a:xfrm>
+          <a:off x="0" y="0"/>
+          <a:ext cx="0" cy="0"/>
+          <a:chOff x="0" y="0"/>
+          <a:chExt cx="0" cy="0"/>
+        </a:xfrm>
+      </p:grpSpPr>
+      <p:pic>
+        <p:nvPicPr>
+          <p:cNvPr id="6" name="図 5">
+            <a:extLst>
+              <a:ext uri="{FF2B5EF4-FFF2-40B4-BE49-F238E27FC236}">
+                <a16:creationId xmlns:a16="http://schemas.microsoft.com/office/drawing/2014/main" id="{193C2D56-5FD2-8E63-3CFC-E9FED47207FD}"/>
+              </a:ext>
+            </a:extLst>
+          </p:cNvPr>
+          <p:cNvPicPr>
+            <a:picLocks noChangeAspect="1"/>
+          </p:cNvPicPr>
+          <p:nvPr/>
+        </p:nvPicPr>
+        <p:blipFill>
+          <a:blip r:embed="rId2">
+            <a:extLst>
+              <a:ext uri="{28A0092B-C50C-407E-A947-70E740481C1C}">
+                <a14:useLocalDpi xmlns:a14="http://schemas.microsoft.com/office/drawing/2010/main" val="0"/>
+              </a:ext>
+            </a:extLst>
+          </a:blip>
+          <a:stretch>
+            <a:fillRect/>
+          </a:stretch>
+        </p:blipFill>
+        <p:spPr>
+          <a:xfrm>
+            <a:off x="4243387" y="1466850"/>
+            <a:ext cx="3705225" cy="3924300"/>
+          </a:xfrm>
+          <a:prstGeom prst="rect">
+            <a:avLst/>
+          </a:prstGeom>
+        </p:spPr>
+      </p:pic>
+      <p:sp>
+        <p:nvSpPr>
+          <p:cNvPr id="4" name="正方形/長方形 3">
+            <a:extLst>
+              <a:ext uri="{FF2B5EF4-FFF2-40B4-BE49-F238E27FC236}">
+                <a16:creationId xmlns:a16="http://schemas.microsoft.com/office/drawing/2014/main" id="{FB0C8B24-C78C-6242-E743-70BDC30D01EB}"/>
+              </a:ext>
+            </a:extLst>
+          </p:cNvPr>
+          <p:cNvSpPr/>
+          <p:nvPr/>
+        </p:nvSpPr>
+        <p:spPr>
+          <a:xfrm>
+            <a:off x="4243387" y="1555268"/>
+            <a:ext cx="3628404" cy="482254"/>
+          </a:xfrm>
+          <a:prstGeom prst="rect">
+            <a:avLst/>
+          </a:prstGeom>
+          <a:noFill/>
+          <a:ln w="28575">
+            <a:solidFill>
+              <a:srgbClr val="FF0000"/>
+            </a:solidFill>
+          </a:ln>
+        </p:spPr>
+        <p:style>
+          <a:lnRef idx="2">
+            <a:schemeClr val="accent1">
+              <a:shade val="15000"/>
+            </a:schemeClr>
+          </a:lnRef>
+          <a:fillRef idx="1">
+            <a:schemeClr val="accent1"/>
+          </a:fillRef>
+          <a:effectRef idx="0">
+            <a:schemeClr val="accent1"/>
+          </a:effectRef>
+          <a:fontRef idx="minor">
+            <a:schemeClr val="lt1"/>
+          </a:fontRef>
+        </p:style>
+        <p:txBody>
+          <a:bodyPr rtlCol="0" anchor="ctr"/>
+          <a:lstStyle/>
+          <a:p>
+            <a:pPr algn="ctr"/>
+            <a:endParaRPr kumimoji="1" lang="ja-JP" altLang="en-US"/>
+          </a:p>
+        </p:txBody>
+      </p:sp>
+      <p:pic>
+        <p:nvPicPr>
+          <p:cNvPr id="7" name="図 6">
+            <a:extLst>
+              <a:ext uri="{FF2B5EF4-FFF2-40B4-BE49-F238E27FC236}">
+                <a16:creationId xmlns:a16="http://schemas.microsoft.com/office/drawing/2014/main" id="{2876CE2C-DC78-0117-2FD4-7E25FFB3936D}"/>
+              </a:ext>
+            </a:extLst>
+          </p:cNvPr>
+          <p:cNvPicPr>
+            <a:picLocks noChangeAspect="1"/>
+          </p:cNvPicPr>
+          <p:nvPr/>
+        </p:nvPicPr>
+        <p:blipFill>
+          <a:blip r:embed="rId3"/>
+          <a:stretch>
+            <a:fillRect/>
+          </a:stretch>
+        </p:blipFill>
+        <p:spPr>
+          <a:xfrm>
+            <a:off x="353672" y="1555268"/>
+            <a:ext cx="3718882" cy="3920068"/>
+          </a:xfrm>
+          <a:prstGeom prst="rect">
+            <a:avLst/>
+          </a:prstGeom>
+        </p:spPr>
+      </p:pic>
+    </p:spTree>
+    <p:extLst>
+      <p:ext uri="{BB962C8B-B14F-4D97-AF65-F5344CB8AC3E}">
+        <p14:creationId xmlns:p14="http://schemas.microsoft.com/office/powerpoint/2010/main" val="747766483"/>
+      </p:ext>
+    </p:extLst>
+  </p:cSld>
+  <p:clrMapOvr>
+    <a:masterClrMapping/>
+  </p:clrMapOvr>
+</p:sld>
+</file>
+
+<file path=ppt/slides/slide58.xml><?xml version="1.0" encoding="utf-8"?>
+<p:sld xmlns:a="http://schemas.openxmlformats.org/drawingml/2006/main" xmlns:r="http://schemas.openxmlformats.org/officeDocument/2006/relationships" xmlns:p="http://schemas.openxmlformats.org/presentationml/2006/main">
+  <p:cSld>
+    <p:spTree>
+      <p:nvGrpSpPr>
+        <p:cNvPr id="1" name="">
+          <a:extLst>
+            <a:ext uri="{FF2B5EF4-FFF2-40B4-BE49-F238E27FC236}">
+              <a16:creationId xmlns:a16="http://schemas.microsoft.com/office/drawing/2014/main" id="{F4CE15AD-5D21-9DF2-6383-663709289463}"/>
+            </a:ext>
+          </a:extLst>
+        </p:cNvPr>
+        <p:cNvGrpSpPr/>
+        <p:nvPr/>
+      </p:nvGrpSpPr>
+      <p:grpSpPr>
+        <a:xfrm>
+          <a:off x="0" y="0"/>
+          <a:ext cx="0" cy="0"/>
+          <a:chOff x="0" y="0"/>
+          <a:chExt cx="0" cy="0"/>
+        </a:xfrm>
+      </p:grpSpPr>
+      <p:pic>
+        <p:nvPicPr>
+          <p:cNvPr id="3" name="図 2">
+            <a:extLst>
+              <a:ext uri="{FF2B5EF4-FFF2-40B4-BE49-F238E27FC236}">
+                <a16:creationId xmlns:a16="http://schemas.microsoft.com/office/drawing/2014/main" id="{729D42A0-8750-3EE5-0974-17AB1F205A3D}"/>
+              </a:ext>
+            </a:extLst>
+          </p:cNvPr>
+          <p:cNvPicPr>
+            <a:picLocks noChangeAspect="1"/>
+          </p:cNvPicPr>
+          <p:nvPr/>
+        </p:nvPicPr>
+        <p:blipFill>
+          <a:blip r:embed="rId2">
+            <a:extLst>
+              <a:ext uri="{28A0092B-C50C-407E-A947-70E740481C1C}">
+                <a14:useLocalDpi xmlns:a14="http://schemas.microsoft.com/office/drawing/2010/main" val="0"/>
+              </a:ext>
+            </a:extLst>
+          </a:blip>
+          <a:stretch>
+            <a:fillRect/>
+          </a:stretch>
+        </p:blipFill>
+        <p:spPr>
+          <a:xfrm>
+            <a:off x="4686300" y="461962"/>
+            <a:ext cx="2819400" cy="5934075"/>
+          </a:xfrm>
+          <a:prstGeom prst="rect">
+            <a:avLst/>
+          </a:prstGeom>
+        </p:spPr>
+      </p:pic>
+      <p:sp>
+        <p:nvSpPr>
+          <p:cNvPr id="4" name="正方形/長方形 3">
+            <a:extLst>
+              <a:ext uri="{FF2B5EF4-FFF2-40B4-BE49-F238E27FC236}">
+                <a16:creationId xmlns:a16="http://schemas.microsoft.com/office/drawing/2014/main" id="{D6BD2D63-6B9A-7570-56F9-EE800633EBE8}"/>
+              </a:ext>
+            </a:extLst>
+          </p:cNvPr>
+          <p:cNvSpPr/>
+          <p:nvPr/>
+        </p:nvSpPr>
+        <p:spPr>
+          <a:xfrm>
+            <a:off x="4799979" y="6067633"/>
+            <a:ext cx="2634491" cy="348282"/>
+          </a:xfrm>
+          <a:prstGeom prst="rect">
+            <a:avLst/>
+          </a:prstGeom>
+          <a:noFill/>
+          <a:ln w="28575">
+            <a:solidFill>
+              <a:srgbClr val="FF0000"/>
+            </a:solidFill>
+          </a:ln>
+        </p:spPr>
+        <p:style>
+          <a:lnRef idx="2">
+            <a:schemeClr val="accent1">
+              <a:shade val="15000"/>
+            </a:schemeClr>
+          </a:lnRef>
+          <a:fillRef idx="1">
+            <a:schemeClr val="accent1"/>
+          </a:fillRef>
+          <a:effectRef idx="0">
+            <a:schemeClr val="accent1"/>
+          </a:effectRef>
+          <a:fontRef idx="minor">
+            <a:schemeClr val="lt1"/>
+          </a:fontRef>
+        </p:style>
+        <p:txBody>
+          <a:bodyPr rtlCol="0" anchor="ctr"/>
+          <a:lstStyle/>
+          <a:p>
+            <a:pPr algn="ctr"/>
+            <a:endParaRPr kumimoji="1" lang="ja-JP" altLang="en-US"/>
+          </a:p>
+        </p:txBody>
+      </p:sp>
+      <p:pic>
+        <p:nvPicPr>
+          <p:cNvPr id="5" name="図 4">
+            <a:extLst>
+              <a:ext uri="{FF2B5EF4-FFF2-40B4-BE49-F238E27FC236}">
+                <a16:creationId xmlns:a16="http://schemas.microsoft.com/office/drawing/2014/main" id="{FB051E8E-B4A7-88DF-157B-D22CA942D5D6}"/>
+              </a:ext>
+            </a:extLst>
+          </p:cNvPr>
+          <p:cNvPicPr>
+            <a:picLocks noChangeAspect="1"/>
+          </p:cNvPicPr>
+          <p:nvPr/>
+        </p:nvPicPr>
+        <p:blipFill>
+          <a:blip r:embed="rId3"/>
+          <a:stretch>
+            <a:fillRect/>
+          </a:stretch>
+        </p:blipFill>
+        <p:spPr>
+          <a:xfrm>
+            <a:off x="1715902" y="633593"/>
+            <a:ext cx="2816596" cy="5968501"/>
+          </a:xfrm>
+          <a:prstGeom prst="rect">
+            <a:avLst/>
+          </a:prstGeom>
+        </p:spPr>
+      </p:pic>
+    </p:spTree>
+    <p:extLst>
+      <p:ext uri="{BB962C8B-B14F-4D97-AF65-F5344CB8AC3E}">
+        <p14:creationId xmlns:p14="http://schemas.microsoft.com/office/powerpoint/2010/main" val="1115862692"/>
+      </p:ext>
+    </p:extLst>
+  </p:cSld>
+  <p:clrMapOvr>
+    <a:masterClrMapping/>
+  </p:clrMapOvr>
+</p:sld>
+</file>
+
+<file path=ppt/slides/slide59.xml><?xml version="1.0" encoding="utf-8"?>
 <p:sld xmlns:a="http://schemas.openxmlformats.org/drawingml/2006/main" xmlns:r="http://schemas.openxmlformats.org/officeDocument/2006/relationships" xmlns:p="http://schemas.openxmlformats.org/presentationml/2006/main">
   <p:cSld>
     <p:spTree>
@@ -8167,7 +10376,131 @@
 </p:sld>
 </file>
 
-<file path=ppt/slides/slide46.xml><?xml version="1.0" encoding="utf-8"?>
+<file path=ppt/slides/slide6.xml><?xml version="1.0" encoding="utf-8"?>
+<p:sld xmlns:a="http://schemas.openxmlformats.org/drawingml/2006/main" xmlns:r="http://schemas.openxmlformats.org/officeDocument/2006/relationships" xmlns:p="http://schemas.openxmlformats.org/presentationml/2006/main">
+  <p:cSld>
+    <p:spTree>
+      <p:nvGrpSpPr>
+        <p:cNvPr id="1" name="">
+          <a:extLst>
+            <a:ext uri="{FF2B5EF4-FFF2-40B4-BE49-F238E27FC236}">
+              <a16:creationId xmlns:a16="http://schemas.microsoft.com/office/drawing/2014/main" id="{2385273C-31EF-FD48-5B5F-24A7A498BA4C}"/>
+            </a:ext>
+          </a:extLst>
+        </p:cNvPr>
+        <p:cNvGrpSpPr/>
+        <p:nvPr/>
+      </p:nvGrpSpPr>
+      <p:grpSpPr>
+        <a:xfrm>
+          <a:off x="0" y="0"/>
+          <a:ext cx="0" cy="0"/>
+          <a:chOff x="0" y="0"/>
+          <a:chExt cx="0" cy="0"/>
+        </a:xfrm>
+      </p:grpSpPr>
+      <p:pic>
+        <p:nvPicPr>
+          <p:cNvPr id="5" name="図 4">
+            <a:extLst>
+              <a:ext uri="{FF2B5EF4-FFF2-40B4-BE49-F238E27FC236}">
+                <a16:creationId xmlns:a16="http://schemas.microsoft.com/office/drawing/2014/main" id="{F6F7ACCB-F1AB-0E56-B6C1-68F03EDC9119}"/>
+              </a:ext>
+            </a:extLst>
+          </p:cNvPr>
+          <p:cNvPicPr>
+            <a:picLocks noChangeAspect="1"/>
+          </p:cNvPicPr>
+          <p:nvPr/>
+        </p:nvPicPr>
+        <p:blipFill>
+          <a:blip r:embed="rId2">
+            <a:extLst>
+              <a:ext uri="{28A0092B-C50C-407E-A947-70E740481C1C}">
+                <a14:useLocalDpi xmlns:a14="http://schemas.microsoft.com/office/drawing/2010/main" val="0"/>
+              </a:ext>
+            </a:extLst>
+          </a:blip>
+          <a:stretch>
+            <a:fillRect/>
+          </a:stretch>
+        </p:blipFill>
+        <p:spPr>
+          <a:xfrm>
+            <a:off x="4362450" y="2776537"/>
+            <a:ext cx="3467100" cy="1304925"/>
+          </a:xfrm>
+          <a:prstGeom prst="rect">
+            <a:avLst/>
+          </a:prstGeom>
+        </p:spPr>
+      </p:pic>
+      <p:sp>
+        <p:nvSpPr>
+          <p:cNvPr id="6" name="正方形/長方形 5">
+            <a:extLst>
+              <a:ext uri="{FF2B5EF4-FFF2-40B4-BE49-F238E27FC236}">
+                <a16:creationId xmlns:a16="http://schemas.microsoft.com/office/drawing/2014/main" id="{221BE025-56A0-8AA6-BD15-2F7A2FBBEF48}"/>
+              </a:ext>
+            </a:extLst>
+          </p:cNvPr>
+          <p:cNvSpPr/>
+          <p:nvPr/>
+        </p:nvSpPr>
+        <p:spPr>
+          <a:xfrm>
+            <a:off x="6858000" y="2879195"/>
+            <a:ext cx="855133" cy="482603"/>
+          </a:xfrm>
+          <a:prstGeom prst="rect">
+            <a:avLst/>
+          </a:prstGeom>
+          <a:noFill/>
+          <a:ln w="28575">
+            <a:solidFill>
+              <a:srgbClr val="FF0000"/>
+            </a:solidFill>
+          </a:ln>
+        </p:spPr>
+        <p:style>
+          <a:lnRef idx="2">
+            <a:schemeClr val="accent1">
+              <a:shade val="15000"/>
+            </a:schemeClr>
+          </a:lnRef>
+          <a:fillRef idx="1">
+            <a:schemeClr val="accent1"/>
+          </a:fillRef>
+          <a:effectRef idx="0">
+            <a:schemeClr val="accent1"/>
+          </a:effectRef>
+          <a:fontRef idx="minor">
+            <a:schemeClr val="lt1"/>
+          </a:fontRef>
+        </p:style>
+        <p:txBody>
+          <a:bodyPr rtlCol="0" anchor="ctr"/>
+          <a:lstStyle/>
+          <a:p>
+            <a:pPr algn="ctr"/>
+            <a:endParaRPr kumimoji="1" lang="ja-JP" altLang="en-US"/>
+          </a:p>
+        </p:txBody>
+      </p:sp>
+    </p:spTree>
+    <p:extLst>
+      <p:ext uri="{BB962C8B-B14F-4D97-AF65-F5344CB8AC3E}">
+        <p14:creationId xmlns:p14="http://schemas.microsoft.com/office/powerpoint/2010/main" val="1183525208"/>
+      </p:ext>
+    </p:extLst>
+  </p:cSld>
+  <p:clrMapOvr>
+    <a:masterClrMapping/>
+  </p:clrMapOvr>
+</p:sld>
+</file>
+
+<file path=ppt/slides/slide60.xml><?xml version="1.0" encoding="utf-8"?>
 <p:sld xmlns:a="http://schemas.openxmlformats.org/drawingml/2006/main" xmlns:r="http://schemas.openxmlformats.org/officeDocument/2006/relationships" xmlns:p="http://schemas.openxmlformats.org/presentationml/2006/main">
   <p:cSld>
     <p:spTree>
@@ -8203,7 +10536,7 @@
 </p:sld>
 </file>
 
-<file path=ppt/slides/slide47.xml><?xml version="1.0" encoding="utf-8"?>
+<file path=ppt/slides/slide61.xml><?xml version="1.0" encoding="utf-8"?>
 <p:sld xmlns:a="http://schemas.openxmlformats.org/drawingml/2006/main" xmlns:r="http://schemas.openxmlformats.org/officeDocument/2006/relationships" xmlns:p="http://schemas.openxmlformats.org/presentationml/2006/main">
   <p:cSld>
     <p:spTree>
@@ -8239,7 +10572,7 @@
 </p:sld>
 </file>
 
-<file path=ppt/slides/slide48.xml><?xml version="1.0" encoding="utf-8"?>
+<file path=ppt/slides/slide62.xml><?xml version="1.0" encoding="utf-8"?>
 <p:sld xmlns:a="http://schemas.openxmlformats.org/drawingml/2006/main" xmlns:r="http://schemas.openxmlformats.org/officeDocument/2006/relationships" xmlns:p="http://schemas.openxmlformats.org/presentationml/2006/main">
   <p:cSld>
     <p:spTree>
@@ -8275,7 +10608,7 @@
 </p:sld>
 </file>
 
-<file path=ppt/slides/slide49.xml><?xml version="1.0" encoding="utf-8"?>
+<file path=ppt/slides/slide63.xml><?xml version="1.0" encoding="utf-8"?>
 <p:sld xmlns:a="http://schemas.openxmlformats.org/drawingml/2006/main" xmlns:r="http://schemas.openxmlformats.org/officeDocument/2006/relationships" xmlns:p="http://schemas.openxmlformats.org/presentationml/2006/main">
   <p:cSld>
     <p:spTree>
@@ -8311,125 +10644,7 @@
 </p:sld>
 </file>
 
-<file path=ppt/slides/slide5.xml><?xml version="1.0" encoding="utf-8"?>
-<p:sld xmlns:a="http://schemas.openxmlformats.org/drawingml/2006/main" xmlns:r="http://schemas.openxmlformats.org/officeDocument/2006/relationships" xmlns:p="http://schemas.openxmlformats.org/presentationml/2006/main">
-  <p:cSld>
-    <p:spTree>
-      <p:nvGrpSpPr>
-        <p:cNvPr id="1" name=""/>
-        <p:cNvGrpSpPr/>
-        <p:nvPr/>
-      </p:nvGrpSpPr>
-      <p:grpSpPr>
-        <a:xfrm>
-          <a:off x="0" y="0"/>
-          <a:ext cx="0" cy="0"/>
-          <a:chOff x="0" y="0"/>
-          <a:chExt cx="0" cy="0"/>
-        </a:xfrm>
-      </p:grpSpPr>
-      <p:pic>
-        <p:nvPicPr>
-          <p:cNvPr id="7" name="図 6">
-            <a:extLst>
-              <a:ext uri="{FF2B5EF4-FFF2-40B4-BE49-F238E27FC236}">
-                <a16:creationId xmlns:a16="http://schemas.microsoft.com/office/drawing/2014/main" id="{2D93D535-CACA-8380-34C2-D0C0861ACDC1}"/>
-              </a:ext>
-            </a:extLst>
-          </p:cNvPr>
-          <p:cNvPicPr>
-            <a:picLocks noChangeAspect="1"/>
-          </p:cNvPicPr>
-          <p:nvPr/>
-        </p:nvPicPr>
-        <p:blipFill>
-          <a:blip r:embed="rId2">
-            <a:extLst>
-              <a:ext uri="{28A0092B-C50C-407E-A947-70E740481C1C}">
-                <a14:useLocalDpi xmlns:a14="http://schemas.microsoft.com/office/drawing/2010/main" val="0"/>
-              </a:ext>
-            </a:extLst>
-          </a:blip>
-          <a:stretch>
-            <a:fillRect/>
-          </a:stretch>
-        </p:blipFill>
-        <p:spPr>
-          <a:xfrm>
-            <a:off x="4300537" y="1490662"/>
-            <a:ext cx="3590925" cy="3876675"/>
-          </a:xfrm>
-          <a:prstGeom prst="rect">
-            <a:avLst/>
-          </a:prstGeom>
-        </p:spPr>
-      </p:pic>
-      <p:sp>
-        <p:nvSpPr>
-          <p:cNvPr id="8" name="正方形/長方形 7">
-            <a:extLst>
-              <a:ext uri="{FF2B5EF4-FFF2-40B4-BE49-F238E27FC236}">
-                <a16:creationId xmlns:a16="http://schemas.microsoft.com/office/drawing/2014/main" id="{27A5B397-DA30-10A9-3372-621A2BDC21DE}"/>
-              </a:ext>
-            </a:extLst>
-          </p:cNvPr>
-          <p:cNvSpPr/>
-          <p:nvPr/>
-        </p:nvSpPr>
-        <p:spPr>
-          <a:xfrm>
-            <a:off x="6832600" y="1490662"/>
-            <a:ext cx="855133" cy="482603"/>
-          </a:xfrm>
-          <a:prstGeom prst="rect">
-            <a:avLst/>
-          </a:prstGeom>
-          <a:noFill/>
-          <a:ln w="28575">
-            <a:solidFill>
-              <a:srgbClr val="FF0000"/>
-            </a:solidFill>
-          </a:ln>
-        </p:spPr>
-        <p:style>
-          <a:lnRef idx="2">
-            <a:schemeClr val="accent1">
-              <a:shade val="15000"/>
-            </a:schemeClr>
-          </a:lnRef>
-          <a:fillRef idx="1">
-            <a:schemeClr val="accent1"/>
-          </a:fillRef>
-          <a:effectRef idx="0">
-            <a:schemeClr val="accent1"/>
-          </a:effectRef>
-          <a:fontRef idx="minor">
-            <a:schemeClr val="lt1"/>
-          </a:fontRef>
-        </p:style>
-        <p:txBody>
-          <a:bodyPr rtlCol="0" anchor="ctr"/>
-          <a:lstStyle/>
-          <a:p>
-            <a:pPr algn="ctr"/>
-            <a:endParaRPr kumimoji="1" lang="ja-JP" altLang="en-US"/>
-          </a:p>
-        </p:txBody>
-      </p:sp>
-    </p:spTree>
-    <p:extLst>
-      <p:ext uri="{BB962C8B-B14F-4D97-AF65-F5344CB8AC3E}">
-        <p14:creationId xmlns:p14="http://schemas.microsoft.com/office/powerpoint/2010/main" val="3076449738"/>
-      </p:ext>
-    </p:extLst>
-  </p:cSld>
-  <p:clrMapOvr>
-    <a:masterClrMapping/>
-  </p:clrMapOvr>
-</p:sld>
-</file>
-
-<file path=ppt/slides/slide50.xml><?xml version="1.0" encoding="utf-8"?>
+<file path=ppt/slides/slide64.xml><?xml version="1.0" encoding="utf-8"?>
 <p:sld xmlns:a="http://schemas.openxmlformats.org/drawingml/2006/main" xmlns:r="http://schemas.openxmlformats.org/officeDocument/2006/relationships" xmlns:p="http://schemas.openxmlformats.org/presentationml/2006/main">
   <p:cSld>
     <p:spTree>
@@ -8465,7 +10680,7 @@
 </p:sld>
 </file>
 
-<file path=ppt/slides/slide51.xml><?xml version="1.0" encoding="utf-8"?>
+<file path=ppt/slides/slide65.xml><?xml version="1.0" encoding="utf-8"?>
 <p:sld xmlns:a="http://schemas.openxmlformats.org/drawingml/2006/main" xmlns:r="http://schemas.openxmlformats.org/officeDocument/2006/relationships" xmlns:p="http://schemas.openxmlformats.org/presentationml/2006/main">
   <p:cSld>
     <p:spTree>
@@ -8492,130 +10707,6 @@
     <p:extLst>
       <p:ext uri="{BB962C8B-B14F-4D97-AF65-F5344CB8AC3E}">
         <p14:creationId xmlns:p14="http://schemas.microsoft.com/office/powerpoint/2010/main" val="2067742108"/>
-      </p:ext>
-    </p:extLst>
-  </p:cSld>
-  <p:clrMapOvr>
-    <a:masterClrMapping/>
-  </p:clrMapOvr>
-</p:sld>
-</file>
-
-<file path=ppt/slides/slide6.xml><?xml version="1.0" encoding="utf-8"?>
-<p:sld xmlns:a="http://schemas.openxmlformats.org/drawingml/2006/main" xmlns:r="http://schemas.openxmlformats.org/officeDocument/2006/relationships" xmlns:p="http://schemas.openxmlformats.org/presentationml/2006/main">
-  <p:cSld>
-    <p:spTree>
-      <p:nvGrpSpPr>
-        <p:cNvPr id="1" name="">
-          <a:extLst>
-            <a:ext uri="{FF2B5EF4-FFF2-40B4-BE49-F238E27FC236}">
-              <a16:creationId xmlns:a16="http://schemas.microsoft.com/office/drawing/2014/main" id="{2385273C-31EF-FD48-5B5F-24A7A498BA4C}"/>
-            </a:ext>
-          </a:extLst>
-        </p:cNvPr>
-        <p:cNvGrpSpPr/>
-        <p:nvPr/>
-      </p:nvGrpSpPr>
-      <p:grpSpPr>
-        <a:xfrm>
-          <a:off x="0" y="0"/>
-          <a:ext cx="0" cy="0"/>
-          <a:chOff x="0" y="0"/>
-          <a:chExt cx="0" cy="0"/>
-        </a:xfrm>
-      </p:grpSpPr>
-      <p:pic>
-        <p:nvPicPr>
-          <p:cNvPr id="5" name="図 4">
-            <a:extLst>
-              <a:ext uri="{FF2B5EF4-FFF2-40B4-BE49-F238E27FC236}">
-                <a16:creationId xmlns:a16="http://schemas.microsoft.com/office/drawing/2014/main" id="{F6F7ACCB-F1AB-0E56-B6C1-68F03EDC9119}"/>
-              </a:ext>
-            </a:extLst>
-          </p:cNvPr>
-          <p:cNvPicPr>
-            <a:picLocks noChangeAspect="1"/>
-          </p:cNvPicPr>
-          <p:nvPr/>
-        </p:nvPicPr>
-        <p:blipFill>
-          <a:blip r:embed="rId2">
-            <a:extLst>
-              <a:ext uri="{28A0092B-C50C-407E-A947-70E740481C1C}">
-                <a14:useLocalDpi xmlns:a14="http://schemas.microsoft.com/office/drawing/2010/main" val="0"/>
-              </a:ext>
-            </a:extLst>
-          </a:blip>
-          <a:stretch>
-            <a:fillRect/>
-          </a:stretch>
-        </p:blipFill>
-        <p:spPr>
-          <a:xfrm>
-            <a:off x="4362450" y="2776537"/>
-            <a:ext cx="3467100" cy="1304925"/>
-          </a:xfrm>
-          <a:prstGeom prst="rect">
-            <a:avLst/>
-          </a:prstGeom>
-        </p:spPr>
-      </p:pic>
-      <p:sp>
-        <p:nvSpPr>
-          <p:cNvPr id="6" name="正方形/長方形 5">
-            <a:extLst>
-              <a:ext uri="{FF2B5EF4-FFF2-40B4-BE49-F238E27FC236}">
-                <a16:creationId xmlns:a16="http://schemas.microsoft.com/office/drawing/2014/main" id="{221BE025-56A0-8AA6-BD15-2F7A2FBBEF48}"/>
-              </a:ext>
-            </a:extLst>
-          </p:cNvPr>
-          <p:cNvSpPr/>
-          <p:nvPr/>
-        </p:nvSpPr>
-        <p:spPr>
-          <a:xfrm>
-            <a:off x="6858000" y="2879195"/>
-            <a:ext cx="855133" cy="482603"/>
-          </a:xfrm>
-          <a:prstGeom prst="rect">
-            <a:avLst/>
-          </a:prstGeom>
-          <a:noFill/>
-          <a:ln w="28575">
-            <a:solidFill>
-              <a:srgbClr val="FF0000"/>
-            </a:solidFill>
-          </a:ln>
-        </p:spPr>
-        <p:style>
-          <a:lnRef idx="2">
-            <a:schemeClr val="accent1">
-              <a:shade val="15000"/>
-            </a:schemeClr>
-          </a:lnRef>
-          <a:fillRef idx="1">
-            <a:schemeClr val="accent1"/>
-          </a:fillRef>
-          <a:effectRef idx="0">
-            <a:schemeClr val="accent1"/>
-          </a:effectRef>
-          <a:fontRef idx="minor">
-            <a:schemeClr val="lt1"/>
-          </a:fontRef>
-        </p:style>
-        <p:txBody>
-          <a:bodyPr rtlCol="0" anchor="ctr"/>
-          <a:lstStyle/>
-          <a:p>
-            <a:pPr algn="ctr"/>
-            <a:endParaRPr kumimoji="1" lang="ja-JP" altLang="en-US"/>
-          </a:p>
-        </p:txBody>
-      </p:sp>
-    </p:spTree>
-    <p:extLst>
-      <p:ext uri="{BB962C8B-B14F-4D97-AF65-F5344CB8AC3E}">
-        <p14:creationId xmlns:p14="http://schemas.microsoft.com/office/powerpoint/2010/main" val="1183525208"/>
       </p:ext>
     </p:extLst>
   </p:cSld>

--- a/tool/smstokintone/docs/プレゼンテーション1.pptx
+++ b/tool/smstokintone/docs/プレゼンテーション1.pptx
@@ -25,51 +25,52 @@
     <p:sldId id="273" r:id="rId19"/>
     <p:sldId id="274" r:id="rId20"/>
     <p:sldId id="275" r:id="rId21"/>
-    <p:sldId id="276" r:id="rId22"/>
-    <p:sldId id="277" r:id="rId23"/>
-    <p:sldId id="278" r:id="rId24"/>
-    <p:sldId id="279" r:id="rId25"/>
-    <p:sldId id="280" r:id="rId26"/>
-    <p:sldId id="281" r:id="rId27"/>
-    <p:sldId id="282" r:id="rId28"/>
-    <p:sldId id="283" r:id="rId29"/>
-    <p:sldId id="284" r:id="rId30"/>
-    <p:sldId id="285" r:id="rId31"/>
-    <p:sldId id="286" r:id="rId32"/>
-    <p:sldId id="287" r:id="rId33"/>
-    <p:sldId id="288" r:id="rId34"/>
-    <p:sldId id="289" r:id="rId35"/>
-    <p:sldId id="290" r:id="rId36"/>
-    <p:sldId id="301" r:id="rId37"/>
-    <p:sldId id="303" r:id="rId38"/>
-    <p:sldId id="302" r:id="rId39"/>
-    <p:sldId id="304" r:id="rId40"/>
-    <p:sldId id="292" r:id="rId41"/>
-    <p:sldId id="310" r:id="rId42"/>
-    <p:sldId id="305" r:id="rId43"/>
-    <p:sldId id="311" r:id="rId44"/>
-    <p:sldId id="312" r:id="rId45"/>
-    <p:sldId id="306" r:id="rId46"/>
-    <p:sldId id="313" r:id="rId47"/>
-    <p:sldId id="314" r:id="rId48"/>
-    <p:sldId id="315" r:id="rId49"/>
-    <p:sldId id="307" r:id="rId50"/>
-    <p:sldId id="316" r:id="rId51"/>
-    <p:sldId id="320" r:id="rId52"/>
-    <p:sldId id="321" r:id="rId53"/>
-    <p:sldId id="317" r:id="rId54"/>
-    <p:sldId id="322" r:id="rId55"/>
-    <p:sldId id="324" r:id="rId56"/>
-    <p:sldId id="323" r:id="rId57"/>
-    <p:sldId id="325" r:id="rId58"/>
-    <p:sldId id="319" r:id="rId59"/>
-    <p:sldId id="308" r:id="rId60"/>
-    <p:sldId id="293" r:id="rId61"/>
-    <p:sldId id="294" r:id="rId62"/>
-    <p:sldId id="295" r:id="rId63"/>
-    <p:sldId id="296" r:id="rId64"/>
-    <p:sldId id="297" r:id="rId65"/>
-    <p:sldId id="298" r:id="rId66"/>
+    <p:sldId id="326" r:id="rId22"/>
+    <p:sldId id="276" r:id="rId23"/>
+    <p:sldId id="327" r:id="rId24"/>
+    <p:sldId id="278" r:id="rId25"/>
+    <p:sldId id="279" r:id="rId26"/>
+    <p:sldId id="280" r:id="rId27"/>
+    <p:sldId id="281" r:id="rId28"/>
+    <p:sldId id="282" r:id="rId29"/>
+    <p:sldId id="283" r:id="rId30"/>
+    <p:sldId id="284" r:id="rId31"/>
+    <p:sldId id="285" r:id="rId32"/>
+    <p:sldId id="286" r:id="rId33"/>
+    <p:sldId id="287" r:id="rId34"/>
+    <p:sldId id="288" r:id="rId35"/>
+    <p:sldId id="289" r:id="rId36"/>
+    <p:sldId id="290" r:id="rId37"/>
+    <p:sldId id="301" r:id="rId38"/>
+    <p:sldId id="303" r:id="rId39"/>
+    <p:sldId id="302" r:id="rId40"/>
+    <p:sldId id="304" r:id="rId41"/>
+    <p:sldId id="292" r:id="rId42"/>
+    <p:sldId id="310" r:id="rId43"/>
+    <p:sldId id="305" r:id="rId44"/>
+    <p:sldId id="311" r:id="rId45"/>
+    <p:sldId id="312" r:id="rId46"/>
+    <p:sldId id="306" r:id="rId47"/>
+    <p:sldId id="313" r:id="rId48"/>
+    <p:sldId id="314" r:id="rId49"/>
+    <p:sldId id="315" r:id="rId50"/>
+    <p:sldId id="307" r:id="rId51"/>
+    <p:sldId id="316" r:id="rId52"/>
+    <p:sldId id="320" r:id="rId53"/>
+    <p:sldId id="321" r:id="rId54"/>
+    <p:sldId id="317" r:id="rId55"/>
+    <p:sldId id="322" r:id="rId56"/>
+    <p:sldId id="324" r:id="rId57"/>
+    <p:sldId id="323" r:id="rId58"/>
+    <p:sldId id="325" r:id="rId59"/>
+    <p:sldId id="319" r:id="rId60"/>
+    <p:sldId id="308" r:id="rId61"/>
+    <p:sldId id="293" r:id="rId62"/>
+    <p:sldId id="294" r:id="rId63"/>
+    <p:sldId id="295" r:id="rId64"/>
+    <p:sldId id="296" r:id="rId65"/>
+    <p:sldId id="297" r:id="rId66"/>
+    <p:sldId id="298" r:id="rId67"/>
   </p:sldIdLst>
   <p:sldSz cx="12192000" cy="6858000"/>
   <p:notesSz cx="6858000" cy="9144000"/>
@@ -3678,6 +3679,65 @@
           <a:chExt cx="0" cy="0"/>
         </a:xfrm>
       </p:grpSpPr>
+      <p:sp>
+        <p:nvSpPr>
+          <p:cNvPr id="2" name="四角形: 角を丸くする 1">
+            <a:extLst>
+              <a:ext uri="{FF2B5EF4-FFF2-40B4-BE49-F238E27FC236}">
+                <a16:creationId xmlns:a16="http://schemas.microsoft.com/office/drawing/2014/main" id="{B05147EE-EDD2-D67D-8F55-57C75E8FC94F}"/>
+              </a:ext>
+            </a:extLst>
+          </p:cNvPr>
+          <p:cNvSpPr/>
+          <p:nvPr/>
+        </p:nvSpPr>
+        <p:spPr>
+          <a:xfrm>
+            <a:off x="1515291" y="2333897"/>
+            <a:ext cx="1584000" cy="513806"/>
+          </a:xfrm>
+          <a:prstGeom prst="roundRect">
+            <a:avLst/>
+          </a:prstGeom>
+          <a:solidFill>
+            <a:schemeClr val="accent1">
+              <a:lumMod val="40000"/>
+              <a:lumOff val="60000"/>
+            </a:schemeClr>
+          </a:solidFill>
+        </p:spPr>
+        <p:style>
+          <a:lnRef idx="2">
+            <a:schemeClr val="accent1">
+              <a:shade val="15000"/>
+            </a:schemeClr>
+          </a:lnRef>
+          <a:fillRef idx="1">
+            <a:schemeClr val="accent1"/>
+          </a:fillRef>
+          <a:effectRef idx="0">
+            <a:schemeClr val="accent1"/>
+          </a:effectRef>
+          <a:fontRef idx="minor">
+            <a:schemeClr val="lt1"/>
+          </a:fontRef>
+        </p:style>
+        <p:txBody>
+          <a:bodyPr rtlCol="0" anchor="ctr"/>
+          <a:lstStyle/>
+          <a:p>
+            <a:pPr algn="ctr"/>
+            <a:r>
+              <a:rPr lang="ja-JP" altLang="en-US" b="1" dirty="0">
+                <a:solidFill>
+                  <a:schemeClr val="tx1"/>
+                </a:solidFill>
+              </a:rPr>
+              <a:t>トップ画面</a:t>
+            </a:r>
+          </a:p>
+        </p:txBody>
+      </p:sp>
     </p:spTree>
     <p:extLst>
       <p:ext uri="{BB962C8B-B14F-4D97-AF65-F5344CB8AC3E}">
@@ -4944,10 +5004,10 @@
       </p:grpSpPr>
       <p:pic>
         <p:nvPicPr>
-          <p:cNvPr id="5" name="図 4">
-            <a:extLst>
-              <a:ext uri="{FF2B5EF4-FFF2-40B4-BE49-F238E27FC236}">
-                <a16:creationId xmlns:a16="http://schemas.microsoft.com/office/drawing/2014/main" id="{B54E5E1C-9168-E9E8-F309-55A95D7765AA}"/>
+          <p:cNvPr id="3" name="図 2">
+            <a:extLst>
+              <a:ext uri="{FF2B5EF4-FFF2-40B4-BE49-F238E27FC236}">
+                <a16:creationId xmlns:a16="http://schemas.microsoft.com/office/drawing/2014/main" id="{AE330668-03B5-F00F-B108-63EF0390DB51}"/>
               </a:ext>
             </a:extLst>
           </p:cNvPr>
@@ -4970,25 +5030,84 @@
         </p:blipFill>
         <p:spPr>
           <a:xfrm>
-            <a:off x="4576762" y="828675"/>
-            <a:ext cx="3038475" cy="5200650"/>
-          </a:xfrm>
-          <a:prstGeom prst="roundRect">
-            <a:avLst>
-              <a:gd name="adj" fmla="val 8594"/>
-            </a:avLst>
-          </a:prstGeom>
-          <a:solidFill>
-            <a:srgbClr val="FFFFFF">
-              <a:shade val="85000"/>
-            </a:srgbClr>
-          </a:solidFill>
-          <a:ln>
-            <a:noFill/>
-          </a:ln>
-          <a:effectLst>
-            <a:reflection blurRad="12700" stA="38000" endPos="28000" dist="5000" dir="5400000" sy="-100000" algn="bl" rotWithShape="0"/>
-          </a:effectLst>
+            <a:off x="4562475" y="80962"/>
+            <a:ext cx="3067050" cy="6696075"/>
+          </a:xfrm>
+          <a:prstGeom prst="rect">
+            <a:avLst/>
+          </a:prstGeom>
+        </p:spPr>
+      </p:pic>
+    </p:spTree>
+    <p:extLst>
+      <p:ext uri="{BB962C8B-B14F-4D97-AF65-F5344CB8AC3E}">
+        <p14:creationId xmlns:p14="http://schemas.microsoft.com/office/powerpoint/2010/main" val="475947514"/>
+      </p:ext>
+    </p:extLst>
+  </p:cSld>
+  <p:clrMapOvr>
+    <a:masterClrMapping/>
+  </p:clrMapOvr>
+</p:sld>
+</file>
+
+<file path=ppt/slides/slide21.xml><?xml version="1.0" encoding="utf-8"?>
+<p:sld xmlns:a="http://schemas.openxmlformats.org/drawingml/2006/main" xmlns:r="http://schemas.openxmlformats.org/officeDocument/2006/relationships" xmlns:p="http://schemas.openxmlformats.org/presentationml/2006/main">
+  <p:cSld>
+    <p:spTree>
+      <p:nvGrpSpPr>
+        <p:cNvPr id="1" name="">
+          <a:extLst>
+            <a:ext uri="{FF2B5EF4-FFF2-40B4-BE49-F238E27FC236}">
+              <a16:creationId xmlns:a16="http://schemas.microsoft.com/office/drawing/2014/main" id="{645C8C15-1FAF-77F6-BFF5-AEE3102C9393}"/>
+            </a:ext>
+          </a:extLst>
+        </p:cNvPr>
+        <p:cNvGrpSpPr/>
+        <p:nvPr/>
+      </p:nvGrpSpPr>
+      <p:grpSpPr>
+        <a:xfrm>
+          <a:off x="0" y="0"/>
+          <a:ext cx="0" cy="0"/>
+          <a:chOff x="0" y="0"/>
+          <a:chExt cx="0" cy="0"/>
+        </a:xfrm>
+      </p:grpSpPr>
+      <p:pic>
+        <p:nvPicPr>
+          <p:cNvPr id="7" name="図 6">
+            <a:extLst>
+              <a:ext uri="{FF2B5EF4-FFF2-40B4-BE49-F238E27FC236}">
+                <a16:creationId xmlns:a16="http://schemas.microsoft.com/office/drawing/2014/main" id="{25F6CE8B-2790-22AC-0DA5-793329885E7E}"/>
+              </a:ext>
+            </a:extLst>
+          </p:cNvPr>
+          <p:cNvPicPr>
+            <a:picLocks noChangeAspect="1"/>
+          </p:cNvPicPr>
+          <p:nvPr/>
+        </p:nvPicPr>
+        <p:blipFill>
+          <a:blip r:embed="rId2">
+            <a:extLst>
+              <a:ext uri="{28A0092B-C50C-407E-A947-70E740481C1C}">
+                <a14:useLocalDpi xmlns:a14="http://schemas.microsoft.com/office/drawing/2010/main" val="0"/>
+              </a:ext>
+            </a:extLst>
+          </a:blip>
+          <a:stretch>
+            <a:fillRect/>
+          </a:stretch>
+        </p:blipFill>
+        <p:spPr>
+          <a:xfrm>
+            <a:off x="5568360" y="813430"/>
+            <a:ext cx="3371850" cy="5353050"/>
+          </a:xfrm>
+          <a:prstGeom prst="rect">
+            <a:avLst/>
+          </a:prstGeom>
         </p:spPr>
       </p:pic>
       <p:sp>
@@ -4996,7 +5115,7 @@
           <p:cNvPr id="6" name="正方形/長方形 5">
             <a:extLst>
               <a:ext uri="{FF2B5EF4-FFF2-40B4-BE49-F238E27FC236}">
-                <a16:creationId xmlns:a16="http://schemas.microsoft.com/office/drawing/2014/main" id="{F1C396B8-44D9-E3B3-F344-E267B40A79E9}"/>
+                <a16:creationId xmlns:a16="http://schemas.microsoft.com/office/drawing/2014/main" id="{A98EC3B2-1F4C-E23B-371E-8AD27AD97D95}"/>
               </a:ext>
             </a:extLst>
           </p:cNvPr>
@@ -5005,8 +5124,8 @@
         </p:nvSpPr>
         <p:spPr>
           <a:xfrm flipV="1">
-            <a:off x="4653963" y="1210730"/>
-            <a:ext cx="2889837" cy="448733"/>
+            <a:off x="5594487" y="1254270"/>
+            <a:ext cx="3312000" cy="448733"/>
           </a:xfrm>
           <a:prstGeom prst="rect">
             <a:avLst/>
@@ -5043,10 +5162,40 @@
           </a:p>
         </p:txBody>
       </p:sp>
+      <p:pic>
+        <p:nvPicPr>
+          <p:cNvPr id="8" name="図 7">
+            <a:extLst>
+              <a:ext uri="{FF2B5EF4-FFF2-40B4-BE49-F238E27FC236}">
+                <a16:creationId xmlns:a16="http://schemas.microsoft.com/office/drawing/2014/main" id="{EF0CC4CA-10AB-F250-26FF-1BD214F3E5F8}"/>
+              </a:ext>
+            </a:extLst>
+          </p:cNvPr>
+          <p:cNvPicPr>
+            <a:picLocks noChangeAspect="1"/>
+          </p:cNvPicPr>
+          <p:nvPr/>
+        </p:nvPicPr>
+        <p:blipFill>
+          <a:blip r:embed="rId3"/>
+          <a:stretch>
+            <a:fillRect/>
+          </a:stretch>
+        </p:blipFill>
+        <p:spPr>
+          <a:xfrm>
+            <a:off x="2718523" y="685722"/>
+            <a:ext cx="3377477" cy="5358848"/>
+          </a:xfrm>
+          <a:prstGeom prst="rect">
+            <a:avLst/>
+          </a:prstGeom>
+        </p:spPr>
+      </p:pic>
     </p:spTree>
     <p:extLst>
       <p:ext uri="{BB962C8B-B14F-4D97-AF65-F5344CB8AC3E}">
-        <p14:creationId xmlns:p14="http://schemas.microsoft.com/office/powerpoint/2010/main" val="475947514"/>
+        <p14:creationId xmlns:p14="http://schemas.microsoft.com/office/powerpoint/2010/main" val="1531185219"/>
       </p:ext>
     </p:extLst>
   </p:cSld>
@@ -5056,7 +5205,7 @@
 </p:sld>
 </file>
 
-<file path=ppt/slides/slide21.xml><?xml version="1.0" encoding="utf-8"?>
+<file path=ppt/slides/slide22.xml><?xml version="1.0" encoding="utf-8"?>
 <p:sld xmlns:a="http://schemas.openxmlformats.org/drawingml/2006/main" xmlns:r="http://schemas.openxmlformats.org/officeDocument/2006/relationships" xmlns:p="http://schemas.openxmlformats.org/presentationml/2006/main">
   <p:cSld>
     <p:spTree>
@@ -5081,10 +5230,10 @@
       </p:grpSpPr>
       <p:pic>
         <p:nvPicPr>
-          <p:cNvPr id="5" name="図 4">
-            <a:extLst>
-              <a:ext uri="{FF2B5EF4-FFF2-40B4-BE49-F238E27FC236}">
-                <a16:creationId xmlns:a16="http://schemas.microsoft.com/office/drawing/2014/main" id="{8F1A3C65-EBFC-EF10-F1B8-310D2AE6FD05}"/>
+          <p:cNvPr id="3" name="図 2">
+            <a:extLst>
+              <a:ext uri="{FF2B5EF4-FFF2-40B4-BE49-F238E27FC236}">
+                <a16:creationId xmlns:a16="http://schemas.microsoft.com/office/drawing/2014/main" id="{29F66498-02B6-803C-8EC4-72E4229DDEAF}"/>
               </a:ext>
             </a:extLst>
           </p:cNvPr>
@@ -5107,25 +5256,12 @@
         </p:blipFill>
         <p:spPr>
           <a:xfrm>
-            <a:off x="4576762" y="828675"/>
-            <a:ext cx="3038475" cy="5200650"/>
-          </a:xfrm>
-          <a:prstGeom prst="roundRect">
-            <a:avLst>
-              <a:gd name="adj" fmla="val 8594"/>
-            </a:avLst>
-          </a:prstGeom>
-          <a:solidFill>
-            <a:srgbClr val="FFFFFF">
-              <a:shade val="85000"/>
-            </a:srgbClr>
-          </a:solidFill>
-          <a:ln>
-            <a:noFill/>
-          </a:ln>
-          <a:effectLst>
-            <a:reflection blurRad="12700" stA="38000" endPos="28000" dist="5000" dir="5400000" sy="-100000" algn="bl" rotWithShape="0"/>
-          </a:effectLst>
+            <a:off x="5568360" y="813430"/>
+            <a:ext cx="3371850" cy="5353050"/>
+          </a:xfrm>
+          <a:prstGeom prst="rect">
+            <a:avLst/>
+          </a:prstGeom>
         </p:spPr>
       </p:pic>
       <p:sp>
@@ -5142,8 +5278,8 @@
         </p:nvSpPr>
         <p:spPr>
           <a:xfrm flipV="1">
-            <a:off x="5630333" y="1871128"/>
-            <a:ext cx="804334" cy="448733"/>
+            <a:off x="6727612" y="2019175"/>
+            <a:ext cx="900000" cy="396000"/>
           </a:xfrm>
           <a:prstGeom prst="rect">
             <a:avLst/>
@@ -5180,6 +5316,36 @@
           </a:p>
         </p:txBody>
       </p:sp>
+      <p:pic>
+        <p:nvPicPr>
+          <p:cNvPr id="4" name="図 3">
+            <a:extLst>
+              <a:ext uri="{FF2B5EF4-FFF2-40B4-BE49-F238E27FC236}">
+                <a16:creationId xmlns:a16="http://schemas.microsoft.com/office/drawing/2014/main" id="{8AFED170-6486-82D1-926C-971B1C2A5E5D}"/>
+              </a:ext>
+            </a:extLst>
+          </p:cNvPr>
+          <p:cNvPicPr>
+            <a:picLocks noChangeAspect="1"/>
+          </p:cNvPicPr>
+          <p:nvPr/>
+        </p:nvPicPr>
+        <p:blipFill>
+          <a:blip r:embed="rId3"/>
+          <a:stretch>
+            <a:fillRect/>
+          </a:stretch>
+        </p:blipFill>
+        <p:spPr>
+          <a:xfrm>
+            <a:off x="4407261" y="749576"/>
+            <a:ext cx="3377477" cy="5358848"/>
+          </a:xfrm>
+          <a:prstGeom prst="rect">
+            <a:avLst/>
+          </a:prstGeom>
+        </p:spPr>
+      </p:pic>
     </p:spTree>
     <p:extLst>
       <p:ext uri="{BB962C8B-B14F-4D97-AF65-F5344CB8AC3E}">
@@ -5193,7 +5359,7 @@
 </p:sld>
 </file>
 
-<file path=ppt/slides/slide22.xml><?xml version="1.0" encoding="utf-8"?>
+<file path=ppt/slides/slide23.xml><?xml version="1.0" encoding="utf-8"?>
 <p:sld xmlns:a="http://schemas.openxmlformats.org/drawingml/2006/main" xmlns:r="http://schemas.openxmlformats.org/officeDocument/2006/relationships" xmlns:p="http://schemas.openxmlformats.org/presentationml/2006/main">
   <p:cSld>
     <p:spTree>
@@ -5201,7 +5367,7 @@
         <p:cNvPr id="1" name="">
           <a:extLst>
             <a:ext uri="{FF2B5EF4-FFF2-40B4-BE49-F238E27FC236}">
-              <a16:creationId xmlns:a16="http://schemas.microsoft.com/office/drawing/2014/main" id="{461CA7EB-6CF2-1140-2BA3-1B3478FF594A}"/>
+              <a16:creationId xmlns:a16="http://schemas.microsoft.com/office/drawing/2014/main" id="{F2A507EB-B9EB-6CE3-3539-F87CBA4CADD4}"/>
             </a:ext>
           </a:extLst>
         </p:cNvPr>
@@ -5218,10 +5384,10 @@
       </p:grpSpPr>
       <p:pic>
         <p:nvPicPr>
-          <p:cNvPr id="5" name="図 4">
-            <a:extLst>
-              <a:ext uri="{FF2B5EF4-FFF2-40B4-BE49-F238E27FC236}">
-                <a16:creationId xmlns:a16="http://schemas.microsoft.com/office/drawing/2014/main" id="{9BA2DC79-03F2-CA94-251E-21D91AE3F277}"/>
+          <p:cNvPr id="3" name="図 2">
+            <a:extLst>
+              <a:ext uri="{FF2B5EF4-FFF2-40B4-BE49-F238E27FC236}">
+                <a16:creationId xmlns:a16="http://schemas.microsoft.com/office/drawing/2014/main" id="{8A8B7C09-9840-05FC-6F12-78BB906A1202}"/>
               </a:ext>
             </a:extLst>
           </p:cNvPr>
@@ -5244,33 +5410,20 @@
         </p:blipFill>
         <p:spPr>
           <a:xfrm>
-            <a:off x="4576762" y="828675"/>
-            <a:ext cx="3038475" cy="5200650"/>
-          </a:xfrm>
-          <a:prstGeom prst="roundRect">
-            <a:avLst>
-              <a:gd name="adj" fmla="val 8594"/>
-            </a:avLst>
-          </a:prstGeom>
-          <a:solidFill>
-            <a:srgbClr val="FFFFFF">
-              <a:shade val="85000"/>
-            </a:srgbClr>
-          </a:solidFill>
-          <a:ln>
-            <a:noFill/>
-          </a:ln>
-          <a:effectLst>
-            <a:reflection blurRad="12700" stA="38000" endPos="28000" dist="5000" dir="5400000" sy="-100000" algn="bl" rotWithShape="0"/>
-          </a:effectLst>
+            <a:off x="5568360" y="813430"/>
+            <a:ext cx="3371850" cy="5353050"/>
+          </a:xfrm>
+          <a:prstGeom prst="rect">
+            <a:avLst/>
+          </a:prstGeom>
         </p:spPr>
       </p:pic>
       <p:sp>
         <p:nvSpPr>
-          <p:cNvPr id="6" name="正方形/長方形 5">
-            <a:extLst>
-              <a:ext uri="{FF2B5EF4-FFF2-40B4-BE49-F238E27FC236}">
-                <a16:creationId xmlns:a16="http://schemas.microsoft.com/office/drawing/2014/main" id="{4092FB67-52DF-9134-2E57-AE27D0A7E67E}"/>
+          <p:cNvPr id="4" name="正方形/長方形 3">
+            <a:extLst>
+              <a:ext uri="{FF2B5EF4-FFF2-40B4-BE49-F238E27FC236}">
+                <a16:creationId xmlns:a16="http://schemas.microsoft.com/office/drawing/2014/main" id="{3F097537-6127-9838-6BBD-8BBA24BE5C77}"/>
               </a:ext>
             </a:extLst>
           </p:cNvPr>
@@ -5279,8 +5432,8 @@
         </p:nvSpPr>
         <p:spPr>
           <a:xfrm flipV="1">
-            <a:off x="6423501" y="1871128"/>
-            <a:ext cx="815500" cy="448733"/>
+            <a:off x="7615888" y="2019175"/>
+            <a:ext cx="900000" cy="396000"/>
           </a:xfrm>
           <a:prstGeom prst="rect">
             <a:avLst/>
@@ -5317,42 +5470,12 @@
           </a:p>
         </p:txBody>
       </p:sp>
-    </p:spTree>
-    <p:extLst>
-      <p:ext uri="{BB962C8B-B14F-4D97-AF65-F5344CB8AC3E}">
-        <p14:creationId xmlns:p14="http://schemas.microsoft.com/office/powerpoint/2010/main" val="2365175157"/>
-      </p:ext>
-    </p:extLst>
-  </p:cSld>
-  <p:clrMapOvr>
-    <a:masterClrMapping/>
-  </p:clrMapOvr>
-</p:sld>
-</file>
-
-<file path=ppt/slides/slide23.xml><?xml version="1.0" encoding="utf-8"?>
-<p:sld xmlns:a="http://schemas.openxmlformats.org/drawingml/2006/main" xmlns:r="http://schemas.openxmlformats.org/officeDocument/2006/relationships" xmlns:p="http://schemas.openxmlformats.org/presentationml/2006/main">
-  <p:cSld>
-    <p:spTree>
-      <p:nvGrpSpPr>
-        <p:cNvPr id="1" name=""/>
-        <p:cNvGrpSpPr/>
-        <p:nvPr/>
-      </p:nvGrpSpPr>
-      <p:grpSpPr>
-        <a:xfrm>
-          <a:off x="0" y="0"/>
-          <a:ext cx="0" cy="0"/>
-          <a:chOff x="0" y="0"/>
-          <a:chExt cx="0" cy="0"/>
-        </a:xfrm>
-      </p:grpSpPr>
       <p:pic>
         <p:nvPicPr>
-          <p:cNvPr id="7" name="図 6">
-            <a:extLst>
-              <a:ext uri="{FF2B5EF4-FFF2-40B4-BE49-F238E27FC236}">
-                <a16:creationId xmlns:a16="http://schemas.microsoft.com/office/drawing/2014/main" id="{9A2E4309-B825-B15E-7F59-BB09AB08F01C}"/>
+          <p:cNvPr id="5" name="図 4">
+            <a:extLst>
+              <a:ext uri="{FF2B5EF4-FFF2-40B4-BE49-F238E27FC236}">
+                <a16:creationId xmlns:a16="http://schemas.microsoft.com/office/drawing/2014/main" id="{25D63C66-7924-2485-8225-5E0EB6F23B3F}"/>
               </a:ext>
             </a:extLst>
           </p:cNvPr>
@@ -5362,21 +5485,15 @@
           <p:nvPr/>
         </p:nvPicPr>
         <p:blipFill>
-          <a:blip r:embed="rId2">
-            <a:extLst>
-              <a:ext uri="{28A0092B-C50C-407E-A947-70E740481C1C}">
-                <a14:useLocalDpi xmlns:a14="http://schemas.microsoft.com/office/drawing/2010/main" val="0"/>
-              </a:ext>
-            </a:extLst>
-          </a:blip>
+          <a:blip r:embed="rId3"/>
           <a:stretch>
             <a:fillRect/>
           </a:stretch>
         </p:blipFill>
         <p:spPr>
           <a:xfrm>
-            <a:off x="4776787" y="1281112"/>
-            <a:ext cx="2638425" cy="4295775"/>
+            <a:off x="4407261" y="749576"/>
+            <a:ext cx="3377477" cy="5358848"/>
           </a:xfrm>
           <a:prstGeom prst="rect">
             <a:avLst/>
@@ -5386,7 +5503,7 @@
     </p:spTree>
     <p:extLst>
       <p:ext uri="{BB962C8B-B14F-4D97-AF65-F5344CB8AC3E}">
-        <p14:creationId xmlns:p14="http://schemas.microsoft.com/office/powerpoint/2010/main" val="837235834"/>
+        <p14:creationId xmlns:p14="http://schemas.microsoft.com/office/powerpoint/2010/main" val="4098179665"/>
       </p:ext>
     </p:extLst>
   </p:cSld>
@@ -5415,10 +5532,10 @@
       </p:grpSpPr>
       <p:pic>
         <p:nvPicPr>
-          <p:cNvPr id="11" name="図 10">
-            <a:extLst>
-              <a:ext uri="{FF2B5EF4-FFF2-40B4-BE49-F238E27FC236}">
-                <a16:creationId xmlns:a16="http://schemas.microsoft.com/office/drawing/2014/main" id="{5B22C986-0CFE-DBD4-6A66-C305E667F9EA}"/>
+          <p:cNvPr id="5" name="図 4">
+            <a:extLst>
+              <a:ext uri="{FF2B5EF4-FFF2-40B4-BE49-F238E27FC236}">
+                <a16:creationId xmlns:a16="http://schemas.microsoft.com/office/drawing/2014/main" id="{3C587D60-F13D-FDAD-3F95-2700F6882E6F}"/>
               </a:ext>
             </a:extLst>
           </p:cNvPr>
@@ -5441,44 +5558,8 @@
         </p:blipFill>
         <p:spPr>
           <a:xfrm>
-            <a:off x="5221287" y="542925"/>
-            <a:ext cx="2714625" cy="5772150"/>
-          </a:xfrm>
-          <a:prstGeom prst="rect">
-            <a:avLst/>
-          </a:prstGeom>
-        </p:spPr>
-      </p:pic>
-      <p:pic>
-        <p:nvPicPr>
-          <p:cNvPr id="13" name="図 12">
-            <a:extLst>
-              <a:ext uri="{FF2B5EF4-FFF2-40B4-BE49-F238E27FC236}">
-                <a16:creationId xmlns:a16="http://schemas.microsoft.com/office/drawing/2014/main" id="{39A975B8-2524-F826-B601-460FD2174EC0}"/>
-              </a:ext>
-            </a:extLst>
-          </p:cNvPr>
-          <p:cNvPicPr>
-            <a:picLocks noChangeAspect="1"/>
-          </p:cNvPicPr>
-          <p:nvPr/>
-        </p:nvPicPr>
-        <p:blipFill>
-          <a:blip r:embed="rId3">
-            <a:extLst>
-              <a:ext uri="{28A0092B-C50C-407E-A947-70E740481C1C}">
-                <a14:useLocalDpi xmlns:a14="http://schemas.microsoft.com/office/drawing/2010/main" val="0"/>
-              </a:ext>
-            </a:extLst>
-          </a:blip>
-          <a:stretch>
-            <a:fillRect/>
-          </a:stretch>
-        </p:blipFill>
-        <p:spPr>
-          <a:xfrm>
-            <a:off x="1835395" y="542925"/>
-            <a:ext cx="2505075" cy="5591175"/>
+            <a:off x="4819650" y="1600200"/>
+            <a:ext cx="2552700" cy="3657600"/>
           </a:xfrm>
           <a:prstGeom prst="rect">
             <a:avLst/>
@@ -5488,7 +5569,7 @@
     </p:spTree>
     <p:extLst>
       <p:ext uri="{BB962C8B-B14F-4D97-AF65-F5344CB8AC3E}">
-        <p14:creationId xmlns:p14="http://schemas.microsoft.com/office/powerpoint/2010/main" val="3879279029"/>
+        <p14:creationId xmlns:p14="http://schemas.microsoft.com/office/powerpoint/2010/main" val="837235834"/>
       </p:ext>
     </p:extLst>
   </p:cSld>
@@ -5517,6 +5598,108 @@
       </p:grpSpPr>
       <p:pic>
         <p:nvPicPr>
+          <p:cNvPr id="11" name="図 10">
+            <a:extLst>
+              <a:ext uri="{FF2B5EF4-FFF2-40B4-BE49-F238E27FC236}">
+                <a16:creationId xmlns:a16="http://schemas.microsoft.com/office/drawing/2014/main" id="{5B22C986-0CFE-DBD4-6A66-C305E667F9EA}"/>
+              </a:ext>
+            </a:extLst>
+          </p:cNvPr>
+          <p:cNvPicPr>
+            <a:picLocks noChangeAspect="1"/>
+          </p:cNvPicPr>
+          <p:nvPr/>
+        </p:nvPicPr>
+        <p:blipFill>
+          <a:blip r:embed="rId2">
+            <a:extLst>
+              <a:ext uri="{28A0092B-C50C-407E-A947-70E740481C1C}">
+                <a14:useLocalDpi xmlns:a14="http://schemas.microsoft.com/office/drawing/2010/main" val="0"/>
+              </a:ext>
+            </a:extLst>
+          </a:blip>
+          <a:stretch>
+            <a:fillRect/>
+          </a:stretch>
+        </p:blipFill>
+        <p:spPr>
+          <a:xfrm>
+            <a:off x="5221287" y="542925"/>
+            <a:ext cx="2714625" cy="5772150"/>
+          </a:xfrm>
+          <a:prstGeom prst="rect">
+            <a:avLst/>
+          </a:prstGeom>
+        </p:spPr>
+      </p:pic>
+      <p:pic>
+        <p:nvPicPr>
+          <p:cNvPr id="13" name="図 12">
+            <a:extLst>
+              <a:ext uri="{FF2B5EF4-FFF2-40B4-BE49-F238E27FC236}">
+                <a16:creationId xmlns:a16="http://schemas.microsoft.com/office/drawing/2014/main" id="{39A975B8-2524-F826-B601-460FD2174EC0}"/>
+              </a:ext>
+            </a:extLst>
+          </p:cNvPr>
+          <p:cNvPicPr>
+            <a:picLocks noChangeAspect="1"/>
+          </p:cNvPicPr>
+          <p:nvPr/>
+        </p:nvPicPr>
+        <p:blipFill>
+          <a:blip r:embed="rId3">
+            <a:extLst>
+              <a:ext uri="{28A0092B-C50C-407E-A947-70E740481C1C}">
+                <a14:useLocalDpi xmlns:a14="http://schemas.microsoft.com/office/drawing/2010/main" val="0"/>
+              </a:ext>
+            </a:extLst>
+          </a:blip>
+          <a:stretch>
+            <a:fillRect/>
+          </a:stretch>
+        </p:blipFill>
+        <p:spPr>
+          <a:xfrm>
+            <a:off x="1835395" y="542925"/>
+            <a:ext cx="2505075" cy="5591175"/>
+          </a:xfrm>
+          <a:prstGeom prst="rect">
+            <a:avLst/>
+          </a:prstGeom>
+        </p:spPr>
+      </p:pic>
+    </p:spTree>
+    <p:extLst>
+      <p:ext uri="{BB962C8B-B14F-4D97-AF65-F5344CB8AC3E}">
+        <p14:creationId xmlns:p14="http://schemas.microsoft.com/office/powerpoint/2010/main" val="3879279029"/>
+      </p:ext>
+    </p:extLst>
+  </p:cSld>
+  <p:clrMapOvr>
+    <a:masterClrMapping/>
+  </p:clrMapOvr>
+</p:sld>
+</file>
+
+<file path=ppt/slides/slide26.xml><?xml version="1.0" encoding="utf-8"?>
+<p:sld xmlns:a="http://schemas.openxmlformats.org/drawingml/2006/main" xmlns:r="http://schemas.openxmlformats.org/officeDocument/2006/relationships" xmlns:p="http://schemas.openxmlformats.org/presentationml/2006/main">
+  <p:cSld>
+    <p:spTree>
+      <p:nvGrpSpPr>
+        <p:cNvPr id="1" name=""/>
+        <p:cNvGrpSpPr/>
+        <p:nvPr/>
+      </p:nvGrpSpPr>
+      <p:grpSpPr>
+        <a:xfrm>
+          <a:off x="0" y="0"/>
+          <a:ext cx="0" cy="0"/>
+          <a:chOff x="0" y="0"/>
+          <a:chExt cx="0" cy="0"/>
+        </a:xfrm>
+      </p:grpSpPr>
+      <p:pic>
+        <p:nvPicPr>
           <p:cNvPr id="7" name="図 6">
             <a:extLst>
               <a:ext uri="{FF2B5EF4-FFF2-40B4-BE49-F238E27FC236}">
@@ -5564,7 +5747,7 @@
 </p:sld>
 </file>
 
-<file path=ppt/slides/slide26.xml><?xml version="1.0" encoding="utf-8"?>
+<file path=ppt/slides/slide27.xml><?xml version="1.0" encoding="utf-8"?>
 <p:sld xmlns:a="http://schemas.openxmlformats.org/drawingml/2006/main" xmlns:r="http://schemas.openxmlformats.org/officeDocument/2006/relationships" xmlns:p="http://schemas.openxmlformats.org/presentationml/2006/main">
   <p:cSld>
     <p:spTree>
@@ -5724,7 +5907,7 @@
 </p:sld>
 </file>
 
-<file path=ppt/slides/slide27.xml><?xml version="1.0" encoding="utf-8"?>
+<file path=ppt/slides/slide28.xml><?xml version="1.0" encoding="utf-8"?>
 <p:sld xmlns:a="http://schemas.openxmlformats.org/drawingml/2006/main" xmlns:r="http://schemas.openxmlformats.org/officeDocument/2006/relationships" xmlns:p="http://schemas.openxmlformats.org/presentationml/2006/main">
   <p:cSld>
     <p:spTree>
@@ -5790,7 +5973,7 @@
 </p:sld>
 </file>
 
-<file path=ppt/slides/slide28.xml><?xml version="1.0" encoding="utf-8"?>
+<file path=ppt/slides/slide29.xml><?xml version="1.0" encoding="utf-8"?>
 <p:sld xmlns:a="http://schemas.openxmlformats.org/drawingml/2006/main" xmlns:r="http://schemas.openxmlformats.org/officeDocument/2006/relationships" xmlns:p="http://schemas.openxmlformats.org/presentationml/2006/main">
   <p:cSld>
     <p:spTree>
@@ -5853,78 +6036,6 @@
     <p:extLst>
       <p:ext uri="{BB962C8B-B14F-4D97-AF65-F5344CB8AC3E}">
         <p14:creationId xmlns:p14="http://schemas.microsoft.com/office/powerpoint/2010/main" val="2634932908"/>
-      </p:ext>
-    </p:extLst>
-  </p:cSld>
-  <p:clrMapOvr>
-    <a:masterClrMapping/>
-  </p:clrMapOvr>
-</p:sld>
-</file>
-
-<file path=ppt/slides/slide29.xml><?xml version="1.0" encoding="utf-8"?>
-<p:sld xmlns:a="http://schemas.openxmlformats.org/drawingml/2006/main" xmlns:r="http://schemas.openxmlformats.org/officeDocument/2006/relationships" xmlns:p="http://schemas.openxmlformats.org/presentationml/2006/main">
-  <p:cSld>
-    <p:spTree>
-      <p:nvGrpSpPr>
-        <p:cNvPr id="1" name="">
-          <a:extLst>
-            <a:ext uri="{FF2B5EF4-FFF2-40B4-BE49-F238E27FC236}">
-              <a16:creationId xmlns:a16="http://schemas.microsoft.com/office/drawing/2014/main" id="{F67B352F-91CF-A91C-285F-17C7D3999592}"/>
-            </a:ext>
-          </a:extLst>
-        </p:cNvPr>
-        <p:cNvGrpSpPr/>
-        <p:nvPr/>
-      </p:nvGrpSpPr>
-      <p:grpSpPr>
-        <a:xfrm>
-          <a:off x="0" y="0"/>
-          <a:ext cx="0" cy="0"/>
-          <a:chOff x="0" y="0"/>
-          <a:chExt cx="0" cy="0"/>
-        </a:xfrm>
-      </p:grpSpPr>
-      <p:pic>
-        <p:nvPicPr>
-          <p:cNvPr id="3" name="図 2">
-            <a:extLst>
-              <a:ext uri="{FF2B5EF4-FFF2-40B4-BE49-F238E27FC236}">
-                <a16:creationId xmlns:a16="http://schemas.microsoft.com/office/drawing/2014/main" id="{1F3587FB-7028-BEB4-86FE-A2B8DB90EB61}"/>
-              </a:ext>
-            </a:extLst>
-          </p:cNvPr>
-          <p:cNvPicPr>
-            <a:picLocks noChangeAspect="1"/>
-          </p:cNvPicPr>
-          <p:nvPr/>
-        </p:nvPicPr>
-        <p:blipFill>
-          <a:blip r:embed="rId2">
-            <a:extLst>
-              <a:ext uri="{28A0092B-C50C-407E-A947-70E740481C1C}">
-                <a14:useLocalDpi xmlns:a14="http://schemas.microsoft.com/office/drawing/2010/main" val="0"/>
-              </a:ext>
-            </a:extLst>
-          </a:blip>
-          <a:stretch>
-            <a:fillRect/>
-          </a:stretch>
-        </p:blipFill>
-        <p:spPr>
-          <a:xfrm>
-            <a:off x="4757737" y="1733550"/>
-            <a:ext cx="2676525" cy="3390900"/>
-          </a:xfrm>
-          <a:prstGeom prst="rect">
-            <a:avLst/>
-          </a:prstGeom>
-        </p:spPr>
-      </p:pic>
-    </p:spTree>
-    <p:extLst>
-      <p:ext uri="{BB962C8B-B14F-4D97-AF65-F5344CB8AC3E}">
-        <p14:creationId xmlns:p14="http://schemas.microsoft.com/office/powerpoint/2010/main" val="1850290418"/>
       </p:ext>
     </p:extLst>
   </p:cSld>
@@ -6008,6 +6119,78 @@
         <p:cNvPr id="1" name="">
           <a:extLst>
             <a:ext uri="{FF2B5EF4-FFF2-40B4-BE49-F238E27FC236}">
+              <a16:creationId xmlns:a16="http://schemas.microsoft.com/office/drawing/2014/main" id="{F67B352F-91CF-A91C-285F-17C7D3999592}"/>
+            </a:ext>
+          </a:extLst>
+        </p:cNvPr>
+        <p:cNvGrpSpPr/>
+        <p:nvPr/>
+      </p:nvGrpSpPr>
+      <p:grpSpPr>
+        <a:xfrm>
+          <a:off x="0" y="0"/>
+          <a:ext cx="0" cy="0"/>
+          <a:chOff x="0" y="0"/>
+          <a:chExt cx="0" cy="0"/>
+        </a:xfrm>
+      </p:grpSpPr>
+      <p:pic>
+        <p:nvPicPr>
+          <p:cNvPr id="3" name="図 2">
+            <a:extLst>
+              <a:ext uri="{FF2B5EF4-FFF2-40B4-BE49-F238E27FC236}">
+                <a16:creationId xmlns:a16="http://schemas.microsoft.com/office/drawing/2014/main" id="{1F3587FB-7028-BEB4-86FE-A2B8DB90EB61}"/>
+              </a:ext>
+            </a:extLst>
+          </p:cNvPr>
+          <p:cNvPicPr>
+            <a:picLocks noChangeAspect="1"/>
+          </p:cNvPicPr>
+          <p:nvPr/>
+        </p:nvPicPr>
+        <p:blipFill>
+          <a:blip r:embed="rId2">
+            <a:extLst>
+              <a:ext uri="{28A0092B-C50C-407E-A947-70E740481C1C}">
+                <a14:useLocalDpi xmlns:a14="http://schemas.microsoft.com/office/drawing/2010/main" val="0"/>
+              </a:ext>
+            </a:extLst>
+          </a:blip>
+          <a:stretch>
+            <a:fillRect/>
+          </a:stretch>
+        </p:blipFill>
+        <p:spPr>
+          <a:xfrm>
+            <a:off x="4757737" y="1733550"/>
+            <a:ext cx="2676525" cy="3390900"/>
+          </a:xfrm>
+          <a:prstGeom prst="rect">
+            <a:avLst/>
+          </a:prstGeom>
+        </p:spPr>
+      </p:pic>
+    </p:spTree>
+    <p:extLst>
+      <p:ext uri="{BB962C8B-B14F-4D97-AF65-F5344CB8AC3E}">
+        <p14:creationId xmlns:p14="http://schemas.microsoft.com/office/powerpoint/2010/main" val="1850290418"/>
+      </p:ext>
+    </p:extLst>
+  </p:cSld>
+  <p:clrMapOvr>
+    <a:masterClrMapping/>
+  </p:clrMapOvr>
+</p:sld>
+</file>
+
+<file path=ppt/slides/slide31.xml><?xml version="1.0" encoding="utf-8"?>
+<p:sld xmlns:a="http://schemas.openxmlformats.org/drawingml/2006/main" xmlns:r="http://schemas.openxmlformats.org/officeDocument/2006/relationships" xmlns:p="http://schemas.openxmlformats.org/presentationml/2006/main">
+  <p:cSld>
+    <p:spTree>
+      <p:nvGrpSpPr>
+        <p:cNvPr id="1" name="">
+          <a:extLst>
+            <a:ext uri="{FF2B5EF4-FFF2-40B4-BE49-F238E27FC236}">
               <a16:creationId xmlns:a16="http://schemas.microsoft.com/office/drawing/2014/main" id="{C3EC120D-A393-DF3C-E975-A41E3C4E7391}"/>
             </a:ext>
           </a:extLst>
@@ -6072,7 +6255,7 @@
 </p:sld>
 </file>
 
-<file path=ppt/slides/slide31.xml><?xml version="1.0" encoding="utf-8"?>
+<file path=ppt/slides/slide32.xml><?xml version="1.0" encoding="utf-8"?>
 <p:sld xmlns:a="http://schemas.openxmlformats.org/drawingml/2006/main" xmlns:r="http://schemas.openxmlformats.org/officeDocument/2006/relationships" xmlns:p="http://schemas.openxmlformats.org/presentationml/2006/main">
   <p:cSld>
     <p:spTree>
@@ -6196,7 +6379,7 @@
 </p:sld>
 </file>
 
-<file path=ppt/slides/slide32.xml><?xml version="1.0" encoding="utf-8"?>
+<file path=ppt/slides/slide33.xml><?xml version="1.0" encoding="utf-8"?>
 <p:sld xmlns:a="http://schemas.openxmlformats.org/drawingml/2006/main" xmlns:r="http://schemas.openxmlformats.org/officeDocument/2006/relationships" xmlns:p="http://schemas.openxmlformats.org/presentationml/2006/main">
   <p:cSld>
     <p:spTree>
@@ -6350,7 +6533,7 @@
 </p:sld>
 </file>
 
-<file path=ppt/slides/slide33.xml><?xml version="1.0" encoding="utf-8"?>
+<file path=ppt/slides/slide34.xml><?xml version="1.0" encoding="utf-8"?>
 <p:sld xmlns:a="http://schemas.openxmlformats.org/drawingml/2006/main" xmlns:r="http://schemas.openxmlformats.org/officeDocument/2006/relationships" xmlns:p="http://schemas.openxmlformats.org/presentationml/2006/main">
   <p:cSld>
     <p:spTree>
@@ -6504,7 +6687,7 @@
 </p:sld>
 </file>
 
-<file path=ppt/slides/slide34.xml><?xml version="1.0" encoding="utf-8"?>
+<file path=ppt/slides/slide35.xml><?xml version="1.0" encoding="utf-8"?>
 <p:sld xmlns:a="http://schemas.openxmlformats.org/drawingml/2006/main" xmlns:r="http://schemas.openxmlformats.org/officeDocument/2006/relationships" xmlns:p="http://schemas.openxmlformats.org/presentationml/2006/main">
   <p:cSld>
     <p:spTree>
@@ -6658,7 +6841,7 @@
 </p:sld>
 </file>
 
-<file path=ppt/slides/slide35.xml><?xml version="1.0" encoding="utf-8"?>
+<file path=ppt/slides/slide36.xml><?xml version="1.0" encoding="utf-8"?>
 <p:sld xmlns:a="http://schemas.openxmlformats.org/drawingml/2006/main" xmlns:r="http://schemas.openxmlformats.org/officeDocument/2006/relationships" xmlns:p="http://schemas.openxmlformats.org/presentationml/2006/main">
   <p:cSld>
     <p:spTree>
@@ -6724,7 +6907,7 @@
 </p:sld>
 </file>
 
-<file path=ppt/slides/slide36.xml><?xml version="1.0" encoding="utf-8"?>
+<file path=ppt/slides/slide37.xml><?xml version="1.0" encoding="utf-8"?>
 <p:sld xmlns:a="http://schemas.openxmlformats.org/drawingml/2006/main" xmlns:r="http://schemas.openxmlformats.org/officeDocument/2006/relationships" xmlns:p="http://schemas.openxmlformats.org/presentationml/2006/main">
   <p:cSld>
     <p:spTree>
@@ -6878,7 +7061,7 @@
 </p:sld>
 </file>
 
-<file path=ppt/slides/slide37.xml><?xml version="1.0" encoding="utf-8"?>
+<file path=ppt/slides/slide38.xml><?xml version="1.0" encoding="utf-8"?>
 <p:sld xmlns:a="http://schemas.openxmlformats.org/drawingml/2006/main" xmlns:r="http://schemas.openxmlformats.org/officeDocument/2006/relationships" xmlns:p="http://schemas.openxmlformats.org/presentationml/2006/main">
   <p:cSld>
     <p:spTree>
@@ -7032,7 +7215,7 @@
 </p:sld>
 </file>
 
-<file path=ppt/slides/slide38.xml><?xml version="1.0" encoding="utf-8"?>
+<file path=ppt/slides/slide39.xml><?xml version="1.0" encoding="utf-8"?>
 <p:sld xmlns:a="http://schemas.openxmlformats.org/drawingml/2006/main" xmlns:r="http://schemas.openxmlformats.org/officeDocument/2006/relationships" xmlns:p="http://schemas.openxmlformats.org/presentationml/2006/main">
   <p:cSld>
     <p:spTree>
@@ -7177,130 +7360,6 @@
     <p:extLst>
       <p:ext uri="{BB962C8B-B14F-4D97-AF65-F5344CB8AC3E}">
         <p14:creationId xmlns:p14="http://schemas.microsoft.com/office/powerpoint/2010/main" val="2949685621"/>
-      </p:ext>
-    </p:extLst>
-  </p:cSld>
-  <p:clrMapOvr>
-    <a:masterClrMapping/>
-  </p:clrMapOvr>
-</p:sld>
-</file>
-
-<file path=ppt/slides/slide39.xml><?xml version="1.0" encoding="utf-8"?>
-<p:sld xmlns:a="http://schemas.openxmlformats.org/drawingml/2006/main" xmlns:r="http://schemas.openxmlformats.org/officeDocument/2006/relationships" xmlns:p="http://schemas.openxmlformats.org/presentationml/2006/main">
-  <p:cSld>
-    <p:spTree>
-      <p:nvGrpSpPr>
-        <p:cNvPr id="1" name="">
-          <a:extLst>
-            <a:ext uri="{FF2B5EF4-FFF2-40B4-BE49-F238E27FC236}">
-              <a16:creationId xmlns:a16="http://schemas.microsoft.com/office/drawing/2014/main" id="{6976B840-2BD1-5BCF-2D53-31F094618F53}"/>
-            </a:ext>
-          </a:extLst>
-        </p:cNvPr>
-        <p:cNvGrpSpPr/>
-        <p:nvPr/>
-      </p:nvGrpSpPr>
-      <p:grpSpPr>
-        <a:xfrm>
-          <a:off x="0" y="0"/>
-          <a:ext cx="0" cy="0"/>
-          <a:chOff x="0" y="0"/>
-          <a:chExt cx="0" cy="0"/>
-        </a:xfrm>
-      </p:grpSpPr>
-      <p:pic>
-        <p:nvPicPr>
-          <p:cNvPr id="5" name="図 4">
-            <a:extLst>
-              <a:ext uri="{FF2B5EF4-FFF2-40B4-BE49-F238E27FC236}">
-                <a16:creationId xmlns:a16="http://schemas.microsoft.com/office/drawing/2014/main" id="{43BD7B02-8140-E016-1BC4-075022259E6D}"/>
-              </a:ext>
-            </a:extLst>
-          </p:cNvPr>
-          <p:cNvPicPr>
-            <a:picLocks noChangeAspect="1"/>
-          </p:cNvPicPr>
-          <p:nvPr/>
-        </p:nvPicPr>
-        <p:blipFill>
-          <a:blip r:embed="rId2">
-            <a:extLst>
-              <a:ext uri="{28A0092B-C50C-407E-A947-70E740481C1C}">
-                <a14:useLocalDpi xmlns:a14="http://schemas.microsoft.com/office/drawing/2010/main" val="0"/>
-              </a:ext>
-            </a:extLst>
-          </a:blip>
-          <a:stretch>
-            <a:fillRect/>
-          </a:stretch>
-        </p:blipFill>
-        <p:spPr>
-          <a:xfrm>
-            <a:off x="4814887" y="419100"/>
-            <a:ext cx="2562225" cy="6019800"/>
-          </a:xfrm>
-          <a:prstGeom prst="rect">
-            <a:avLst/>
-          </a:prstGeom>
-        </p:spPr>
-      </p:pic>
-      <p:sp>
-        <p:nvSpPr>
-          <p:cNvPr id="6" name="正方形/長方形 5">
-            <a:extLst>
-              <a:ext uri="{FF2B5EF4-FFF2-40B4-BE49-F238E27FC236}">
-                <a16:creationId xmlns:a16="http://schemas.microsoft.com/office/drawing/2014/main" id="{6314714B-2A0D-7F32-F43F-7597E322DBBD}"/>
-              </a:ext>
-            </a:extLst>
-          </p:cNvPr>
-          <p:cNvSpPr/>
-          <p:nvPr/>
-        </p:nvSpPr>
-        <p:spPr>
-          <a:xfrm flipV="1">
-            <a:off x="5070182" y="5850468"/>
-            <a:ext cx="2143418" cy="414867"/>
-          </a:xfrm>
-          <a:prstGeom prst="rect">
-            <a:avLst/>
-          </a:prstGeom>
-          <a:noFill/>
-          <a:ln w="28575">
-            <a:solidFill>
-              <a:srgbClr val="FF0000"/>
-            </a:solidFill>
-          </a:ln>
-        </p:spPr>
-        <p:style>
-          <a:lnRef idx="2">
-            <a:schemeClr val="accent1">
-              <a:shade val="15000"/>
-            </a:schemeClr>
-          </a:lnRef>
-          <a:fillRef idx="1">
-            <a:schemeClr val="accent1"/>
-          </a:fillRef>
-          <a:effectRef idx="0">
-            <a:schemeClr val="accent1"/>
-          </a:effectRef>
-          <a:fontRef idx="minor">
-            <a:schemeClr val="lt1"/>
-          </a:fontRef>
-        </p:style>
-        <p:txBody>
-          <a:bodyPr rtlCol="0" anchor="ctr"/>
-          <a:lstStyle/>
-          <a:p>
-            <a:pPr algn="ctr"/>
-            <a:endParaRPr kumimoji="1" lang="ja-JP" altLang="en-US"/>
-          </a:p>
-        </p:txBody>
-      </p:sp>
-    </p:spTree>
-    <p:extLst>
-      <p:ext uri="{BB962C8B-B14F-4D97-AF65-F5344CB8AC3E}">
-        <p14:creationId xmlns:p14="http://schemas.microsoft.com/office/powerpoint/2010/main" val="1969861427"/>
       </p:ext>
     </p:extLst>
   </p:cSld>
@@ -7390,7 +7449,7 @@
         <p:cNvPr id="1" name="">
           <a:extLst>
             <a:ext uri="{FF2B5EF4-FFF2-40B4-BE49-F238E27FC236}">
-              <a16:creationId xmlns:a16="http://schemas.microsoft.com/office/drawing/2014/main" id="{6AD1755E-91F3-9385-8A86-5C7AC01AAA9E}"/>
+              <a16:creationId xmlns:a16="http://schemas.microsoft.com/office/drawing/2014/main" id="{6976B840-2BD1-5BCF-2D53-31F094618F53}"/>
             </a:ext>
           </a:extLst>
         </p:cNvPr>
@@ -7407,10 +7466,10 @@
       </p:grpSpPr>
       <p:pic>
         <p:nvPicPr>
-          <p:cNvPr id="3" name="図 2">
-            <a:extLst>
-              <a:ext uri="{FF2B5EF4-FFF2-40B4-BE49-F238E27FC236}">
-                <a16:creationId xmlns:a16="http://schemas.microsoft.com/office/drawing/2014/main" id="{9E34124C-A4E0-9034-E85B-420AB62D00EF}"/>
+          <p:cNvPr id="5" name="図 4">
+            <a:extLst>
+              <a:ext uri="{FF2B5EF4-FFF2-40B4-BE49-F238E27FC236}">
+                <a16:creationId xmlns:a16="http://schemas.microsoft.com/office/drawing/2014/main" id="{43BD7B02-8140-E016-1BC4-075022259E6D}"/>
               </a:ext>
             </a:extLst>
           </p:cNvPr>
@@ -7433,8 +7492,8 @@
         </p:blipFill>
         <p:spPr>
           <a:xfrm>
-            <a:off x="4810125" y="1604962"/>
-            <a:ext cx="2571750" cy="3648075"/>
+            <a:off x="4814887" y="419100"/>
+            <a:ext cx="2562225" cy="6019800"/>
           </a:xfrm>
           <a:prstGeom prst="rect">
             <a:avLst/>
@@ -7443,10 +7502,10 @@
       </p:pic>
       <p:sp>
         <p:nvSpPr>
-          <p:cNvPr id="4" name="正方形/長方形 3">
-            <a:extLst>
-              <a:ext uri="{FF2B5EF4-FFF2-40B4-BE49-F238E27FC236}">
-                <a16:creationId xmlns:a16="http://schemas.microsoft.com/office/drawing/2014/main" id="{EEF0E347-8B97-9EF7-8D32-4F437CD3F185}"/>
+          <p:cNvPr id="6" name="正方形/長方形 5">
+            <a:extLst>
+              <a:ext uri="{FF2B5EF4-FFF2-40B4-BE49-F238E27FC236}">
+                <a16:creationId xmlns:a16="http://schemas.microsoft.com/office/drawing/2014/main" id="{6314714B-2A0D-7F32-F43F-7597E322DBBD}"/>
               </a:ext>
             </a:extLst>
           </p:cNvPr>
@@ -7455,8 +7514,8 @@
         </p:nvSpPr>
         <p:spPr>
           <a:xfrm flipV="1">
-            <a:off x="5007963" y="2013252"/>
-            <a:ext cx="2250088" cy="1048353"/>
+            <a:off x="5070182" y="5850468"/>
+            <a:ext cx="2143418" cy="414867"/>
           </a:xfrm>
           <a:prstGeom prst="rect">
             <a:avLst/>
@@ -7493,6 +7552,130 @@
           </a:p>
         </p:txBody>
       </p:sp>
+    </p:spTree>
+    <p:extLst>
+      <p:ext uri="{BB962C8B-B14F-4D97-AF65-F5344CB8AC3E}">
+        <p14:creationId xmlns:p14="http://schemas.microsoft.com/office/powerpoint/2010/main" val="1969861427"/>
+      </p:ext>
+    </p:extLst>
+  </p:cSld>
+  <p:clrMapOvr>
+    <a:masterClrMapping/>
+  </p:clrMapOvr>
+</p:sld>
+</file>
+
+<file path=ppt/slides/slide41.xml><?xml version="1.0" encoding="utf-8"?>
+<p:sld xmlns:a="http://schemas.openxmlformats.org/drawingml/2006/main" xmlns:r="http://schemas.openxmlformats.org/officeDocument/2006/relationships" xmlns:p="http://schemas.openxmlformats.org/presentationml/2006/main">
+  <p:cSld>
+    <p:spTree>
+      <p:nvGrpSpPr>
+        <p:cNvPr id="1" name="">
+          <a:extLst>
+            <a:ext uri="{FF2B5EF4-FFF2-40B4-BE49-F238E27FC236}">
+              <a16:creationId xmlns:a16="http://schemas.microsoft.com/office/drawing/2014/main" id="{6AD1755E-91F3-9385-8A86-5C7AC01AAA9E}"/>
+            </a:ext>
+          </a:extLst>
+        </p:cNvPr>
+        <p:cNvGrpSpPr/>
+        <p:nvPr/>
+      </p:nvGrpSpPr>
+      <p:grpSpPr>
+        <a:xfrm>
+          <a:off x="0" y="0"/>
+          <a:ext cx="0" cy="0"/>
+          <a:chOff x="0" y="0"/>
+          <a:chExt cx="0" cy="0"/>
+        </a:xfrm>
+      </p:grpSpPr>
+      <p:pic>
+        <p:nvPicPr>
+          <p:cNvPr id="3" name="図 2">
+            <a:extLst>
+              <a:ext uri="{FF2B5EF4-FFF2-40B4-BE49-F238E27FC236}">
+                <a16:creationId xmlns:a16="http://schemas.microsoft.com/office/drawing/2014/main" id="{9E34124C-A4E0-9034-E85B-420AB62D00EF}"/>
+              </a:ext>
+            </a:extLst>
+          </p:cNvPr>
+          <p:cNvPicPr>
+            <a:picLocks noChangeAspect="1"/>
+          </p:cNvPicPr>
+          <p:nvPr/>
+        </p:nvPicPr>
+        <p:blipFill>
+          <a:blip r:embed="rId2">
+            <a:extLst>
+              <a:ext uri="{28A0092B-C50C-407E-A947-70E740481C1C}">
+                <a14:useLocalDpi xmlns:a14="http://schemas.microsoft.com/office/drawing/2010/main" val="0"/>
+              </a:ext>
+            </a:extLst>
+          </a:blip>
+          <a:stretch>
+            <a:fillRect/>
+          </a:stretch>
+        </p:blipFill>
+        <p:spPr>
+          <a:xfrm>
+            <a:off x="4810125" y="1604962"/>
+            <a:ext cx="2571750" cy="3648075"/>
+          </a:xfrm>
+          <a:prstGeom prst="rect">
+            <a:avLst/>
+          </a:prstGeom>
+        </p:spPr>
+      </p:pic>
+      <p:sp>
+        <p:nvSpPr>
+          <p:cNvPr id="4" name="正方形/長方形 3">
+            <a:extLst>
+              <a:ext uri="{FF2B5EF4-FFF2-40B4-BE49-F238E27FC236}">
+                <a16:creationId xmlns:a16="http://schemas.microsoft.com/office/drawing/2014/main" id="{EEF0E347-8B97-9EF7-8D32-4F437CD3F185}"/>
+              </a:ext>
+            </a:extLst>
+          </p:cNvPr>
+          <p:cNvSpPr/>
+          <p:nvPr/>
+        </p:nvSpPr>
+        <p:spPr>
+          <a:xfrm flipV="1">
+            <a:off x="5007963" y="2013252"/>
+            <a:ext cx="2250088" cy="1048353"/>
+          </a:xfrm>
+          <a:prstGeom prst="rect">
+            <a:avLst/>
+          </a:prstGeom>
+          <a:noFill/>
+          <a:ln w="28575">
+            <a:solidFill>
+              <a:srgbClr val="FF0000"/>
+            </a:solidFill>
+          </a:ln>
+        </p:spPr>
+        <p:style>
+          <a:lnRef idx="2">
+            <a:schemeClr val="accent1">
+              <a:shade val="15000"/>
+            </a:schemeClr>
+          </a:lnRef>
+          <a:fillRef idx="1">
+            <a:schemeClr val="accent1"/>
+          </a:fillRef>
+          <a:effectRef idx="0">
+            <a:schemeClr val="accent1"/>
+          </a:effectRef>
+          <a:fontRef idx="minor">
+            <a:schemeClr val="lt1"/>
+          </a:fontRef>
+        </p:style>
+        <p:txBody>
+          <a:bodyPr rtlCol="0" anchor="ctr"/>
+          <a:lstStyle/>
+          <a:p>
+            <a:pPr algn="ctr"/>
+            <a:endParaRPr kumimoji="1" lang="ja-JP" altLang="en-US"/>
+          </a:p>
+        </p:txBody>
+      </p:sp>
       <p:pic>
         <p:nvPicPr>
           <p:cNvPr id="5" name="図 4">
@@ -7536,7 +7719,7 @@
 </p:sld>
 </file>
 
-<file path=ppt/slides/slide41.xml><?xml version="1.0" encoding="utf-8"?>
+<file path=ppt/slides/slide42.xml><?xml version="1.0" encoding="utf-8"?>
 <p:sld xmlns:a="http://schemas.openxmlformats.org/drawingml/2006/main" xmlns:r="http://schemas.openxmlformats.org/officeDocument/2006/relationships" xmlns:p="http://schemas.openxmlformats.org/presentationml/2006/main">
   <p:cSld>
     <p:spTree>
@@ -7690,7 +7873,7 @@
 </p:sld>
 </file>
 
-<file path=ppt/slides/slide42.xml><?xml version="1.0" encoding="utf-8"?>
+<file path=ppt/slides/slide43.xml><?xml version="1.0" encoding="utf-8"?>
 <p:sld xmlns:a="http://schemas.openxmlformats.org/drawingml/2006/main" xmlns:r="http://schemas.openxmlformats.org/officeDocument/2006/relationships" xmlns:p="http://schemas.openxmlformats.org/presentationml/2006/main">
   <p:cSld>
     <p:spTree>
@@ -7880,7 +8063,7 @@
 </p:sld>
 </file>
 
-<file path=ppt/slides/slide43.xml><?xml version="1.0" encoding="utf-8"?>
+<file path=ppt/slides/slide44.xml><?xml version="1.0" encoding="utf-8"?>
 <p:sld xmlns:a="http://schemas.openxmlformats.org/drawingml/2006/main" xmlns:r="http://schemas.openxmlformats.org/officeDocument/2006/relationships" xmlns:p="http://schemas.openxmlformats.org/presentationml/2006/main">
   <p:cSld>
     <p:spTree>
@@ -8070,7 +8253,7 @@
 </p:sld>
 </file>
 
-<file path=ppt/slides/slide44.xml><?xml version="1.0" encoding="utf-8"?>
+<file path=ppt/slides/slide45.xml><?xml version="1.0" encoding="utf-8"?>
 <p:sld xmlns:a="http://schemas.openxmlformats.org/drawingml/2006/main" xmlns:r="http://schemas.openxmlformats.org/officeDocument/2006/relationships" xmlns:p="http://schemas.openxmlformats.org/presentationml/2006/main">
   <p:cSld>
     <p:spTree>
@@ -8230,7 +8413,7 @@
 </p:sld>
 </file>
 
-<file path=ppt/slides/slide45.xml><?xml version="1.0" encoding="utf-8"?>
+<file path=ppt/slides/slide46.xml><?xml version="1.0" encoding="utf-8"?>
 <p:sld xmlns:a="http://schemas.openxmlformats.org/drawingml/2006/main" xmlns:r="http://schemas.openxmlformats.org/officeDocument/2006/relationships" xmlns:p="http://schemas.openxmlformats.org/presentationml/2006/main">
   <p:cSld>
     <p:spTree>
@@ -8384,7 +8567,7 @@
 </p:sld>
 </file>
 
-<file path=ppt/slides/slide46.xml><?xml version="1.0" encoding="utf-8"?>
+<file path=ppt/slides/slide47.xml><?xml version="1.0" encoding="utf-8"?>
 <p:sld xmlns:a="http://schemas.openxmlformats.org/drawingml/2006/main" xmlns:r="http://schemas.openxmlformats.org/officeDocument/2006/relationships" xmlns:p="http://schemas.openxmlformats.org/presentationml/2006/main">
   <p:cSld>
     <p:spTree>
@@ -8538,7 +8721,7 @@
 </p:sld>
 </file>
 
-<file path=ppt/slides/slide47.xml><?xml version="1.0" encoding="utf-8"?>
+<file path=ppt/slides/slide48.xml><?xml version="1.0" encoding="utf-8"?>
 <p:sld xmlns:a="http://schemas.openxmlformats.org/drawingml/2006/main" xmlns:r="http://schemas.openxmlformats.org/officeDocument/2006/relationships" xmlns:p="http://schemas.openxmlformats.org/presentationml/2006/main">
   <p:cSld>
     <p:spTree>
@@ -8692,7 +8875,7 @@
 </p:sld>
 </file>
 
-<file path=ppt/slides/slide48.xml><?xml version="1.0" encoding="utf-8"?>
+<file path=ppt/slides/slide49.xml><?xml version="1.0" encoding="utf-8"?>
 <p:sld xmlns:a="http://schemas.openxmlformats.org/drawingml/2006/main" xmlns:r="http://schemas.openxmlformats.org/officeDocument/2006/relationships" xmlns:p="http://schemas.openxmlformats.org/presentationml/2006/main">
   <p:cSld>
     <p:spTree>
@@ -8837,160 +9020,6 @@
     <p:extLst>
       <p:ext uri="{BB962C8B-B14F-4D97-AF65-F5344CB8AC3E}">
         <p14:creationId xmlns:p14="http://schemas.microsoft.com/office/powerpoint/2010/main" val="4219019646"/>
-      </p:ext>
-    </p:extLst>
-  </p:cSld>
-  <p:clrMapOvr>
-    <a:masterClrMapping/>
-  </p:clrMapOvr>
-</p:sld>
-</file>
-
-<file path=ppt/slides/slide49.xml><?xml version="1.0" encoding="utf-8"?>
-<p:sld xmlns:a="http://schemas.openxmlformats.org/drawingml/2006/main" xmlns:r="http://schemas.openxmlformats.org/officeDocument/2006/relationships" xmlns:p="http://schemas.openxmlformats.org/presentationml/2006/main">
-  <p:cSld>
-    <p:spTree>
-      <p:nvGrpSpPr>
-        <p:cNvPr id="1" name="">
-          <a:extLst>
-            <a:ext uri="{FF2B5EF4-FFF2-40B4-BE49-F238E27FC236}">
-              <a16:creationId xmlns:a16="http://schemas.microsoft.com/office/drawing/2014/main" id="{C2BEDFCC-01A1-F2E2-6067-4E578EA44F23}"/>
-            </a:ext>
-          </a:extLst>
-        </p:cNvPr>
-        <p:cNvGrpSpPr/>
-        <p:nvPr/>
-      </p:nvGrpSpPr>
-      <p:grpSpPr>
-        <a:xfrm>
-          <a:off x="0" y="0"/>
-          <a:ext cx="0" cy="0"/>
-          <a:chOff x="0" y="0"/>
-          <a:chExt cx="0" cy="0"/>
-        </a:xfrm>
-      </p:grpSpPr>
-      <p:pic>
-        <p:nvPicPr>
-          <p:cNvPr id="11" name="図 10">
-            <a:extLst>
-              <a:ext uri="{FF2B5EF4-FFF2-40B4-BE49-F238E27FC236}">
-                <a16:creationId xmlns:a16="http://schemas.microsoft.com/office/drawing/2014/main" id="{8CD32BEA-F260-8D21-A1D1-B0679D20C39B}"/>
-              </a:ext>
-            </a:extLst>
-          </p:cNvPr>
-          <p:cNvPicPr>
-            <a:picLocks noChangeAspect="1"/>
-          </p:cNvPicPr>
-          <p:nvPr/>
-        </p:nvPicPr>
-        <p:blipFill>
-          <a:blip r:embed="rId2">
-            <a:extLst>
-              <a:ext uri="{28A0092B-C50C-407E-A947-70E740481C1C}">
-                <a14:useLocalDpi xmlns:a14="http://schemas.microsoft.com/office/drawing/2010/main" val="0"/>
-              </a:ext>
-            </a:extLst>
-          </a:blip>
-          <a:stretch>
-            <a:fillRect/>
-          </a:stretch>
-        </p:blipFill>
-        <p:spPr>
-          <a:xfrm>
-            <a:off x="4986337" y="1900031"/>
-            <a:ext cx="3133725" cy="2362200"/>
-          </a:xfrm>
-          <a:prstGeom prst="rect">
-            <a:avLst/>
-          </a:prstGeom>
-        </p:spPr>
-      </p:pic>
-      <p:sp>
-        <p:nvSpPr>
-          <p:cNvPr id="12" name="正方形/長方形 11">
-            <a:extLst>
-              <a:ext uri="{FF2B5EF4-FFF2-40B4-BE49-F238E27FC236}">
-                <a16:creationId xmlns:a16="http://schemas.microsoft.com/office/drawing/2014/main" id="{2179BB3F-8914-703E-D3BC-8D3B311C4D0B}"/>
-              </a:ext>
-            </a:extLst>
-          </p:cNvPr>
-          <p:cNvSpPr/>
-          <p:nvPr/>
-        </p:nvSpPr>
-        <p:spPr>
-          <a:xfrm>
-            <a:off x="5354128" y="2425146"/>
-            <a:ext cx="2507724" cy="1669776"/>
-          </a:xfrm>
-          <a:prstGeom prst="rect">
-            <a:avLst/>
-          </a:prstGeom>
-          <a:noFill/>
-          <a:ln w="28575">
-            <a:solidFill>
-              <a:srgbClr val="FF0000"/>
-            </a:solidFill>
-          </a:ln>
-        </p:spPr>
-        <p:style>
-          <a:lnRef idx="2">
-            <a:schemeClr val="accent1">
-              <a:shade val="15000"/>
-            </a:schemeClr>
-          </a:lnRef>
-          <a:fillRef idx="1">
-            <a:schemeClr val="accent1"/>
-          </a:fillRef>
-          <a:effectRef idx="0">
-            <a:schemeClr val="accent1"/>
-          </a:effectRef>
-          <a:fontRef idx="minor">
-            <a:schemeClr val="lt1"/>
-          </a:fontRef>
-        </p:style>
-        <p:txBody>
-          <a:bodyPr rtlCol="0" anchor="ctr"/>
-          <a:lstStyle/>
-          <a:p>
-            <a:pPr algn="ctr"/>
-            <a:endParaRPr kumimoji="1" lang="ja-JP" altLang="en-US"/>
-          </a:p>
-        </p:txBody>
-      </p:sp>
-      <p:pic>
-        <p:nvPicPr>
-          <p:cNvPr id="13" name="図 12">
-            <a:extLst>
-              <a:ext uri="{FF2B5EF4-FFF2-40B4-BE49-F238E27FC236}">
-                <a16:creationId xmlns:a16="http://schemas.microsoft.com/office/drawing/2014/main" id="{35E82C53-88BC-E03E-A857-A0063E3C31DD}"/>
-              </a:ext>
-            </a:extLst>
-          </p:cNvPr>
-          <p:cNvPicPr>
-            <a:picLocks noChangeAspect="1"/>
-          </p:cNvPicPr>
-          <p:nvPr/>
-        </p:nvPicPr>
-        <p:blipFill>
-          <a:blip r:embed="rId3"/>
-          <a:stretch>
-            <a:fillRect/>
-          </a:stretch>
-        </p:blipFill>
-        <p:spPr>
-          <a:xfrm>
-            <a:off x="563479" y="1812001"/>
-            <a:ext cx="3133616" cy="2359356"/>
-          </a:xfrm>
-          <a:prstGeom prst="rect">
-            <a:avLst/>
-          </a:prstGeom>
-        </p:spPr>
-      </p:pic>
-    </p:spTree>
-    <p:extLst>
-      <p:ext uri="{BB962C8B-B14F-4D97-AF65-F5344CB8AC3E}">
-        <p14:creationId xmlns:p14="http://schemas.microsoft.com/office/powerpoint/2010/main" val="4027563450"/>
       </p:ext>
     </p:extLst>
   </p:cSld>
@@ -9126,7 +9155,7 @@
         <p:cNvPr id="1" name="">
           <a:extLst>
             <a:ext uri="{FF2B5EF4-FFF2-40B4-BE49-F238E27FC236}">
-              <a16:creationId xmlns:a16="http://schemas.microsoft.com/office/drawing/2014/main" id="{3FBFFC4B-D084-C9B9-3AB8-9679A22FA9E7}"/>
+              <a16:creationId xmlns:a16="http://schemas.microsoft.com/office/drawing/2014/main" id="{C2BEDFCC-01A1-F2E2-6067-4E578EA44F23}"/>
             </a:ext>
           </a:extLst>
         </p:cNvPr>
@@ -9143,10 +9172,10 @@
       </p:grpSpPr>
       <p:pic>
         <p:nvPicPr>
-          <p:cNvPr id="3" name="図 2">
-            <a:extLst>
-              <a:ext uri="{FF2B5EF4-FFF2-40B4-BE49-F238E27FC236}">
-                <a16:creationId xmlns:a16="http://schemas.microsoft.com/office/drawing/2014/main" id="{9B508C4B-5B9F-EEF7-2B71-F3826D036E57}"/>
+          <p:cNvPr id="11" name="図 10">
+            <a:extLst>
+              <a:ext uri="{FF2B5EF4-FFF2-40B4-BE49-F238E27FC236}">
+                <a16:creationId xmlns:a16="http://schemas.microsoft.com/office/drawing/2014/main" id="{8CD32BEA-F260-8D21-A1D1-B0679D20C39B}"/>
               </a:ext>
             </a:extLst>
           </p:cNvPr>
@@ -9169,8 +9198,8 @@
         </p:blipFill>
         <p:spPr>
           <a:xfrm>
-            <a:off x="4595812" y="452437"/>
-            <a:ext cx="3000375" cy="5953125"/>
+            <a:off x="4986337" y="1900031"/>
+            <a:ext cx="3133725" cy="2362200"/>
           </a:xfrm>
           <a:prstGeom prst="rect">
             <a:avLst/>
@@ -9179,10 +9208,10 @@
       </p:pic>
       <p:sp>
         <p:nvSpPr>
-          <p:cNvPr id="4" name="正方形/長方形 3">
-            <a:extLst>
-              <a:ext uri="{FF2B5EF4-FFF2-40B4-BE49-F238E27FC236}">
-                <a16:creationId xmlns:a16="http://schemas.microsoft.com/office/drawing/2014/main" id="{1E5D8787-D90E-77A2-A00E-DA33BE4234E1}"/>
+          <p:cNvPr id="12" name="正方形/長方形 11">
+            <a:extLst>
+              <a:ext uri="{FF2B5EF4-FFF2-40B4-BE49-F238E27FC236}">
+                <a16:creationId xmlns:a16="http://schemas.microsoft.com/office/drawing/2014/main" id="{2179BB3F-8914-703E-D3BC-8D3B311C4D0B}"/>
               </a:ext>
             </a:extLst>
           </p:cNvPr>
@@ -9191,8 +9220,8 @@
         </p:nvSpPr>
         <p:spPr>
           <a:xfrm>
-            <a:off x="4926746" y="934275"/>
-            <a:ext cx="2507724" cy="2276063"/>
+            <a:off x="5354128" y="2425146"/>
+            <a:ext cx="2507724" cy="1669776"/>
           </a:xfrm>
           <a:prstGeom prst="rect">
             <a:avLst/>
@@ -9231,6 +9260,160 @@
       </p:sp>
       <p:pic>
         <p:nvPicPr>
+          <p:cNvPr id="13" name="図 12">
+            <a:extLst>
+              <a:ext uri="{FF2B5EF4-FFF2-40B4-BE49-F238E27FC236}">
+                <a16:creationId xmlns:a16="http://schemas.microsoft.com/office/drawing/2014/main" id="{35E82C53-88BC-E03E-A857-A0063E3C31DD}"/>
+              </a:ext>
+            </a:extLst>
+          </p:cNvPr>
+          <p:cNvPicPr>
+            <a:picLocks noChangeAspect="1"/>
+          </p:cNvPicPr>
+          <p:nvPr/>
+        </p:nvPicPr>
+        <p:blipFill>
+          <a:blip r:embed="rId3"/>
+          <a:stretch>
+            <a:fillRect/>
+          </a:stretch>
+        </p:blipFill>
+        <p:spPr>
+          <a:xfrm>
+            <a:off x="563479" y="1812001"/>
+            <a:ext cx="3133616" cy="2359356"/>
+          </a:xfrm>
+          <a:prstGeom prst="rect">
+            <a:avLst/>
+          </a:prstGeom>
+        </p:spPr>
+      </p:pic>
+    </p:spTree>
+    <p:extLst>
+      <p:ext uri="{BB962C8B-B14F-4D97-AF65-F5344CB8AC3E}">
+        <p14:creationId xmlns:p14="http://schemas.microsoft.com/office/powerpoint/2010/main" val="4027563450"/>
+      </p:ext>
+    </p:extLst>
+  </p:cSld>
+  <p:clrMapOvr>
+    <a:masterClrMapping/>
+  </p:clrMapOvr>
+</p:sld>
+</file>
+
+<file path=ppt/slides/slide51.xml><?xml version="1.0" encoding="utf-8"?>
+<p:sld xmlns:a="http://schemas.openxmlformats.org/drawingml/2006/main" xmlns:r="http://schemas.openxmlformats.org/officeDocument/2006/relationships" xmlns:p="http://schemas.openxmlformats.org/presentationml/2006/main">
+  <p:cSld>
+    <p:spTree>
+      <p:nvGrpSpPr>
+        <p:cNvPr id="1" name="">
+          <a:extLst>
+            <a:ext uri="{FF2B5EF4-FFF2-40B4-BE49-F238E27FC236}">
+              <a16:creationId xmlns:a16="http://schemas.microsoft.com/office/drawing/2014/main" id="{3FBFFC4B-D084-C9B9-3AB8-9679A22FA9E7}"/>
+            </a:ext>
+          </a:extLst>
+        </p:cNvPr>
+        <p:cNvGrpSpPr/>
+        <p:nvPr/>
+      </p:nvGrpSpPr>
+      <p:grpSpPr>
+        <a:xfrm>
+          <a:off x="0" y="0"/>
+          <a:ext cx="0" cy="0"/>
+          <a:chOff x="0" y="0"/>
+          <a:chExt cx="0" cy="0"/>
+        </a:xfrm>
+      </p:grpSpPr>
+      <p:pic>
+        <p:nvPicPr>
+          <p:cNvPr id="3" name="図 2">
+            <a:extLst>
+              <a:ext uri="{FF2B5EF4-FFF2-40B4-BE49-F238E27FC236}">
+                <a16:creationId xmlns:a16="http://schemas.microsoft.com/office/drawing/2014/main" id="{9B508C4B-5B9F-EEF7-2B71-F3826D036E57}"/>
+              </a:ext>
+            </a:extLst>
+          </p:cNvPr>
+          <p:cNvPicPr>
+            <a:picLocks noChangeAspect="1"/>
+          </p:cNvPicPr>
+          <p:nvPr/>
+        </p:nvPicPr>
+        <p:blipFill>
+          <a:blip r:embed="rId2">
+            <a:extLst>
+              <a:ext uri="{28A0092B-C50C-407E-A947-70E740481C1C}">
+                <a14:useLocalDpi xmlns:a14="http://schemas.microsoft.com/office/drawing/2010/main" val="0"/>
+              </a:ext>
+            </a:extLst>
+          </a:blip>
+          <a:stretch>
+            <a:fillRect/>
+          </a:stretch>
+        </p:blipFill>
+        <p:spPr>
+          <a:xfrm>
+            <a:off x="4595812" y="452437"/>
+            <a:ext cx="3000375" cy="5953125"/>
+          </a:xfrm>
+          <a:prstGeom prst="rect">
+            <a:avLst/>
+          </a:prstGeom>
+        </p:spPr>
+      </p:pic>
+      <p:sp>
+        <p:nvSpPr>
+          <p:cNvPr id="4" name="正方形/長方形 3">
+            <a:extLst>
+              <a:ext uri="{FF2B5EF4-FFF2-40B4-BE49-F238E27FC236}">
+                <a16:creationId xmlns:a16="http://schemas.microsoft.com/office/drawing/2014/main" id="{1E5D8787-D90E-77A2-A00E-DA33BE4234E1}"/>
+              </a:ext>
+            </a:extLst>
+          </p:cNvPr>
+          <p:cNvSpPr/>
+          <p:nvPr/>
+        </p:nvSpPr>
+        <p:spPr>
+          <a:xfrm>
+            <a:off x="4926746" y="934275"/>
+            <a:ext cx="2507724" cy="2276063"/>
+          </a:xfrm>
+          <a:prstGeom prst="rect">
+            <a:avLst/>
+          </a:prstGeom>
+          <a:noFill/>
+          <a:ln w="28575">
+            <a:solidFill>
+              <a:srgbClr val="FF0000"/>
+            </a:solidFill>
+          </a:ln>
+        </p:spPr>
+        <p:style>
+          <a:lnRef idx="2">
+            <a:schemeClr val="accent1">
+              <a:shade val="15000"/>
+            </a:schemeClr>
+          </a:lnRef>
+          <a:fillRef idx="1">
+            <a:schemeClr val="accent1"/>
+          </a:fillRef>
+          <a:effectRef idx="0">
+            <a:schemeClr val="accent1"/>
+          </a:effectRef>
+          <a:fontRef idx="minor">
+            <a:schemeClr val="lt1"/>
+          </a:fontRef>
+        </p:style>
+        <p:txBody>
+          <a:bodyPr rtlCol="0" anchor="ctr"/>
+          <a:lstStyle/>
+          <a:p>
+            <a:pPr algn="ctr"/>
+            <a:endParaRPr kumimoji="1" lang="ja-JP" altLang="en-US"/>
+          </a:p>
+        </p:txBody>
+      </p:sp>
+      <p:pic>
+        <p:nvPicPr>
           <p:cNvPr id="5" name="図 4">
             <a:extLst>
               <a:ext uri="{FF2B5EF4-FFF2-40B4-BE49-F238E27FC236}">
@@ -9272,7 +9455,7 @@
 </p:sld>
 </file>
 
-<file path=ppt/slides/slide51.xml><?xml version="1.0" encoding="utf-8"?>
+<file path=ppt/slides/slide52.xml><?xml version="1.0" encoding="utf-8"?>
 <p:sld xmlns:a="http://schemas.openxmlformats.org/drawingml/2006/main" xmlns:r="http://schemas.openxmlformats.org/officeDocument/2006/relationships" xmlns:p="http://schemas.openxmlformats.org/presentationml/2006/main">
   <p:cSld>
     <p:spTree>
@@ -9426,7 +9609,7 @@
 </p:sld>
 </file>
 
-<file path=ppt/slides/slide52.xml><?xml version="1.0" encoding="utf-8"?>
+<file path=ppt/slides/slide53.xml><?xml version="1.0" encoding="utf-8"?>
 <p:sld xmlns:a="http://schemas.openxmlformats.org/drawingml/2006/main" xmlns:r="http://schemas.openxmlformats.org/officeDocument/2006/relationships" xmlns:p="http://schemas.openxmlformats.org/presentationml/2006/main">
   <p:cSld>
     <p:spTree>
@@ -9580,7 +9763,7 @@
 </p:sld>
 </file>
 
-<file path=ppt/slides/slide53.xml><?xml version="1.0" encoding="utf-8"?>
+<file path=ppt/slides/slide54.xml><?xml version="1.0" encoding="utf-8"?>
 <p:sld xmlns:a="http://schemas.openxmlformats.org/drawingml/2006/main" xmlns:r="http://schemas.openxmlformats.org/officeDocument/2006/relationships" xmlns:p="http://schemas.openxmlformats.org/presentationml/2006/main">
   <p:cSld>
     <p:spTree>
@@ -9652,7 +9835,7 @@
 </p:sld>
 </file>
 
-<file path=ppt/slides/slide54.xml><?xml version="1.0" encoding="utf-8"?>
+<file path=ppt/slides/slide55.xml><?xml version="1.0" encoding="utf-8"?>
 <p:sld xmlns:a="http://schemas.openxmlformats.org/drawingml/2006/main" xmlns:r="http://schemas.openxmlformats.org/officeDocument/2006/relationships" xmlns:p="http://schemas.openxmlformats.org/presentationml/2006/main">
   <p:cSld>
     <p:spTree>
@@ -9724,7 +9907,7 @@
 </p:sld>
 </file>
 
-<file path=ppt/slides/slide55.xml><?xml version="1.0" encoding="utf-8"?>
+<file path=ppt/slides/slide56.xml><?xml version="1.0" encoding="utf-8"?>
 <p:sld xmlns:a="http://schemas.openxmlformats.org/drawingml/2006/main" xmlns:r="http://schemas.openxmlformats.org/officeDocument/2006/relationships" xmlns:p="http://schemas.openxmlformats.org/presentationml/2006/main">
   <p:cSld>
     <p:spTree>
@@ -9878,7 +10061,7 @@
 </p:sld>
 </file>
 
-<file path=ppt/slides/slide56.xml><?xml version="1.0" encoding="utf-8"?>
+<file path=ppt/slides/slide57.xml><?xml version="1.0" encoding="utf-8"?>
 <p:sld xmlns:a="http://schemas.openxmlformats.org/drawingml/2006/main" xmlns:r="http://schemas.openxmlformats.org/officeDocument/2006/relationships" xmlns:p="http://schemas.openxmlformats.org/presentationml/2006/main">
   <p:cSld>
     <p:spTree>
@@ -10032,7 +10215,7 @@
 </p:sld>
 </file>
 
-<file path=ppt/slides/slide57.xml><?xml version="1.0" encoding="utf-8"?>
+<file path=ppt/slides/slide58.xml><?xml version="1.0" encoding="utf-8"?>
 <p:sld xmlns:a="http://schemas.openxmlformats.org/drawingml/2006/main" xmlns:r="http://schemas.openxmlformats.org/officeDocument/2006/relationships" xmlns:p="http://schemas.openxmlformats.org/presentationml/2006/main">
   <p:cSld>
     <p:spTree>
@@ -10186,7 +10369,7 @@
 </p:sld>
 </file>
 
-<file path=ppt/slides/slide58.xml><?xml version="1.0" encoding="utf-8"?>
+<file path=ppt/slides/slide59.xml><?xml version="1.0" encoding="utf-8"?>
 <p:sld xmlns:a="http://schemas.openxmlformats.org/drawingml/2006/main" xmlns:r="http://schemas.openxmlformats.org/officeDocument/2006/relationships" xmlns:p="http://schemas.openxmlformats.org/presentationml/2006/main">
   <p:cSld>
     <p:spTree>
@@ -10340,7 +10523,131 @@
 </p:sld>
 </file>
 
-<file path=ppt/slides/slide59.xml><?xml version="1.0" encoding="utf-8"?>
+<file path=ppt/slides/slide6.xml><?xml version="1.0" encoding="utf-8"?>
+<p:sld xmlns:a="http://schemas.openxmlformats.org/drawingml/2006/main" xmlns:r="http://schemas.openxmlformats.org/officeDocument/2006/relationships" xmlns:p="http://schemas.openxmlformats.org/presentationml/2006/main">
+  <p:cSld>
+    <p:spTree>
+      <p:nvGrpSpPr>
+        <p:cNvPr id="1" name="">
+          <a:extLst>
+            <a:ext uri="{FF2B5EF4-FFF2-40B4-BE49-F238E27FC236}">
+              <a16:creationId xmlns:a16="http://schemas.microsoft.com/office/drawing/2014/main" id="{2385273C-31EF-FD48-5B5F-24A7A498BA4C}"/>
+            </a:ext>
+          </a:extLst>
+        </p:cNvPr>
+        <p:cNvGrpSpPr/>
+        <p:nvPr/>
+      </p:nvGrpSpPr>
+      <p:grpSpPr>
+        <a:xfrm>
+          <a:off x="0" y="0"/>
+          <a:ext cx="0" cy="0"/>
+          <a:chOff x="0" y="0"/>
+          <a:chExt cx="0" cy="0"/>
+        </a:xfrm>
+      </p:grpSpPr>
+      <p:pic>
+        <p:nvPicPr>
+          <p:cNvPr id="5" name="図 4">
+            <a:extLst>
+              <a:ext uri="{FF2B5EF4-FFF2-40B4-BE49-F238E27FC236}">
+                <a16:creationId xmlns:a16="http://schemas.microsoft.com/office/drawing/2014/main" id="{F6F7ACCB-F1AB-0E56-B6C1-68F03EDC9119}"/>
+              </a:ext>
+            </a:extLst>
+          </p:cNvPr>
+          <p:cNvPicPr>
+            <a:picLocks noChangeAspect="1"/>
+          </p:cNvPicPr>
+          <p:nvPr/>
+        </p:nvPicPr>
+        <p:blipFill>
+          <a:blip r:embed="rId2">
+            <a:extLst>
+              <a:ext uri="{28A0092B-C50C-407E-A947-70E740481C1C}">
+                <a14:useLocalDpi xmlns:a14="http://schemas.microsoft.com/office/drawing/2010/main" val="0"/>
+              </a:ext>
+            </a:extLst>
+          </a:blip>
+          <a:stretch>
+            <a:fillRect/>
+          </a:stretch>
+        </p:blipFill>
+        <p:spPr>
+          <a:xfrm>
+            <a:off x="4362450" y="2776537"/>
+            <a:ext cx="3467100" cy="1304925"/>
+          </a:xfrm>
+          <a:prstGeom prst="rect">
+            <a:avLst/>
+          </a:prstGeom>
+        </p:spPr>
+      </p:pic>
+      <p:sp>
+        <p:nvSpPr>
+          <p:cNvPr id="6" name="正方形/長方形 5">
+            <a:extLst>
+              <a:ext uri="{FF2B5EF4-FFF2-40B4-BE49-F238E27FC236}">
+                <a16:creationId xmlns:a16="http://schemas.microsoft.com/office/drawing/2014/main" id="{221BE025-56A0-8AA6-BD15-2F7A2FBBEF48}"/>
+              </a:ext>
+            </a:extLst>
+          </p:cNvPr>
+          <p:cNvSpPr/>
+          <p:nvPr/>
+        </p:nvSpPr>
+        <p:spPr>
+          <a:xfrm>
+            <a:off x="6858000" y="2879195"/>
+            <a:ext cx="855133" cy="482603"/>
+          </a:xfrm>
+          <a:prstGeom prst="rect">
+            <a:avLst/>
+          </a:prstGeom>
+          <a:noFill/>
+          <a:ln w="28575">
+            <a:solidFill>
+              <a:srgbClr val="FF0000"/>
+            </a:solidFill>
+          </a:ln>
+        </p:spPr>
+        <p:style>
+          <a:lnRef idx="2">
+            <a:schemeClr val="accent1">
+              <a:shade val="15000"/>
+            </a:schemeClr>
+          </a:lnRef>
+          <a:fillRef idx="1">
+            <a:schemeClr val="accent1"/>
+          </a:fillRef>
+          <a:effectRef idx="0">
+            <a:schemeClr val="accent1"/>
+          </a:effectRef>
+          <a:fontRef idx="minor">
+            <a:schemeClr val="lt1"/>
+          </a:fontRef>
+        </p:style>
+        <p:txBody>
+          <a:bodyPr rtlCol="0" anchor="ctr"/>
+          <a:lstStyle/>
+          <a:p>
+            <a:pPr algn="ctr"/>
+            <a:endParaRPr kumimoji="1" lang="ja-JP" altLang="en-US"/>
+          </a:p>
+        </p:txBody>
+      </p:sp>
+    </p:spTree>
+    <p:extLst>
+      <p:ext uri="{BB962C8B-B14F-4D97-AF65-F5344CB8AC3E}">
+        <p14:creationId xmlns:p14="http://schemas.microsoft.com/office/powerpoint/2010/main" val="1183525208"/>
+      </p:ext>
+    </p:extLst>
+  </p:cSld>
+  <p:clrMapOvr>
+    <a:masterClrMapping/>
+  </p:clrMapOvr>
+</p:sld>
+</file>
+
+<file path=ppt/slides/slide60.xml><?xml version="1.0" encoding="utf-8"?>
 <p:sld xmlns:a="http://schemas.openxmlformats.org/drawingml/2006/main" xmlns:r="http://schemas.openxmlformats.org/officeDocument/2006/relationships" xmlns:p="http://schemas.openxmlformats.org/presentationml/2006/main">
   <p:cSld>
     <p:spTree>
@@ -10376,131 +10683,7 @@
 </p:sld>
 </file>
 
-<file path=ppt/slides/slide6.xml><?xml version="1.0" encoding="utf-8"?>
-<p:sld xmlns:a="http://schemas.openxmlformats.org/drawingml/2006/main" xmlns:r="http://schemas.openxmlformats.org/officeDocument/2006/relationships" xmlns:p="http://schemas.openxmlformats.org/presentationml/2006/main">
-  <p:cSld>
-    <p:spTree>
-      <p:nvGrpSpPr>
-        <p:cNvPr id="1" name="">
-          <a:extLst>
-            <a:ext uri="{FF2B5EF4-FFF2-40B4-BE49-F238E27FC236}">
-              <a16:creationId xmlns:a16="http://schemas.microsoft.com/office/drawing/2014/main" id="{2385273C-31EF-FD48-5B5F-24A7A498BA4C}"/>
-            </a:ext>
-          </a:extLst>
-        </p:cNvPr>
-        <p:cNvGrpSpPr/>
-        <p:nvPr/>
-      </p:nvGrpSpPr>
-      <p:grpSpPr>
-        <a:xfrm>
-          <a:off x="0" y="0"/>
-          <a:ext cx="0" cy="0"/>
-          <a:chOff x="0" y="0"/>
-          <a:chExt cx="0" cy="0"/>
-        </a:xfrm>
-      </p:grpSpPr>
-      <p:pic>
-        <p:nvPicPr>
-          <p:cNvPr id="5" name="図 4">
-            <a:extLst>
-              <a:ext uri="{FF2B5EF4-FFF2-40B4-BE49-F238E27FC236}">
-                <a16:creationId xmlns:a16="http://schemas.microsoft.com/office/drawing/2014/main" id="{F6F7ACCB-F1AB-0E56-B6C1-68F03EDC9119}"/>
-              </a:ext>
-            </a:extLst>
-          </p:cNvPr>
-          <p:cNvPicPr>
-            <a:picLocks noChangeAspect="1"/>
-          </p:cNvPicPr>
-          <p:nvPr/>
-        </p:nvPicPr>
-        <p:blipFill>
-          <a:blip r:embed="rId2">
-            <a:extLst>
-              <a:ext uri="{28A0092B-C50C-407E-A947-70E740481C1C}">
-                <a14:useLocalDpi xmlns:a14="http://schemas.microsoft.com/office/drawing/2010/main" val="0"/>
-              </a:ext>
-            </a:extLst>
-          </a:blip>
-          <a:stretch>
-            <a:fillRect/>
-          </a:stretch>
-        </p:blipFill>
-        <p:spPr>
-          <a:xfrm>
-            <a:off x="4362450" y="2776537"/>
-            <a:ext cx="3467100" cy="1304925"/>
-          </a:xfrm>
-          <a:prstGeom prst="rect">
-            <a:avLst/>
-          </a:prstGeom>
-        </p:spPr>
-      </p:pic>
-      <p:sp>
-        <p:nvSpPr>
-          <p:cNvPr id="6" name="正方形/長方形 5">
-            <a:extLst>
-              <a:ext uri="{FF2B5EF4-FFF2-40B4-BE49-F238E27FC236}">
-                <a16:creationId xmlns:a16="http://schemas.microsoft.com/office/drawing/2014/main" id="{221BE025-56A0-8AA6-BD15-2F7A2FBBEF48}"/>
-              </a:ext>
-            </a:extLst>
-          </p:cNvPr>
-          <p:cNvSpPr/>
-          <p:nvPr/>
-        </p:nvSpPr>
-        <p:spPr>
-          <a:xfrm>
-            <a:off x="6858000" y="2879195"/>
-            <a:ext cx="855133" cy="482603"/>
-          </a:xfrm>
-          <a:prstGeom prst="rect">
-            <a:avLst/>
-          </a:prstGeom>
-          <a:noFill/>
-          <a:ln w="28575">
-            <a:solidFill>
-              <a:srgbClr val="FF0000"/>
-            </a:solidFill>
-          </a:ln>
-        </p:spPr>
-        <p:style>
-          <a:lnRef idx="2">
-            <a:schemeClr val="accent1">
-              <a:shade val="15000"/>
-            </a:schemeClr>
-          </a:lnRef>
-          <a:fillRef idx="1">
-            <a:schemeClr val="accent1"/>
-          </a:fillRef>
-          <a:effectRef idx="0">
-            <a:schemeClr val="accent1"/>
-          </a:effectRef>
-          <a:fontRef idx="minor">
-            <a:schemeClr val="lt1"/>
-          </a:fontRef>
-        </p:style>
-        <p:txBody>
-          <a:bodyPr rtlCol="0" anchor="ctr"/>
-          <a:lstStyle/>
-          <a:p>
-            <a:pPr algn="ctr"/>
-            <a:endParaRPr kumimoji="1" lang="ja-JP" altLang="en-US"/>
-          </a:p>
-        </p:txBody>
-      </p:sp>
-    </p:spTree>
-    <p:extLst>
-      <p:ext uri="{BB962C8B-B14F-4D97-AF65-F5344CB8AC3E}">
-        <p14:creationId xmlns:p14="http://schemas.microsoft.com/office/powerpoint/2010/main" val="1183525208"/>
-      </p:ext>
-    </p:extLst>
-  </p:cSld>
-  <p:clrMapOvr>
-    <a:masterClrMapping/>
-  </p:clrMapOvr>
-</p:sld>
-</file>
-
-<file path=ppt/slides/slide60.xml><?xml version="1.0" encoding="utf-8"?>
+<file path=ppt/slides/slide61.xml><?xml version="1.0" encoding="utf-8"?>
 <p:sld xmlns:a="http://schemas.openxmlformats.org/drawingml/2006/main" xmlns:r="http://schemas.openxmlformats.org/officeDocument/2006/relationships" xmlns:p="http://schemas.openxmlformats.org/presentationml/2006/main">
   <p:cSld>
     <p:spTree>
@@ -10536,7 +10719,7 @@
 </p:sld>
 </file>
 
-<file path=ppt/slides/slide61.xml><?xml version="1.0" encoding="utf-8"?>
+<file path=ppt/slides/slide62.xml><?xml version="1.0" encoding="utf-8"?>
 <p:sld xmlns:a="http://schemas.openxmlformats.org/drawingml/2006/main" xmlns:r="http://schemas.openxmlformats.org/officeDocument/2006/relationships" xmlns:p="http://schemas.openxmlformats.org/presentationml/2006/main">
   <p:cSld>
     <p:spTree>
@@ -10572,7 +10755,7 @@
 </p:sld>
 </file>
 
-<file path=ppt/slides/slide62.xml><?xml version="1.0" encoding="utf-8"?>
+<file path=ppt/slides/slide63.xml><?xml version="1.0" encoding="utf-8"?>
 <p:sld xmlns:a="http://schemas.openxmlformats.org/drawingml/2006/main" xmlns:r="http://schemas.openxmlformats.org/officeDocument/2006/relationships" xmlns:p="http://schemas.openxmlformats.org/presentationml/2006/main">
   <p:cSld>
     <p:spTree>
@@ -10608,7 +10791,7 @@
 </p:sld>
 </file>
 
-<file path=ppt/slides/slide63.xml><?xml version="1.0" encoding="utf-8"?>
+<file path=ppt/slides/slide64.xml><?xml version="1.0" encoding="utf-8"?>
 <p:sld xmlns:a="http://schemas.openxmlformats.org/drawingml/2006/main" xmlns:r="http://schemas.openxmlformats.org/officeDocument/2006/relationships" xmlns:p="http://schemas.openxmlformats.org/presentationml/2006/main">
   <p:cSld>
     <p:spTree>
@@ -10644,7 +10827,7 @@
 </p:sld>
 </file>
 
-<file path=ppt/slides/slide64.xml><?xml version="1.0" encoding="utf-8"?>
+<file path=ppt/slides/slide65.xml><?xml version="1.0" encoding="utf-8"?>
 <p:sld xmlns:a="http://schemas.openxmlformats.org/drawingml/2006/main" xmlns:r="http://schemas.openxmlformats.org/officeDocument/2006/relationships" xmlns:p="http://schemas.openxmlformats.org/presentationml/2006/main">
   <p:cSld>
     <p:spTree>
@@ -10680,7 +10863,7 @@
 </p:sld>
 </file>
 
-<file path=ppt/slides/slide65.xml><?xml version="1.0" encoding="utf-8"?>
+<file path=ppt/slides/slide66.xml><?xml version="1.0" encoding="utf-8"?>
 <p:sld xmlns:a="http://schemas.openxmlformats.org/drawingml/2006/main" xmlns:r="http://schemas.openxmlformats.org/officeDocument/2006/relationships" xmlns:p="http://schemas.openxmlformats.org/presentationml/2006/main">
   <p:cSld>
     <p:spTree>

--- a/tool/smstokintone/docs/プレゼンテーション1.pptx
+++ b/tool/smstokintone/docs/プレゼンテーション1.pptx
@@ -4938,10 +4938,10 @@
       </p:grpSpPr>
       <p:pic>
         <p:nvPicPr>
-          <p:cNvPr id="3" name="図 2">
-            <a:extLst>
-              <a:ext uri="{FF2B5EF4-FFF2-40B4-BE49-F238E27FC236}">
-                <a16:creationId xmlns:a16="http://schemas.microsoft.com/office/drawing/2014/main" id="{614FD296-C70E-99EF-49FC-289154AA9846}"/>
+          <p:cNvPr id="4" name="図 3">
+            <a:extLst>
+              <a:ext uri="{FF2B5EF4-FFF2-40B4-BE49-F238E27FC236}">
+                <a16:creationId xmlns:a16="http://schemas.microsoft.com/office/drawing/2014/main" id="{7B73E852-2220-757F-C47A-B9F309963990}"/>
               </a:ext>
             </a:extLst>
           </p:cNvPr>
@@ -4964,8 +4964,8 @@
         </p:blipFill>
         <p:spPr>
           <a:xfrm>
-            <a:off x="4433827" y="0"/>
-            <a:ext cx="3324345" cy="6858000"/>
+            <a:off x="3832156" y="877956"/>
+            <a:ext cx="3076575" cy="4267200"/>
           </a:xfrm>
           <a:prstGeom prst="rect">
             <a:avLst/>

--- a/tool/smstokintone/docs/プレゼンテーション1.pptx
+++ b/tool/smstokintone/docs/プレゼンテーション1.pptx
@@ -324,7 +324,7 @@
           <a:p>
             <a:fld id="{E488909A-5A47-44E5-8560-CBEAA1DE666A}" type="datetimeFigureOut">
               <a:rPr kumimoji="1" lang="ja-JP" altLang="en-US" smtClean="0"/>
-              <a:t>2026/9/5</a:t>
+              <a:t>2026/9/6</a:t>
             </a:fld>
             <a:endParaRPr kumimoji="1" lang="ja-JP" altLang="en-US"/>
           </a:p>
@@ -554,7 +554,7 @@
           <a:p>
             <a:fld id="{E488909A-5A47-44E5-8560-CBEAA1DE666A}" type="datetimeFigureOut">
               <a:rPr kumimoji="1" lang="ja-JP" altLang="en-US" smtClean="0"/>
-              <a:t>2026/9/5</a:t>
+              <a:t>2026/9/6</a:t>
             </a:fld>
             <a:endParaRPr kumimoji="1" lang="ja-JP" altLang="en-US"/>
           </a:p>
@@ -794,7 +794,7 @@
           <a:p>
             <a:fld id="{E488909A-5A47-44E5-8560-CBEAA1DE666A}" type="datetimeFigureOut">
               <a:rPr kumimoji="1" lang="ja-JP" altLang="en-US" smtClean="0"/>
-              <a:t>2026/9/5</a:t>
+              <a:t>2026/9/6</a:t>
             </a:fld>
             <a:endParaRPr kumimoji="1" lang="ja-JP" altLang="en-US"/>
           </a:p>
@@ -1024,7 +1024,7 @@
           <a:p>
             <a:fld id="{E488909A-5A47-44E5-8560-CBEAA1DE666A}" type="datetimeFigureOut">
               <a:rPr kumimoji="1" lang="ja-JP" altLang="en-US" smtClean="0"/>
-              <a:t>2026/9/5</a:t>
+              <a:t>2026/9/6</a:t>
             </a:fld>
             <a:endParaRPr kumimoji="1" lang="ja-JP" altLang="en-US"/>
           </a:p>
@@ -1299,7 +1299,7 @@
           <a:p>
             <a:fld id="{E488909A-5A47-44E5-8560-CBEAA1DE666A}" type="datetimeFigureOut">
               <a:rPr kumimoji="1" lang="ja-JP" altLang="en-US" smtClean="0"/>
-              <a:t>2026/9/5</a:t>
+              <a:t>2026/9/6</a:t>
             </a:fld>
             <a:endParaRPr kumimoji="1" lang="ja-JP" altLang="en-US"/>
           </a:p>
@@ -1628,7 +1628,7 @@
           <a:p>
             <a:fld id="{E488909A-5A47-44E5-8560-CBEAA1DE666A}" type="datetimeFigureOut">
               <a:rPr kumimoji="1" lang="ja-JP" altLang="en-US" smtClean="0"/>
-              <a:t>2026/9/5</a:t>
+              <a:t>2026/9/6</a:t>
             </a:fld>
             <a:endParaRPr kumimoji="1" lang="ja-JP" altLang="en-US"/>
           </a:p>
@@ -2104,7 +2104,7 @@
           <a:p>
             <a:fld id="{E488909A-5A47-44E5-8560-CBEAA1DE666A}" type="datetimeFigureOut">
               <a:rPr kumimoji="1" lang="ja-JP" altLang="en-US" smtClean="0"/>
-              <a:t>2026/9/5</a:t>
+              <a:t>2026/9/6</a:t>
             </a:fld>
             <a:endParaRPr kumimoji="1" lang="ja-JP" altLang="en-US"/>
           </a:p>
@@ -2245,7 +2245,7 @@
           <a:p>
             <a:fld id="{E488909A-5A47-44E5-8560-CBEAA1DE666A}" type="datetimeFigureOut">
               <a:rPr kumimoji="1" lang="ja-JP" altLang="en-US" smtClean="0"/>
-              <a:t>2026/9/5</a:t>
+              <a:t>2026/9/6</a:t>
             </a:fld>
             <a:endParaRPr kumimoji="1" lang="ja-JP" altLang="en-US"/>
           </a:p>
@@ -2358,7 +2358,7 @@
           <a:p>
             <a:fld id="{E488909A-5A47-44E5-8560-CBEAA1DE666A}" type="datetimeFigureOut">
               <a:rPr kumimoji="1" lang="ja-JP" altLang="en-US" smtClean="0"/>
-              <a:t>2026/9/5</a:t>
+              <a:t>2026/9/6</a:t>
             </a:fld>
             <a:endParaRPr kumimoji="1" lang="ja-JP" altLang="en-US"/>
           </a:p>
@@ -2701,7 +2701,7 @@
           <a:p>
             <a:fld id="{E488909A-5A47-44E5-8560-CBEAA1DE666A}" type="datetimeFigureOut">
               <a:rPr kumimoji="1" lang="ja-JP" altLang="en-US" smtClean="0"/>
-              <a:t>2026/9/5</a:t>
+              <a:t>2026/9/6</a:t>
             </a:fld>
             <a:endParaRPr kumimoji="1" lang="ja-JP" altLang="en-US"/>
           </a:p>
@@ -2989,7 +2989,7 @@
           <a:p>
             <a:fld id="{E488909A-5A47-44E5-8560-CBEAA1DE666A}" type="datetimeFigureOut">
               <a:rPr kumimoji="1" lang="ja-JP" altLang="en-US" smtClean="0"/>
-              <a:t>2026/9/5</a:t>
+              <a:t>2026/9/6</a:t>
             </a:fld>
             <a:endParaRPr kumimoji="1" lang="ja-JP" altLang="en-US"/>
           </a:p>
@@ -3262,7 +3262,7 @@
           <a:p>
             <a:fld id="{E488909A-5A47-44E5-8560-CBEAA1DE666A}" type="datetimeFigureOut">
               <a:rPr kumimoji="1" lang="ja-JP" altLang="en-US" smtClean="0"/>
-              <a:t>2026/9/5</a:t>
+              <a:t>2026/9/6</a:t>
             </a:fld>
             <a:endParaRPr kumimoji="1" lang="ja-JP" altLang="en-US"/>
           </a:p>
@@ -8438,10 +8438,10 @@
       </p:grpSpPr>
       <p:pic>
         <p:nvPicPr>
-          <p:cNvPr id="5" name="図 4">
-            <a:extLst>
-              <a:ext uri="{FF2B5EF4-FFF2-40B4-BE49-F238E27FC236}">
-                <a16:creationId xmlns:a16="http://schemas.microsoft.com/office/drawing/2014/main" id="{4A0D055B-11A0-377F-3017-951754335A71}"/>
+          <p:cNvPr id="2" name="図 1">
+            <a:extLst>
+              <a:ext uri="{FF2B5EF4-FFF2-40B4-BE49-F238E27FC236}">
+                <a16:creationId xmlns:a16="http://schemas.microsoft.com/office/drawing/2014/main" id="{C2728609-8D01-C327-60BB-0E6BD584F948}"/>
               </a:ext>
             </a:extLst>
           </p:cNvPr>
@@ -8464,8 +8464,8 @@
         </p:blipFill>
         <p:spPr>
           <a:xfrm>
-            <a:off x="4572000" y="600456"/>
-            <a:ext cx="2714625" cy="5038344"/>
+            <a:off x="4971222" y="600456"/>
+            <a:ext cx="2640331" cy="4966853"/>
           </a:xfrm>
           <a:prstGeom prst="rect">
             <a:avLst/>
@@ -8486,7 +8486,7 @@
         </p:nvSpPr>
         <p:spPr>
           <a:xfrm flipV="1">
-            <a:off x="4896928" y="1057482"/>
+            <a:off x="5231337" y="987908"/>
             <a:ext cx="2239367" cy="1317970"/>
           </a:xfrm>
           <a:prstGeom prst="rect">
@@ -8526,10 +8526,10 @@
       </p:sp>
       <p:pic>
         <p:nvPicPr>
-          <p:cNvPr id="7" name="図 6">
-            <a:extLst>
-              <a:ext uri="{FF2B5EF4-FFF2-40B4-BE49-F238E27FC236}">
-                <a16:creationId xmlns:a16="http://schemas.microsoft.com/office/drawing/2014/main" id="{17AF4AFA-BE42-280F-AB03-E339DBA7E140}"/>
+          <p:cNvPr id="3" name="図 2">
+            <a:extLst>
+              <a:ext uri="{FF2B5EF4-FFF2-40B4-BE49-F238E27FC236}">
+                <a16:creationId xmlns:a16="http://schemas.microsoft.com/office/drawing/2014/main" id="{952164AF-3E54-B7E3-EBC4-7245310911F1}"/>
               </a:ext>
             </a:extLst>
           </p:cNvPr>
@@ -8546,8 +8546,8 @@
         </p:blipFill>
         <p:spPr>
           <a:xfrm>
-            <a:off x="2183973" y="493691"/>
-            <a:ext cx="2712955" cy="5035732"/>
+            <a:off x="1122417" y="520330"/>
+            <a:ext cx="2645893" cy="4962574"/>
           </a:xfrm>
           <a:prstGeom prst="rect">
             <a:avLst/>
@@ -8592,10 +8592,10 @@
       </p:grpSpPr>
       <p:pic>
         <p:nvPicPr>
-          <p:cNvPr id="5" name="図 4">
-            <a:extLst>
-              <a:ext uri="{FF2B5EF4-FFF2-40B4-BE49-F238E27FC236}">
-                <a16:creationId xmlns:a16="http://schemas.microsoft.com/office/drawing/2014/main" id="{3EFAEBCE-C8DD-DD16-45B5-038A2DE1BB89}"/>
+          <p:cNvPr id="3" name="図 2">
+            <a:extLst>
+              <a:ext uri="{FF2B5EF4-FFF2-40B4-BE49-F238E27FC236}">
+                <a16:creationId xmlns:a16="http://schemas.microsoft.com/office/drawing/2014/main" id="{5A8FD00C-08B5-926D-5C6F-641956269AC4}"/>
               </a:ext>
             </a:extLst>
           </p:cNvPr>
@@ -8618,8 +8618,8 @@
         </p:blipFill>
         <p:spPr>
           <a:xfrm>
-            <a:off x="4572000" y="600456"/>
-            <a:ext cx="2714625" cy="5038344"/>
+            <a:off x="4971222" y="630274"/>
+            <a:ext cx="2640331" cy="4966853"/>
           </a:xfrm>
           <a:prstGeom prst="rect">
             <a:avLst/>
@@ -8628,10 +8628,10 @@
       </p:pic>
       <p:sp>
         <p:nvSpPr>
-          <p:cNvPr id="6" name="正方形/長方形 5">
-            <a:extLst>
-              <a:ext uri="{FF2B5EF4-FFF2-40B4-BE49-F238E27FC236}">
-                <a16:creationId xmlns:a16="http://schemas.microsoft.com/office/drawing/2014/main" id="{F106A793-07AF-7E1F-AC83-3C8402BA86CB}"/>
+          <p:cNvPr id="4" name="正方形/長方形 3">
+            <a:extLst>
+              <a:ext uri="{FF2B5EF4-FFF2-40B4-BE49-F238E27FC236}">
+                <a16:creationId xmlns:a16="http://schemas.microsoft.com/office/drawing/2014/main" id="{D8F84BA2-C3CB-D06F-D82A-E560EE1FCDAB}"/>
               </a:ext>
             </a:extLst>
           </p:cNvPr>
@@ -8640,7 +8640,7 @@
         </p:nvSpPr>
         <p:spPr>
           <a:xfrm flipV="1">
-            <a:off x="4896928" y="2458900"/>
+            <a:off x="5231337" y="2439021"/>
             <a:ext cx="2239367" cy="1317970"/>
           </a:xfrm>
           <a:prstGeom prst="rect">
@@ -8680,10 +8680,10 @@
       </p:sp>
       <p:pic>
         <p:nvPicPr>
-          <p:cNvPr id="2" name="図 1">
-            <a:extLst>
-              <a:ext uri="{FF2B5EF4-FFF2-40B4-BE49-F238E27FC236}">
-                <a16:creationId xmlns:a16="http://schemas.microsoft.com/office/drawing/2014/main" id="{ED3D9143-D717-108C-3F44-B9293C554FBC}"/>
+          <p:cNvPr id="7" name="図 6">
+            <a:extLst>
+              <a:ext uri="{FF2B5EF4-FFF2-40B4-BE49-F238E27FC236}">
+                <a16:creationId xmlns:a16="http://schemas.microsoft.com/office/drawing/2014/main" id="{99B525AA-1449-3C86-1AEA-98276ADA752C}"/>
               </a:ext>
             </a:extLst>
           </p:cNvPr>
@@ -8700,8 +8700,8 @@
         </p:blipFill>
         <p:spPr>
           <a:xfrm>
-            <a:off x="1568939" y="39757"/>
-            <a:ext cx="2712955" cy="5035732"/>
+            <a:off x="2019914" y="613670"/>
+            <a:ext cx="2645893" cy="4968671"/>
           </a:xfrm>
           <a:prstGeom prst="rect">
             <a:avLst/>
@@ -8746,10 +8746,10 @@
       </p:grpSpPr>
       <p:pic>
         <p:nvPicPr>
-          <p:cNvPr id="5" name="図 4">
-            <a:extLst>
-              <a:ext uri="{FF2B5EF4-FFF2-40B4-BE49-F238E27FC236}">
-                <a16:creationId xmlns:a16="http://schemas.microsoft.com/office/drawing/2014/main" id="{3AE8E93A-5AA3-C176-C6F0-20A6B094E88D}"/>
+          <p:cNvPr id="3" name="図 2">
+            <a:extLst>
+              <a:ext uri="{FF2B5EF4-FFF2-40B4-BE49-F238E27FC236}">
+                <a16:creationId xmlns:a16="http://schemas.microsoft.com/office/drawing/2014/main" id="{CCE7DE68-48A4-033E-65C0-8C55107F6A0D}"/>
               </a:ext>
             </a:extLst>
           </p:cNvPr>
@@ -8772,8 +8772,8 @@
         </p:blipFill>
         <p:spPr>
           <a:xfrm>
-            <a:off x="4572000" y="600456"/>
-            <a:ext cx="2714625" cy="5038344"/>
+            <a:off x="4971222" y="630274"/>
+            <a:ext cx="2640331" cy="4966853"/>
           </a:xfrm>
           <a:prstGeom prst="rect">
             <a:avLst/>
@@ -8782,10 +8782,10 @@
       </p:pic>
       <p:sp>
         <p:nvSpPr>
-          <p:cNvPr id="6" name="正方形/長方形 5">
-            <a:extLst>
-              <a:ext uri="{FF2B5EF4-FFF2-40B4-BE49-F238E27FC236}">
-                <a16:creationId xmlns:a16="http://schemas.microsoft.com/office/drawing/2014/main" id="{E3A6EE87-D4A8-A501-72B6-295A23C9D18C}"/>
+          <p:cNvPr id="4" name="正方形/長方形 3">
+            <a:extLst>
+              <a:ext uri="{FF2B5EF4-FFF2-40B4-BE49-F238E27FC236}">
+                <a16:creationId xmlns:a16="http://schemas.microsoft.com/office/drawing/2014/main" id="{E824850C-D4B2-FD5D-D163-3218A77D6117}"/>
               </a:ext>
             </a:extLst>
           </p:cNvPr>
@@ -8794,8 +8794,8 @@
         </p:nvSpPr>
         <p:spPr>
           <a:xfrm flipV="1">
-            <a:off x="4896928" y="3830500"/>
-            <a:ext cx="2239367" cy="1119187"/>
+            <a:off x="5231337" y="3790742"/>
+            <a:ext cx="2239367" cy="1099310"/>
           </a:xfrm>
           <a:prstGeom prst="rect">
             <a:avLst/>
@@ -8834,10 +8834,10 @@
       </p:sp>
       <p:pic>
         <p:nvPicPr>
-          <p:cNvPr id="2" name="図 1">
-            <a:extLst>
-              <a:ext uri="{FF2B5EF4-FFF2-40B4-BE49-F238E27FC236}">
-                <a16:creationId xmlns:a16="http://schemas.microsoft.com/office/drawing/2014/main" id="{49D35A3C-50AF-010A-805A-870A2EE9D8E4}"/>
+          <p:cNvPr id="7" name="図 6">
+            <a:extLst>
+              <a:ext uri="{FF2B5EF4-FFF2-40B4-BE49-F238E27FC236}">
+                <a16:creationId xmlns:a16="http://schemas.microsoft.com/office/drawing/2014/main" id="{DE752ACA-1476-7725-3441-A8E51EC9DFDB}"/>
               </a:ext>
             </a:extLst>
           </p:cNvPr>
@@ -8854,8 +8854,8 @@
         </p:blipFill>
         <p:spPr>
           <a:xfrm>
-            <a:off x="2105652" y="509634"/>
-            <a:ext cx="2712955" cy="5035732"/>
+            <a:off x="935273" y="765760"/>
+            <a:ext cx="2645893" cy="4968671"/>
           </a:xfrm>
           <a:prstGeom prst="rect">
             <a:avLst/>
@@ -8900,10 +8900,10 @@
       </p:grpSpPr>
       <p:pic>
         <p:nvPicPr>
-          <p:cNvPr id="5" name="図 4">
-            <a:extLst>
-              <a:ext uri="{FF2B5EF4-FFF2-40B4-BE49-F238E27FC236}">
-                <a16:creationId xmlns:a16="http://schemas.microsoft.com/office/drawing/2014/main" id="{C0C5BBDC-D242-4402-370E-F42BE6DF1178}"/>
+          <p:cNvPr id="9" name="図 8">
+            <a:extLst>
+              <a:ext uri="{FF2B5EF4-FFF2-40B4-BE49-F238E27FC236}">
+                <a16:creationId xmlns:a16="http://schemas.microsoft.com/office/drawing/2014/main" id="{B7C33914-CE3F-AE00-68D5-BE15274ECCBF}"/>
               </a:ext>
             </a:extLst>
           </p:cNvPr>
@@ -8926,8 +8926,8 @@
         </p:blipFill>
         <p:spPr>
           <a:xfrm>
-            <a:off x="4572000" y="600456"/>
-            <a:ext cx="2714625" cy="5038344"/>
+            <a:off x="4971222" y="630274"/>
+            <a:ext cx="2640331" cy="4966853"/>
           </a:xfrm>
           <a:prstGeom prst="rect">
             <a:avLst/>
@@ -8936,10 +8936,10 @@
       </p:pic>
       <p:sp>
         <p:nvSpPr>
-          <p:cNvPr id="6" name="正方形/長方形 5">
-            <a:extLst>
-              <a:ext uri="{FF2B5EF4-FFF2-40B4-BE49-F238E27FC236}">
-                <a16:creationId xmlns:a16="http://schemas.microsoft.com/office/drawing/2014/main" id="{5318069C-F94F-C44E-C313-76BF4774DA5B}"/>
+          <p:cNvPr id="10" name="正方形/長方形 9">
+            <a:extLst>
+              <a:ext uri="{FF2B5EF4-FFF2-40B4-BE49-F238E27FC236}">
+                <a16:creationId xmlns:a16="http://schemas.microsoft.com/office/drawing/2014/main" id="{2E1FAD86-D865-4191-C9CF-BB3A828300FD}"/>
               </a:ext>
             </a:extLst>
           </p:cNvPr>
@@ -8948,8 +8948,8 @@
         </p:nvSpPr>
         <p:spPr>
           <a:xfrm>
-            <a:off x="4896928" y="4999381"/>
-            <a:ext cx="2239367" cy="437322"/>
+            <a:off x="5231337" y="4959626"/>
+            <a:ext cx="2239367" cy="427382"/>
           </a:xfrm>
           <a:prstGeom prst="rect">
             <a:avLst/>
@@ -8986,36 +8986,6 @@
           </a:p>
         </p:txBody>
       </p:sp>
-      <p:pic>
-        <p:nvPicPr>
-          <p:cNvPr id="2" name="図 1">
-            <a:extLst>
-              <a:ext uri="{FF2B5EF4-FFF2-40B4-BE49-F238E27FC236}">
-                <a16:creationId xmlns:a16="http://schemas.microsoft.com/office/drawing/2014/main" id="{361F1B90-9D70-B2FB-2B1F-019FB95835ED}"/>
-              </a:ext>
-            </a:extLst>
-          </p:cNvPr>
-          <p:cNvPicPr>
-            <a:picLocks noChangeAspect="1"/>
-          </p:cNvPicPr>
-          <p:nvPr/>
-        </p:nvPicPr>
-        <p:blipFill>
-          <a:blip r:embed="rId3"/>
-          <a:stretch>
-            <a:fillRect/>
-          </a:stretch>
-        </p:blipFill>
-        <p:spPr>
-          <a:xfrm>
-            <a:off x="1696581" y="610395"/>
-            <a:ext cx="2712955" cy="5035732"/>
-          </a:xfrm>
-          <a:prstGeom prst="rect">
-            <a:avLst/>
-          </a:prstGeom>
-        </p:spPr>
-      </p:pic>
     </p:spTree>
     <p:extLst>
       <p:ext uri="{BB962C8B-B14F-4D97-AF65-F5344CB8AC3E}">
@@ -9815,7 +9785,7 @@
         <p:spPr>
           <a:xfrm>
             <a:off x="4686300" y="461962"/>
-            <a:ext cx="2819400" cy="5934075"/>
+            <a:ext cx="2082248" cy="4382570"/>
           </a:xfrm>
           <a:prstGeom prst="rect">
             <a:avLst/>

--- a/tool/smstokintone/docs/プレゼンテーション1.pptx
+++ b/tool/smstokintone/docs/プレゼンテーション1.pptx
@@ -8020,36 +8020,6 @@
           </a:p>
         </p:txBody>
       </p:sp>
-      <p:pic>
-        <p:nvPicPr>
-          <p:cNvPr id="15" name="図 14">
-            <a:extLst>
-              <a:ext uri="{FF2B5EF4-FFF2-40B4-BE49-F238E27FC236}">
-                <a16:creationId xmlns:a16="http://schemas.microsoft.com/office/drawing/2014/main" id="{56AE47C3-BB1C-07A9-26A0-D79A8A79A444}"/>
-              </a:ext>
-            </a:extLst>
-          </p:cNvPr>
-          <p:cNvPicPr>
-            <a:picLocks noChangeAspect="1"/>
-          </p:cNvPicPr>
-          <p:nvPr/>
-        </p:nvPicPr>
-        <p:blipFill>
-          <a:blip r:embed="rId4"/>
-          <a:stretch>
-            <a:fillRect/>
-          </a:stretch>
-        </p:blipFill>
-        <p:spPr>
-          <a:xfrm>
-            <a:off x="3745788" y="1179381"/>
-            <a:ext cx="4700423" cy="4499238"/>
-          </a:xfrm>
-          <a:prstGeom prst="rect">
-            <a:avLst/>
-          </a:prstGeom>
-        </p:spPr>
-      </p:pic>
     </p:spTree>
     <p:extLst>
       <p:ext uri="{BB962C8B-B14F-4D97-AF65-F5344CB8AC3E}">
@@ -8210,36 +8180,6 @@
           </a:p>
         </p:txBody>
       </p:sp>
-      <p:pic>
-        <p:nvPicPr>
-          <p:cNvPr id="2" name="図 1">
-            <a:extLst>
-              <a:ext uri="{FF2B5EF4-FFF2-40B4-BE49-F238E27FC236}">
-                <a16:creationId xmlns:a16="http://schemas.microsoft.com/office/drawing/2014/main" id="{19150882-7D0A-BC00-7214-FE8715052713}"/>
-              </a:ext>
-            </a:extLst>
-          </p:cNvPr>
-          <p:cNvPicPr>
-            <a:picLocks noChangeAspect="1"/>
-          </p:cNvPicPr>
-          <p:nvPr/>
-        </p:nvPicPr>
-        <p:blipFill>
-          <a:blip r:embed="rId4"/>
-          <a:stretch>
-            <a:fillRect/>
-          </a:stretch>
-        </p:blipFill>
-        <p:spPr>
-          <a:xfrm>
-            <a:off x="3745788" y="1179381"/>
-            <a:ext cx="4700423" cy="4499238"/>
-          </a:xfrm>
-          <a:prstGeom prst="rect">
-            <a:avLst/>
-          </a:prstGeom>
-        </p:spPr>
-      </p:pic>
     </p:spTree>
     <p:extLst>
       <p:ext uri="{BB962C8B-B14F-4D97-AF65-F5344CB8AC3E}">
@@ -8986,6 +8926,36 @@
           </a:p>
         </p:txBody>
       </p:sp>
+      <p:pic>
+        <p:nvPicPr>
+          <p:cNvPr id="11" name="図 10">
+            <a:extLst>
+              <a:ext uri="{FF2B5EF4-FFF2-40B4-BE49-F238E27FC236}">
+                <a16:creationId xmlns:a16="http://schemas.microsoft.com/office/drawing/2014/main" id="{ED040F51-1BC3-2082-CBD8-B67FA2619805}"/>
+              </a:ext>
+            </a:extLst>
+          </p:cNvPr>
+          <p:cNvPicPr>
+            <a:picLocks noChangeAspect="1"/>
+          </p:cNvPicPr>
+          <p:nvPr/>
+        </p:nvPicPr>
+        <p:blipFill>
+          <a:blip r:embed="rId3"/>
+          <a:stretch>
+            <a:fillRect/>
+          </a:stretch>
+        </p:blipFill>
+        <p:spPr>
+          <a:xfrm>
+            <a:off x="1731679" y="-416997"/>
+            <a:ext cx="2645893" cy="4968671"/>
+          </a:xfrm>
+          <a:prstGeom prst="rect">
+            <a:avLst/>
+          </a:prstGeom>
+        </p:spPr>
+      </p:pic>
     </p:spTree>
     <p:extLst>
       <p:ext uri="{BB962C8B-B14F-4D97-AF65-F5344CB8AC3E}">
@@ -9758,10 +9728,10 @@
       </p:grpSpPr>
       <p:pic>
         <p:nvPicPr>
-          <p:cNvPr id="9" name="図 8">
-            <a:extLst>
-              <a:ext uri="{FF2B5EF4-FFF2-40B4-BE49-F238E27FC236}">
-                <a16:creationId xmlns:a16="http://schemas.microsoft.com/office/drawing/2014/main" id="{E1EC8218-8151-5AD3-F2A7-F6C24CAE56B3}"/>
+          <p:cNvPr id="12" name="図 11">
+            <a:extLst>
+              <a:ext uri="{FF2B5EF4-FFF2-40B4-BE49-F238E27FC236}">
+                <a16:creationId xmlns:a16="http://schemas.microsoft.com/office/drawing/2014/main" id="{6326D1D7-C883-0FCC-8A0C-6801451B4297}"/>
               </a:ext>
             </a:extLst>
           </p:cNvPr>
@@ -9784,8 +9754,8 @@
         </p:blipFill>
         <p:spPr>
           <a:xfrm>
-            <a:off x="4686300" y="461962"/>
-            <a:ext cx="2082248" cy="4382570"/>
+            <a:off x="4733925" y="1257300"/>
+            <a:ext cx="2724150" cy="4343400"/>
           </a:xfrm>
           <a:prstGeom prst="rect">
             <a:avLst/>
@@ -10364,10 +10334,10 @@
       </p:grpSpPr>
       <p:pic>
         <p:nvPicPr>
-          <p:cNvPr id="3" name="図 2">
-            <a:extLst>
-              <a:ext uri="{FF2B5EF4-FFF2-40B4-BE49-F238E27FC236}">
-                <a16:creationId xmlns:a16="http://schemas.microsoft.com/office/drawing/2014/main" id="{729D42A0-8750-3EE5-0974-17AB1F205A3D}"/>
+          <p:cNvPr id="6" name="図 5">
+            <a:extLst>
+              <a:ext uri="{FF2B5EF4-FFF2-40B4-BE49-F238E27FC236}">
+                <a16:creationId xmlns:a16="http://schemas.microsoft.com/office/drawing/2014/main" id="{6AD33A4E-8925-59D7-5724-4370DF351DCA}"/>
               </a:ext>
             </a:extLst>
           </p:cNvPr>
@@ -10390,8 +10360,8 @@
         </p:blipFill>
         <p:spPr>
           <a:xfrm>
-            <a:off x="4686300" y="461962"/>
-            <a:ext cx="2819400" cy="5934075"/>
+            <a:off x="4951747" y="919369"/>
+            <a:ext cx="2820773" cy="4497457"/>
           </a:xfrm>
           <a:prstGeom prst="rect">
             <a:avLst/>
@@ -10412,7 +10382,7 @@
         </p:nvSpPr>
         <p:spPr>
           <a:xfrm>
-            <a:off x="4799979" y="6067633"/>
+            <a:off x="5025011" y="4944513"/>
             <a:ext cx="2634491" cy="348282"/>
           </a:xfrm>
           <a:prstGeom prst="rect">
@@ -10452,10 +10422,10 @@
       </p:sp>
       <p:pic>
         <p:nvPicPr>
-          <p:cNvPr id="5" name="図 4">
-            <a:extLst>
-              <a:ext uri="{FF2B5EF4-FFF2-40B4-BE49-F238E27FC236}">
-                <a16:creationId xmlns:a16="http://schemas.microsoft.com/office/drawing/2014/main" id="{FB051E8E-B4A7-88DF-157B-D22CA942D5D6}"/>
+          <p:cNvPr id="7" name="図 6">
+            <a:extLst>
+              <a:ext uri="{FF2B5EF4-FFF2-40B4-BE49-F238E27FC236}">
+                <a16:creationId xmlns:a16="http://schemas.microsoft.com/office/drawing/2014/main" id="{5927A06C-F959-3479-E1CB-81B213AFDB55}"/>
               </a:ext>
             </a:extLst>
           </p:cNvPr>
@@ -10472,8 +10442,8 @@
         </p:blipFill>
         <p:spPr>
           <a:xfrm>
-            <a:off x="1715902" y="633593"/>
-            <a:ext cx="2816596" cy="5968501"/>
+            <a:off x="1017114" y="990538"/>
+            <a:ext cx="2822693" cy="4499238"/>
           </a:xfrm>
           <a:prstGeom prst="rect">
             <a:avLst/>
